--- a/Hash index.pptx
+++ b/Hash index.pptx
@@ -6,6 +6,18 @@
   </p:sldMasterIdLst>
   <p:sldIdLst>
     <p:sldId id="256" r:id="rId2"/>
+    <p:sldId id="257" r:id="rId3"/>
+    <p:sldId id="258" r:id="rId4"/>
+    <p:sldId id="259" r:id="rId5"/>
+    <p:sldId id="260" r:id="rId6"/>
+    <p:sldId id="261" r:id="rId7"/>
+    <p:sldId id="262" r:id="rId8"/>
+    <p:sldId id="263" r:id="rId9"/>
+    <p:sldId id="264" r:id="rId10"/>
+    <p:sldId id="265" r:id="rId11"/>
+    <p:sldId id="266" r:id="rId12"/>
+    <p:sldId id="267" r:id="rId13"/>
+    <p:sldId id="268" r:id="rId14"/>
   </p:sldIdLst>
   <p:sldSz cx="12192000" cy="6858000"/>
   <p:notesSz cx="6858000" cy="9144000"/>
@@ -104,6 +116,11 @@
       </a:defRPr>
     </a:lvl9pPr>
   </p:defaultTextStyle>
+  <p:extLst>
+    <p:ext uri="{EFAFB233-063F-42B5-8137-9DF3F51BA10A}">
+      <p15:sldGuideLst xmlns:p15="http://schemas.microsoft.com/office/powerpoint/2012/main"/>
+    </p:ext>
+  </p:extLst>
 </p:presentation>
 </file>
 
@@ -254,7 +271,7 @@
           <a:p>
             <a:fld id="{754CC5F5-036B-46E0-9F32-16A853B39F2F}" type="datetimeFigureOut">
               <a:rPr lang="en-US" smtClean="0"/>
-              <a:t>5/12/2026</a:t>
+              <a:t>5/21/2026</a:t>
             </a:fld>
             <a:endParaRPr lang="en-US"/>
           </a:p>
@@ -452,7 +469,7 @@
           <a:p>
             <a:fld id="{754CC5F5-036B-46E0-9F32-16A853B39F2F}" type="datetimeFigureOut">
               <a:rPr lang="en-US" smtClean="0"/>
-              <a:t>5/12/2026</a:t>
+              <a:t>5/21/2026</a:t>
             </a:fld>
             <a:endParaRPr lang="en-US"/>
           </a:p>
@@ -660,7 +677,7 @@
           <a:p>
             <a:fld id="{754CC5F5-036B-46E0-9F32-16A853B39F2F}" type="datetimeFigureOut">
               <a:rPr lang="en-US" smtClean="0"/>
-              <a:t>5/12/2026</a:t>
+              <a:t>5/21/2026</a:t>
             </a:fld>
             <a:endParaRPr lang="en-US"/>
           </a:p>
@@ -858,7 +875,7 @@
           <a:p>
             <a:fld id="{754CC5F5-036B-46E0-9F32-16A853B39F2F}" type="datetimeFigureOut">
               <a:rPr lang="en-US" smtClean="0"/>
-              <a:t>5/12/2026</a:t>
+              <a:t>5/21/2026</a:t>
             </a:fld>
             <a:endParaRPr lang="en-US"/>
           </a:p>
@@ -1133,7 +1150,7 @@
           <a:p>
             <a:fld id="{754CC5F5-036B-46E0-9F32-16A853B39F2F}" type="datetimeFigureOut">
               <a:rPr lang="en-US" smtClean="0"/>
-              <a:t>5/12/2026</a:t>
+              <a:t>5/21/2026</a:t>
             </a:fld>
             <a:endParaRPr lang="en-US"/>
           </a:p>
@@ -1398,7 +1415,7 @@
           <a:p>
             <a:fld id="{754CC5F5-036B-46E0-9F32-16A853B39F2F}" type="datetimeFigureOut">
               <a:rPr lang="en-US" smtClean="0"/>
-              <a:t>5/12/2026</a:t>
+              <a:t>5/21/2026</a:t>
             </a:fld>
             <a:endParaRPr lang="en-US"/>
           </a:p>
@@ -1810,7 +1827,7 @@
           <a:p>
             <a:fld id="{754CC5F5-036B-46E0-9F32-16A853B39F2F}" type="datetimeFigureOut">
               <a:rPr lang="en-US" smtClean="0"/>
-              <a:t>5/12/2026</a:t>
+              <a:t>5/21/2026</a:t>
             </a:fld>
             <a:endParaRPr lang="en-US"/>
           </a:p>
@@ -1951,7 +1968,7 @@
           <a:p>
             <a:fld id="{754CC5F5-036B-46E0-9F32-16A853B39F2F}" type="datetimeFigureOut">
               <a:rPr lang="en-US" smtClean="0"/>
-              <a:t>5/12/2026</a:t>
+              <a:t>5/21/2026</a:t>
             </a:fld>
             <a:endParaRPr lang="en-US"/>
           </a:p>
@@ -2064,7 +2081,7 @@
           <a:p>
             <a:fld id="{754CC5F5-036B-46E0-9F32-16A853B39F2F}" type="datetimeFigureOut">
               <a:rPr lang="en-US" smtClean="0"/>
-              <a:t>5/12/2026</a:t>
+              <a:t>5/21/2026</a:t>
             </a:fld>
             <a:endParaRPr lang="en-US"/>
           </a:p>
@@ -2375,7 +2392,7 @@
           <a:p>
             <a:fld id="{754CC5F5-036B-46E0-9F32-16A853B39F2F}" type="datetimeFigureOut">
               <a:rPr lang="en-US" smtClean="0"/>
-              <a:t>5/12/2026</a:t>
+              <a:t>5/21/2026</a:t>
             </a:fld>
             <a:endParaRPr lang="en-US"/>
           </a:p>
@@ -2663,7 +2680,7 @@
           <a:p>
             <a:fld id="{754CC5F5-036B-46E0-9F32-16A853B39F2F}" type="datetimeFigureOut">
               <a:rPr lang="en-US" smtClean="0"/>
-              <a:t>5/12/2026</a:t>
+              <a:t>5/21/2026</a:t>
             </a:fld>
             <a:endParaRPr lang="en-US"/>
           </a:p>
@@ -2904,7 +2921,7 @@
           <a:p>
             <a:fld id="{754CC5F5-036B-46E0-9F32-16A853B39F2F}" type="datetimeFigureOut">
               <a:rPr lang="en-US" smtClean="0"/>
-              <a:t>5/12/2026</a:t>
+              <a:t>5/21/2026</a:t>
             </a:fld>
             <a:endParaRPr lang="en-US"/>
           </a:p>
@@ -3344,17 +3361,168 @@
           <a:p>
             <a:r>
               <a:rPr lang="en-US" dirty="0"/>
-              <a:t>Hash index</a:t>
-            </a:r>
+              <a:t>Hash </a:t>
+            </a:r>
+            <a:r>
+              <a:rPr lang="en-US" dirty="0" err="1"/>
+              <a:t>indeksi</a:t>
+            </a:r>
+            <a:r>
+              <a:rPr lang="en-US" dirty="0"/>
+              <a:t> </a:t>
+            </a:r>
+            <a:r>
+              <a:rPr lang="sr-Latn-RS" dirty="0"/>
+              <a:t>i njihova ograničenja</a:t>
+            </a:r>
+            <a:endParaRPr lang="en-US" dirty="0"/>
           </a:p>
         </p:txBody>
       </p:sp>
       <p:sp>
         <p:nvSpPr>
-          <p:cNvPr id="3" name="Subtitle 2">
+          <p:cNvPr id="4" name="TextBox 3">
             <a:extLst>
               <a:ext uri="{FF2B5EF4-FFF2-40B4-BE49-F238E27FC236}">
-                <a16:creationId xmlns:a16="http://schemas.microsoft.com/office/drawing/2014/main" id="{AA8BA280-FC97-4E81-870D-06D491140DC2}"/>
+                <a16:creationId xmlns:a16="http://schemas.microsoft.com/office/drawing/2014/main" id="{CBEE60CA-B500-4B56-8743-E56B5A58E6D7}"/>
+              </a:ext>
+            </a:extLst>
+          </p:cNvPr>
+          <p:cNvSpPr txBox="1"/>
+          <p:nvPr/>
+        </p:nvSpPr>
+        <p:spPr>
+          <a:xfrm>
+            <a:off x="578840" y="5257800"/>
+            <a:ext cx="4295164" cy="369332"/>
+          </a:xfrm>
+          <a:prstGeom prst="rect">
+            <a:avLst/>
+          </a:prstGeom>
+          <a:noFill/>
+        </p:spPr>
+        <p:txBody>
+          <a:bodyPr wrap="square" rtlCol="0">
+            <a:spAutoFit/>
+          </a:bodyPr>
+          <a:lstStyle/>
+          <a:p>
+            <a:r>
+              <a:rPr lang="sr-Latn-RS" dirty="0"/>
+              <a:t>Mentor: Prof. dr Aleksandar Stanimirović</a:t>
+            </a:r>
+            <a:endParaRPr lang="en-US" dirty="0"/>
+          </a:p>
+        </p:txBody>
+      </p:sp>
+      <p:sp>
+        <p:nvSpPr>
+          <p:cNvPr id="5" name="TextBox 4">
+            <a:extLst>
+              <a:ext uri="{FF2B5EF4-FFF2-40B4-BE49-F238E27FC236}">
+                <a16:creationId xmlns:a16="http://schemas.microsoft.com/office/drawing/2014/main" id="{3D3D00D2-6386-4172-A705-187E7B87D68B}"/>
+              </a:ext>
+            </a:extLst>
+          </p:cNvPr>
+          <p:cNvSpPr txBox="1"/>
+          <p:nvPr/>
+        </p:nvSpPr>
+        <p:spPr>
+          <a:xfrm>
+            <a:off x="8263158" y="5257800"/>
+            <a:ext cx="3350002" cy="369332"/>
+          </a:xfrm>
+          <a:prstGeom prst="rect">
+            <a:avLst/>
+          </a:prstGeom>
+          <a:noFill/>
+        </p:spPr>
+        <p:txBody>
+          <a:bodyPr wrap="square" rtlCol="0">
+            <a:spAutoFit/>
+          </a:bodyPr>
+          <a:lstStyle/>
+          <a:p>
+            <a:r>
+              <a:rPr lang="sr-Latn-RS" dirty="0"/>
+              <a:t>Student: Mihajlo Bencun 1992</a:t>
+            </a:r>
+            <a:endParaRPr lang="en-US" dirty="0"/>
+          </a:p>
+        </p:txBody>
+      </p:sp>
+      <p:sp>
+        <p:nvSpPr>
+          <p:cNvPr id="6" name="TextBox 5">
+            <a:extLst>
+              <a:ext uri="{FF2B5EF4-FFF2-40B4-BE49-F238E27FC236}">
+                <a16:creationId xmlns:a16="http://schemas.microsoft.com/office/drawing/2014/main" id="{C3C923B6-F02A-4368-B0D2-17A4481C5CC2}"/>
+              </a:ext>
+            </a:extLst>
+          </p:cNvPr>
+          <p:cNvSpPr txBox="1"/>
+          <p:nvPr/>
+        </p:nvSpPr>
+        <p:spPr>
+          <a:xfrm>
+            <a:off x="5521354" y="5830349"/>
+            <a:ext cx="1149291" cy="369332"/>
+          </a:xfrm>
+          <a:prstGeom prst="rect">
+            <a:avLst/>
+          </a:prstGeom>
+          <a:noFill/>
+        </p:spPr>
+        <p:txBody>
+          <a:bodyPr wrap="square" rtlCol="0">
+            <a:spAutoFit/>
+          </a:bodyPr>
+          <a:lstStyle/>
+          <a:p>
+            <a:r>
+              <a:rPr lang="sr-Latn-RS" dirty="0"/>
+              <a:t>maj 2026.</a:t>
+            </a:r>
+            <a:endParaRPr lang="en-US" dirty="0"/>
+          </a:p>
+        </p:txBody>
+      </p:sp>
+    </p:spTree>
+    <p:extLst>
+      <p:ext uri="{BB962C8B-B14F-4D97-AF65-F5344CB8AC3E}">
+        <p14:creationId xmlns:p14="http://schemas.microsoft.com/office/powerpoint/2010/main" val="4003076690"/>
+      </p:ext>
+    </p:extLst>
+  </p:cSld>
+  <p:clrMapOvr>
+    <a:masterClrMapping/>
+  </p:clrMapOvr>
+</p:sld>
+</file>
+
+<file path=ppt/slides/slide10.xml><?xml version="1.0" encoding="utf-8"?>
+<p:sld xmlns:a="http://schemas.openxmlformats.org/drawingml/2006/main" xmlns:r="http://schemas.openxmlformats.org/officeDocument/2006/relationships" xmlns:p="http://schemas.openxmlformats.org/presentationml/2006/main">
+  <p:cSld>
+    <p:spTree>
+      <p:nvGrpSpPr>
+        <p:cNvPr id="1" name=""/>
+        <p:cNvGrpSpPr/>
+        <p:nvPr/>
+      </p:nvGrpSpPr>
+      <p:grpSpPr>
+        <a:xfrm>
+          <a:off x="0" y="0"/>
+          <a:ext cx="0" cy="0"/>
+          <a:chOff x="0" y="0"/>
+          <a:chExt cx="0" cy="0"/>
+        </a:xfrm>
+      </p:grpSpPr>
+      <p:sp>
+        <p:nvSpPr>
+          <p:cNvPr id="2" name="Title 1">
+            <a:extLst>
+              <a:ext uri="{FF2B5EF4-FFF2-40B4-BE49-F238E27FC236}">
+                <a16:creationId xmlns:a16="http://schemas.microsoft.com/office/drawing/2014/main" id="{FC651593-7DFD-41D2-87EF-FFCA9A3EA889}"/>
               </a:ext>
             </a:extLst>
           </p:cNvPr>
@@ -3362,7 +3530,7 @@
             <a:spLocks noGrp="1"/>
           </p:cNvSpPr>
           <p:nvPr>
-            <p:ph type="subTitle" idx="1"/>
+            <p:ph type="title"/>
           </p:nvPr>
         </p:nvSpPr>
         <p:spPr/>
@@ -3370,14 +3538,6916 @@
           <a:bodyPr/>
           <a:lstStyle/>
           <a:p>
+            <a:r>
+              <a:rPr lang="sr-Latn-RS" dirty="0"/>
+              <a:t>Ograničenja </a:t>
+            </a:r>
+            <a:r>
+              <a:rPr lang="sr-Latn-RS" dirty="0" err="1"/>
+              <a:t>hash</a:t>
+            </a:r>
+            <a:r>
+              <a:rPr lang="sr-Latn-RS" dirty="0"/>
+              <a:t> indeksa</a:t>
+            </a:r>
             <a:endParaRPr lang="en-US" dirty="0"/>
+          </a:p>
+        </p:txBody>
+      </p:sp>
+      <p:sp>
+        <p:nvSpPr>
+          <p:cNvPr id="4" name="Rectangle 1">
+            <a:extLst>
+              <a:ext uri="{FF2B5EF4-FFF2-40B4-BE49-F238E27FC236}">
+                <a16:creationId xmlns:a16="http://schemas.microsoft.com/office/drawing/2014/main" id="{6EBEFF7A-20DC-49F7-A0DF-7B6B2A286100}"/>
+              </a:ext>
+            </a:extLst>
+          </p:cNvPr>
+          <p:cNvSpPr>
+            <a:spLocks noGrp="1" noChangeArrowheads="1"/>
+          </p:cNvSpPr>
+          <p:nvPr>
+            <p:ph idx="1"/>
+          </p:nvPr>
+        </p:nvSpPr>
+        <p:spPr bwMode="auto">
+          <a:xfrm>
+            <a:off x="838200" y="2216191"/>
+            <a:ext cx="5359609" cy="3570208"/>
+          </a:xfrm>
+          <a:prstGeom prst="rect">
+            <a:avLst/>
+          </a:prstGeom>
+          <a:noFill/>
+          <a:ln>
+            <a:noFill/>
+          </a:ln>
+          <a:effectLst/>
+          <a:extLst>
+            <a:ext uri="{909E8E84-426E-40DD-AFC4-6F175D3DCCD1}">
+              <a14:hiddenFill xmlns:a14="http://schemas.microsoft.com/office/drawing/2010/main">
+                <a:solidFill>
+                  <a:schemeClr val="accent1"/>
+                </a:solidFill>
+              </a14:hiddenFill>
+            </a:ext>
+            <a:ext uri="{91240B29-F687-4F45-9708-019B960494DF}">
+              <a14:hiddenLine xmlns:a14="http://schemas.microsoft.com/office/drawing/2010/main" w="9525">
+                <a:solidFill>
+                  <a:schemeClr val="tx1"/>
+                </a:solidFill>
+                <a:miter lim="800000"/>
+                <a:headEnd/>
+                <a:tailEnd/>
+              </a14:hiddenLine>
+            </a:ext>
+            <a:ext uri="{AF507438-7753-43E0-B8FC-AC1667EBCBE1}">
+              <a14:hiddenEffects xmlns:a14="http://schemas.microsoft.com/office/drawing/2010/main">
+                <a:effectLst>
+                  <a:outerShdw dist="35921" dir="2700000" algn="ctr" rotWithShape="0">
+                    <a:schemeClr val="bg2"/>
+                  </a:outerShdw>
+                </a:effectLst>
+              </a14:hiddenEffects>
+            </a:ext>
+          </a:extLst>
+        </p:spPr>
+        <p:txBody>
+          <a:bodyPr vert="horz" wrap="none" lIns="91440" tIns="45720" rIns="91440" bIns="45720" numCol="1" anchor="ctr" anchorCtr="0" compatLnSpc="1">
+            <a:prstTxWarp prst="textNoShape">
+              <a:avLst/>
+            </a:prstTxWarp>
+            <a:spAutoFit/>
+          </a:bodyPr>
+          <a:lstStyle/>
+          <a:p>
+            <a:pPr eaLnBrk="0" fontAlgn="base" hangingPunct="0">
+              <a:lnSpc>
+                <a:spcPct val="100000"/>
+              </a:lnSpc>
+              <a:spcBef>
+                <a:spcPct val="0"/>
+              </a:spcBef>
+              <a:spcAft>
+                <a:spcPct val="0"/>
+              </a:spcAft>
+            </a:pPr>
+            <a:r>
+              <a:rPr kumimoji="0" lang="en-US" altLang="en-US" sz="2600" b="0" i="0" u="none" strike="noStrike" cap="none" normalizeH="0" baseline="0" dirty="0" err="1">
+                <a:ln>
+                  <a:noFill/>
+                </a:ln>
+                <a:solidFill>
+                  <a:schemeClr val="tx1"/>
+                </a:solidFill>
+                <a:effectLst/>
+              </a:rPr>
+              <a:t>Podržava</a:t>
+            </a:r>
+            <a:r>
+              <a:rPr kumimoji="0" lang="en-US" altLang="en-US" sz="2600" b="0" i="0" u="none" strike="noStrike" cap="none" normalizeH="0" baseline="0" dirty="0">
+                <a:ln>
+                  <a:noFill/>
+                </a:ln>
+                <a:solidFill>
+                  <a:schemeClr val="tx1"/>
+                </a:solidFill>
+                <a:effectLst/>
+              </a:rPr>
+              <a:t> </a:t>
+            </a:r>
+            <a:r>
+              <a:rPr kumimoji="0" lang="en-US" altLang="en-US" sz="2600" b="0" i="0" u="none" strike="noStrike" cap="none" normalizeH="0" baseline="0" dirty="0" err="1">
+                <a:ln>
+                  <a:noFill/>
+                </a:ln>
+                <a:solidFill>
+                  <a:schemeClr val="tx1"/>
+                </a:solidFill>
+                <a:effectLst/>
+              </a:rPr>
+              <a:t>samo</a:t>
+            </a:r>
+            <a:r>
+              <a:rPr kumimoji="0" lang="en-US" altLang="en-US" sz="2600" b="0" i="0" u="none" strike="noStrike" cap="none" normalizeH="0" baseline="0" dirty="0">
+                <a:ln>
+                  <a:noFill/>
+                </a:ln>
+                <a:solidFill>
+                  <a:schemeClr val="tx1"/>
+                </a:solidFill>
+                <a:effectLst/>
+              </a:rPr>
+              <a:t> operator</a:t>
+            </a:r>
+            <a:r>
+              <a:rPr kumimoji="0" lang="sr-Latn-RS" altLang="en-US" sz="2600" b="0" i="0" u="none" strike="noStrike" cap="none" normalizeH="0" dirty="0">
+                <a:ln>
+                  <a:noFill/>
+                </a:ln>
+                <a:solidFill>
+                  <a:schemeClr val="tx1"/>
+                </a:solidFill>
+                <a:effectLst/>
+              </a:rPr>
+              <a:t> </a:t>
+            </a:r>
+            <a:r>
+              <a:rPr lang="en-US" altLang="en-US" sz="2600" dirty="0"/>
+              <a:t>=</a:t>
+            </a:r>
+            <a:endParaRPr kumimoji="0" lang="en-US" altLang="en-US" sz="2600" b="0" i="0" u="none" strike="noStrike" cap="none" normalizeH="0" baseline="0" dirty="0">
+              <a:ln>
+                <a:noFill/>
+              </a:ln>
+              <a:solidFill>
+                <a:schemeClr val="tx1"/>
+              </a:solidFill>
+              <a:effectLst/>
+            </a:endParaRPr>
+          </a:p>
+          <a:p>
+            <a:pPr eaLnBrk="0" fontAlgn="base" hangingPunct="0">
+              <a:lnSpc>
+                <a:spcPct val="100000"/>
+              </a:lnSpc>
+              <a:spcBef>
+                <a:spcPct val="0"/>
+              </a:spcBef>
+              <a:spcAft>
+                <a:spcPct val="0"/>
+              </a:spcAft>
+            </a:pPr>
+            <a:r>
+              <a:rPr kumimoji="0" lang="en-US" altLang="en-US" sz="2600" b="0" i="0" u="none" strike="noStrike" cap="none" normalizeH="0" baseline="0" dirty="0">
+                <a:ln>
+                  <a:noFill/>
+                </a:ln>
+                <a:solidFill>
+                  <a:schemeClr val="tx1"/>
+                </a:solidFill>
+                <a:effectLst/>
+              </a:rPr>
+              <a:t>Ne </a:t>
+            </a:r>
+            <a:r>
+              <a:rPr kumimoji="0" lang="en-US" altLang="en-US" sz="2600" b="0" i="0" u="none" strike="noStrike" cap="none" normalizeH="0" baseline="0" dirty="0" err="1">
+                <a:ln>
+                  <a:noFill/>
+                </a:ln>
+                <a:solidFill>
+                  <a:schemeClr val="tx1"/>
+                </a:solidFill>
+                <a:effectLst/>
+              </a:rPr>
+              <a:t>podržava</a:t>
+            </a:r>
+            <a:r>
+              <a:rPr kumimoji="0" lang="en-US" altLang="en-US" sz="2600" b="0" i="0" u="none" strike="noStrike" cap="none" normalizeH="0" baseline="0" dirty="0">
+                <a:ln>
+                  <a:noFill/>
+                </a:ln>
+                <a:solidFill>
+                  <a:schemeClr val="tx1"/>
+                </a:solidFill>
+                <a:effectLst/>
+              </a:rPr>
+              <a:t>: </a:t>
+            </a:r>
+          </a:p>
+          <a:p>
+            <a:pPr lvl="1" eaLnBrk="0" fontAlgn="base" hangingPunct="0">
+              <a:lnSpc>
+                <a:spcPct val="100000"/>
+              </a:lnSpc>
+              <a:spcBef>
+                <a:spcPct val="0"/>
+              </a:spcBef>
+              <a:spcAft>
+                <a:spcPct val="0"/>
+              </a:spcAft>
+            </a:pPr>
+            <a:r>
+              <a:rPr kumimoji="0" lang="en-US" altLang="en-US" sz="2600" b="0" i="0" u="none" strike="noStrike" cap="none" normalizeH="0" baseline="0" dirty="0" err="1">
+                <a:ln>
+                  <a:noFill/>
+                </a:ln>
+                <a:solidFill>
+                  <a:schemeClr val="tx1"/>
+                </a:solidFill>
+                <a:effectLst/>
+              </a:rPr>
+              <a:t>sortiranje</a:t>
+            </a:r>
+            <a:r>
+              <a:rPr kumimoji="0" lang="en-US" altLang="en-US" sz="2600" b="0" i="0" u="none" strike="noStrike" cap="none" normalizeH="0" baseline="0" dirty="0">
+                <a:ln>
+                  <a:noFill/>
+                </a:ln>
+                <a:solidFill>
+                  <a:schemeClr val="tx1"/>
+                </a:solidFill>
+                <a:effectLst/>
+              </a:rPr>
+              <a:t> </a:t>
+            </a:r>
+          </a:p>
+          <a:p>
+            <a:pPr lvl="1" eaLnBrk="0" fontAlgn="base" hangingPunct="0">
+              <a:lnSpc>
+                <a:spcPct val="100000"/>
+              </a:lnSpc>
+              <a:spcBef>
+                <a:spcPct val="0"/>
+              </a:spcBef>
+              <a:spcAft>
+                <a:spcPct val="0"/>
+              </a:spcAft>
+            </a:pPr>
+            <a:r>
+              <a:rPr kumimoji="0" lang="en-US" altLang="en-US" sz="2600" b="0" i="0" u="none" strike="noStrike" cap="none" normalizeH="0" baseline="0" dirty="0">
+                <a:ln>
+                  <a:noFill/>
+                </a:ln>
+                <a:solidFill>
+                  <a:schemeClr val="tx1"/>
+                </a:solidFill>
+                <a:effectLst/>
+              </a:rPr>
+              <a:t>range </a:t>
+            </a:r>
+            <a:r>
+              <a:rPr kumimoji="0" lang="en-US" altLang="en-US" sz="2600" b="0" i="0" u="none" strike="noStrike" cap="none" normalizeH="0" baseline="0" dirty="0" err="1">
+                <a:ln>
+                  <a:noFill/>
+                </a:ln>
+                <a:solidFill>
+                  <a:schemeClr val="tx1"/>
+                </a:solidFill>
+                <a:effectLst/>
+              </a:rPr>
+              <a:t>upite</a:t>
+            </a:r>
+            <a:r>
+              <a:rPr kumimoji="0" lang="en-US" altLang="en-US" sz="2600" b="0" i="0" u="none" strike="noStrike" cap="none" normalizeH="0" baseline="0" dirty="0">
+                <a:ln>
+                  <a:noFill/>
+                </a:ln>
+                <a:solidFill>
+                  <a:schemeClr val="tx1"/>
+                </a:solidFill>
+                <a:effectLst/>
+              </a:rPr>
+              <a:t> </a:t>
+            </a:r>
+          </a:p>
+          <a:p>
+            <a:pPr lvl="1" eaLnBrk="0" fontAlgn="base" hangingPunct="0">
+              <a:lnSpc>
+                <a:spcPct val="100000"/>
+              </a:lnSpc>
+              <a:spcBef>
+                <a:spcPct val="0"/>
+              </a:spcBef>
+              <a:spcAft>
+                <a:spcPct val="0"/>
+              </a:spcAft>
+            </a:pPr>
+            <a:r>
+              <a:rPr kumimoji="0" lang="en-US" altLang="en-US" sz="2600" b="0" i="0" u="none" strike="noStrike" cap="none" normalizeH="0" baseline="0" dirty="0">
+                <a:ln>
+                  <a:noFill/>
+                </a:ln>
+                <a:solidFill>
+                  <a:schemeClr val="tx1"/>
+                </a:solidFill>
+                <a:effectLst/>
+              </a:rPr>
+              <a:t>&lt;, &gt;, ORDER BY </a:t>
+            </a:r>
+          </a:p>
+          <a:p>
+            <a:pPr eaLnBrk="0" fontAlgn="base" hangingPunct="0">
+              <a:lnSpc>
+                <a:spcPct val="100000"/>
+              </a:lnSpc>
+              <a:spcBef>
+                <a:spcPct val="0"/>
+              </a:spcBef>
+              <a:spcAft>
+                <a:spcPct val="0"/>
+              </a:spcAft>
+            </a:pPr>
+            <a:r>
+              <a:rPr kumimoji="0" lang="en-US" altLang="en-US" sz="2600" b="0" i="0" u="none" strike="noStrike" cap="none" normalizeH="0" baseline="0" dirty="0">
+                <a:ln>
+                  <a:noFill/>
+                </a:ln>
+                <a:solidFill>
+                  <a:schemeClr val="tx1"/>
+                </a:solidFill>
+                <a:effectLst/>
+              </a:rPr>
+              <a:t>Problem </a:t>
+            </a:r>
+            <a:r>
+              <a:rPr kumimoji="0" lang="en-US" altLang="en-US" sz="2600" b="0" i="0" u="none" strike="noStrike" cap="none" normalizeH="0" baseline="0" dirty="0" err="1">
+                <a:ln>
+                  <a:noFill/>
+                </a:ln>
+                <a:solidFill>
+                  <a:schemeClr val="tx1"/>
+                </a:solidFill>
+                <a:effectLst/>
+              </a:rPr>
+              <a:t>kolizije</a:t>
+            </a:r>
+            <a:r>
+              <a:rPr kumimoji="0" lang="en-US" altLang="en-US" sz="2600" b="0" i="0" u="none" strike="noStrike" cap="none" normalizeH="0" baseline="0" dirty="0">
+                <a:ln>
+                  <a:noFill/>
+                </a:ln>
+                <a:solidFill>
+                  <a:schemeClr val="tx1"/>
+                </a:solidFill>
+                <a:effectLst/>
+              </a:rPr>
+              <a:t> </a:t>
+            </a:r>
+          </a:p>
+          <a:p>
+            <a:pPr eaLnBrk="0" fontAlgn="base" hangingPunct="0">
+              <a:lnSpc>
+                <a:spcPct val="100000"/>
+              </a:lnSpc>
+              <a:spcBef>
+                <a:spcPct val="0"/>
+              </a:spcBef>
+              <a:spcAft>
+                <a:spcPct val="0"/>
+              </a:spcAft>
+            </a:pPr>
+            <a:r>
+              <a:rPr kumimoji="0" lang="en-US" altLang="en-US" sz="2600" b="0" i="0" u="none" strike="noStrike" cap="none" normalizeH="0" baseline="0" dirty="0">
+                <a:ln>
+                  <a:noFill/>
+                </a:ln>
+                <a:solidFill>
+                  <a:schemeClr val="tx1"/>
+                </a:solidFill>
+                <a:effectLst/>
+              </a:rPr>
+              <a:t>Overflow </a:t>
+            </a:r>
+            <a:r>
+              <a:rPr kumimoji="0" lang="en-US" altLang="en-US" sz="2600" b="0" i="0" u="none" strike="noStrike" cap="none" normalizeH="0" baseline="0" dirty="0" err="1">
+                <a:ln>
+                  <a:noFill/>
+                </a:ln>
+                <a:solidFill>
+                  <a:schemeClr val="tx1"/>
+                </a:solidFill>
+                <a:effectLst/>
+              </a:rPr>
+              <a:t>stranice</a:t>
+            </a:r>
+            <a:r>
+              <a:rPr kumimoji="0" lang="en-US" altLang="en-US" sz="2600" b="0" i="0" u="none" strike="noStrike" cap="none" normalizeH="0" baseline="0" dirty="0">
+                <a:ln>
+                  <a:noFill/>
+                </a:ln>
+                <a:solidFill>
+                  <a:schemeClr val="tx1"/>
+                </a:solidFill>
+                <a:effectLst/>
+              </a:rPr>
+              <a:t> </a:t>
+            </a:r>
+            <a:r>
+              <a:rPr kumimoji="0" lang="en-US" altLang="en-US" sz="2600" b="0" i="0" u="none" strike="noStrike" cap="none" normalizeH="0" baseline="0" dirty="0" err="1">
+                <a:ln>
+                  <a:noFill/>
+                </a:ln>
+                <a:solidFill>
+                  <a:schemeClr val="tx1"/>
+                </a:solidFill>
+                <a:effectLst/>
+              </a:rPr>
+              <a:t>mogu</a:t>
+            </a:r>
+            <a:r>
+              <a:rPr kumimoji="0" lang="en-US" altLang="en-US" sz="2600" b="0" i="0" u="none" strike="noStrike" cap="none" normalizeH="0" baseline="0" dirty="0">
+                <a:ln>
+                  <a:noFill/>
+                </a:ln>
+                <a:solidFill>
+                  <a:schemeClr val="tx1"/>
+                </a:solidFill>
+                <a:effectLst/>
+              </a:rPr>
+              <a:t> </a:t>
+            </a:r>
+            <a:r>
+              <a:rPr kumimoji="0" lang="en-US" altLang="en-US" sz="2600" b="0" i="0" u="none" strike="noStrike" cap="none" normalizeH="0" baseline="0" dirty="0" err="1">
+                <a:ln>
+                  <a:noFill/>
+                </a:ln>
+                <a:solidFill>
+                  <a:schemeClr val="tx1"/>
+                </a:solidFill>
+                <a:effectLst/>
+              </a:rPr>
+              <a:t>usporiti</a:t>
+            </a:r>
+            <a:r>
+              <a:rPr kumimoji="0" lang="en-US" altLang="en-US" sz="2600" b="0" i="0" u="none" strike="noStrike" cap="none" normalizeH="0" baseline="0" dirty="0">
+                <a:ln>
+                  <a:noFill/>
+                </a:ln>
+                <a:solidFill>
+                  <a:schemeClr val="tx1"/>
+                </a:solidFill>
+                <a:effectLst/>
+              </a:rPr>
+              <a:t> rad </a:t>
+            </a:r>
+          </a:p>
+          <a:p>
+            <a:pPr eaLnBrk="0" fontAlgn="base" hangingPunct="0">
+              <a:lnSpc>
+                <a:spcPct val="100000"/>
+              </a:lnSpc>
+              <a:spcBef>
+                <a:spcPct val="0"/>
+              </a:spcBef>
+              <a:spcAft>
+                <a:spcPct val="0"/>
+              </a:spcAft>
+            </a:pPr>
+            <a:r>
+              <a:rPr kumimoji="0" lang="en-US" altLang="en-US" sz="2600" b="0" i="0" u="none" strike="noStrike" cap="none" normalizeH="0" baseline="0" dirty="0" err="1">
+                <a:ln>
+                  <a:noFill/>
+                </a:ln>
+                <a:solidFill>
+                  <a:schemeClr val="tx1"/>
+                </a:solidFill>
+                <a:effectLst/>
+              </a:rPr>
+              <a:t>Potrebno</a:t>
+            </a:r>
+            <a:r>
+              <a:rPr kumimoji="0" lang="en-US" altLang="en-US" sz="2600" b="0" i="0" u="none" strike="noStrike" cap="none" normalizeH="0" baseline="0" dirty="0">
+                <a:ln>
+                  <a:noFill/>
+                </a:ln>
+                <a:solidFill>
+                  <a:schemeClr val="tx1"/>
+                </a:solidFill>
+                <a:effectLst/>
+              </a:rPr>
+              <a:t> </a:t>
+            </a:r>
+            <a:r>
+              <a:rPr kumimoji="0" lang="en-US" altLang="en-US" sz="2600" b="0" i="0" u="none" strike="noStrike" cap="none" normalizeH="0" baseline="0" dirty="0" err="1">
+                <a:ln>
+                  <a:noFill/>
+                </a:ln>
+                <a:solidFill>
+                  <a:schemeClr val="tx1"/>
+                </a:solidFill>
+                <a:effectLst/>
+              </a:rPr>
+              <a:t>održavanje</a:t>
+            </a:r>
+            <a:r>
+              <a:rPr kumimoji="0" lang="en-US" altLang="en-US" sz="2600" b="0" i="0" u="none" strike="noStrike" cap="none" normalizeH="0" baseline="0" dirty="0">
+                <a:ln>
+                  <a:noFill/>
+                </a:ln>
+                <a:solidFill>
+                  <a:schemeClr val="tx1"/>
+                </a:solidFill>
+                <a:effectLst/>
+              </a:rPr>
+              <a:t> </a:t>
+            </a:r>
+            <a:r>
+              <a:rPr kumimoji="0" lang="en-US" altLang="en-US" sz="2600" b="0" i="0" u="none" strike="noStrike" cap="none" normalizeH="0" baseline="0" dirty="0" err="1">
+                <a:ln>
+                  <a:noFill/>
+                </a:ln>
+                <a:solidFill>
+                  <a:schemeClr val="tx1"/>
+                </a:solidFill>
+                <a:effectLst/>
+              </a:rPr>
+              <a:t>i</a:t>
+            </a:r>
+            <a:r>
+              <a:rPr kumimoji="0" lang="en-US" altLang="en-US" sz="2600" b="0" i="0" u="none" strike="noStrike" cap="none" normalizeH="0" baseline="0" dirty="0">
+                <a:ln>
+                  <a:noFill/>
+                </a:ln>
+                <a:solidFill>
+                  <a:schemeClr val="tx1"/>
+                </a:solidFill>
+                <a:effectLst/>
+              </a:rPr>
+              <a:t> REINDEX </a:t>
+            </a:r>
+          </a:p>
+          <a:p>
+            <a:pPr marL="0" marR="0" lvl="0" indent="0" algn="l" defTabSz="914400" rtl="0" eaLnBrk="0" fontAlgn="base" latinLnBrk="0" hangingPunct="0">
+              <a:lnSpc>
+                <a:spcPct val="100000"/>
+              </a:lnSpc>
+              <a:spcBef>
+                <a:spcPct val="0"/>
+              </a:spcBef>
+              <a:spcAft>
+                <a:spcPct val="0"/>
+              </a:spcAft>
+              <a:buClrTx/>
+              <a:buSzTx/>
+              <a:buFontTx/>
+              <a:buNone/>
+              <a:tabLst/>
+            </a:pPr>
+            <a:endParaRPr kumimoji="0" lang="en-US" altLang="en-US" sz="1800" b="0" i="0" u="none" strike="noStrike" cap="none" normalizeH="0" baseline="0" dirty="0">
+              <a:ln>
+                <a:noFill/>
+              </a:ln>
+              <a:solidFill>
+                <a:schemeClr val="tx1"/>
+              </a:solidFill>
+              <a:effectLst/>
+              <a:latin typeface="Arial" panose="020B0604020202020204" pitchFamily="34" charset="0"/>
+            </a:endParaRPr>
           </a:p>
         </p:txBody>
       </p:sp>
     </p:spTree>
     <p:extLst>
       <p:ext uri="{BB962C8B-B14F-4D97-AF65-F5344CB8AC3E}">
-        <p14:creationId xmlns:p14="http://schemas.microsoft.com/office/powerpoint/2010/main" val="4003076690"/>
+        <p14:creationId xmlns:p14="http://schemas.microsoft.com/office/powerpoint/2010/main" val="3036912016"/>
+      </p:ext>
+    </p:extLst>
+  </p:cSld>
+  <p:clrMapOvr>
+    <a:masterClrMapping/>
+  </p:clrMapOvr>
+</p:sld>
+</file>
+
+<file path=ppt/slides/slide11.xml><?xml version="1.0" encoding="utf-8"?>
+<p:sld xmlns:a="http://schemas.openxmlformats.org/drawingml/2006/main" xmlns:r="http://schemas.openxmlformats.org/officeDocument/2006/relationships" xmlns:p="http://schemas.openxmlformats.org/presentationml/2006/main">
+  <p:cSld>
+    <p:spTree>
+      <p:nvGrpSpPr>
+        <p:cNvPr id="1" name=""/>
+        <p:cNvGrpSpPr/>
+        <p:nvPr/>
+      </p:nvGrpSpPr>
+      <p:grpSpPr>
+        <a:xfrm>
+          <a:off x="0" y="0"/>
+          <a:ext cx="0" cy="0"/>
+          <a:chOff x="0" y="0"/>
+          <a:chExt cx="0" cy="0"/>
+        </a:xfrm>
+      </p:grpSpPr>
+      <p:sp>
+        <p:nvSpPr>
+          <p:cNvPr id="2" name="Title 1">
+            <a:extLst>
+              <a:ext uri="{FF2B5EF4-FFF2-40B4-BE49-F238E27FC236}">
+                <a16:creationId xmlns:a16="http://schemas.microsoft.com/office/drawing/2014/main" id="{5818C0F0-89CA-4E0C-8CDB-2AF1C64A85E6}"/>
+              </a:ext>
+            </a:extLst>
+          </p:cNvPr>
+          <p:cNvSpPr>
+            <a:spLocks noGrp="1"/>
+          </p:cNvSpPr>
+          <p:nvPr>
+            <p:ph type="title"/>
+          </p:nvPr>
+        </p:nvSpPr>
+        <p:spPr>
+          <a:xfrm>
+            <a:off x="838200" y="58815"/>
+            <a:ext cx="10515600" cy="1325563"/>
+          </a:xfrm>
+        </p:spPr>
+        <p:txBody>
+          <a:bodyPr/>
+          <a:lstStyle/>
+          <a:p>
+            <a:r>
+              <a:rPr lang="sr-Latn-RS" dirty="0" err="1"/>
+              <a:t>Hash</a:t>
+            </a:r>
+            <a:r>
+              <a:rPr lang="sr-Latn-RS" dirty="0"/>
+              <a:t> indeks u poređenju sa B </a:t>
+            </a:r>
+            <a:r>
+              <a:rPr lang="sr-Latn-RS" dirty="0" err="1"/>
+              <a:t>tree</a:t>
+            </a:r>
+            <a:r>
+              <a:rPr lang="sr-Latn-RS" dirty="0"/>
+              <a:t> indeksom</a:t>
+            </a:r>
+            <a:endParaRPr lang="en-US" dirty="0"/>
+          </a:p>
+        </p:txBody>
+      </p:sp>
+      <p:sp>
+        <p:nvSpPr>
+          <p:cNvPr id="3" name="Content Placeholder 2">
+            <a:extLst>
+              <a:ext uri="{FF2B5EF4-FFF2-40B4-BE49-F238E27FC236}">
+                <a16:creationId xmlns:a16="http://schemas.microsoft.com/office/drawing/2014/main" id="{A7448D97-B61F-4D10-8712-439EAA7289EA}"/>
+              </a:ext>
+            </a:extLst>
+          </p:cNvPr>
+          <p:cNvSpPr>
+            <a:spLocks noGrp="1"/>
+          </p:cNvSpPr>
+          <p:nvPr>
+            <p:ph idx="1"/>
+          </p:nvPr>
+        </p:nvSpPr>
+        <p:spPr>
+          <a:xfrm>
+            <a:off x="838200" y="1384378"/>
+            <a:ext cx="10515600" cy="4351338"/>
+          </a:xfrm>
+        </p:spPr>
+        <p:txBody>
+          <a:bodyPr>
+            <a:normAutofit/>
+          </a:bodyPr>
+          <a:lstStyle/>
+          <a:p>
+            <a:pPr>
+              <a:buFont typeface="Arial" panose="020B0604020202020204" pitchFamily="34" charset="0"/>
+              <a:buChar char="•"/>
+            </a:pPr>
+            <a:r>
+              <a:rPr lang="en-US" dirty="0"/>
+              <a:t>Hash </a:t>
+            </a:r>
+            <a:r>
+              <a:rPr lang="en-US" dirty="0" err="1"/>
+              <a:t>indeks</a:t>
+            </a:r>
+            <a:r>
+              <a:rPr lang="en-US" dirty="0"/>
+              <a:t>: </a:t>
+            </a:r>
+          </a:p>
+          <a:p>
+            <a:pPr marL="742950" lvl="1" indent="-285750">
+              <a:buFont typeface="Arial" panose="020B0604020202020204" pitchFamily="34" charset="0"/>
+              <a:buChar char="•"/>
+            </a:pPr>
+            <a:r>
+              <a:rPr lang="en-US" dirty="0" err="1"/>
+              <a:t>nešto</a:t>
+            </a:r>
+            <a:r>
+              <a:rPr lang="en-US" dirty="0"/>
+              <a:t> </a:t>
+            </a:r>
+            <a:r>
+              <a:rPr lang="en-US" dirty="0" err="1"/>
+              <a:t>brži</a:t>
+            </a:r>
+            <a:r>
+              <a:rPr lang="en-US" dirty="0"/>
+              <a:t> </a:t>
+            </a:r>
+          </a:p>
+          <a:p>
+            <a:pPr marL="742950" lvl="1" indent="-285750">
+              <a:buFont typeface="Arial" panose="020B0604020202020204" pitchFamily="34" charset="0"/>
+              <a:buChar char="•"/>
+            </a:pPr>
+            <a:r>
+              <a:rPr lang="en-US" dirty="0" err="1"/>
+              <a:t>manji</a:t>
+            </a:r>
+            <a:r>
+              <a:rPr lang="en-US" dirty="0"/>
+              <a:t> </a:t>
+            </a:r>
+            <a:r>
+              <a:rPr lang="en-US" dirty="0" err="1"/>
+              <a:t>na</a:t>
+            </a:r>
+            <a:r>
+              <a:rPr lang="en-US" dirty="0"/>
+              <a:t> </a:t>
+            </a:r>
+            <a:r>
+              <a:rPr lang="en-US" dirty="0" err="1"/>
+              <a:t>disku</a:t>
+            </a:r>
+            <a:r>
+              <a:rPr lang="en-US" dirty="0"/>
+              <a:t> </a:t>
+            </a:r>
+          </a:p>
+          <a:p>
+            <a:pPr>
+              <a:buFont typeface="Arial" panose="020B0604020202020204" pitchFamily="34" charset="0"/>
+              <a:buChar char="•"/>
+            </a:pPr>
+            <a:r>
+              <a:rPr lang="en-US" dirty="0"/>
+              <a:t>B-tree: </a:t>
+            </a:r>
+          </a:p>
+          <a:p>
+            <a:pPr marL="742950" lvl="1" indent="-285750">
+              <a:buFont typeface="Arial" panose="020B0604020202020204" pitchFamily="34" charset="0"/>
+              <a:buChar char="•"/>
+            </a:pPr>
+            <a:r>
+              <a:rPr lang="en-US" dirty="0" err="1"/>
+              <a:t>skoro</a:t>
+            </a:r>
+            <a:r>
+              <a:rPr lang="en-US" dirty="0"/>
+              <a:t> </a:t>
+            </a:r>
+            <a:r>
+              <a:rPr lang="en-US" dirty="0" err="1"/>
+              <a:t>iste</a:t>
+            </a:r>
+            <a:r>
+              <a:rPr lang="en-US" dirty="0"/>
+              <a:t> </a:t>
+            </a:r>
+            <a:r>
+              <a:rPr lang="en-US" dirty="0" err="1"/>
+              <a:t>performanse</a:t>
+            </a:r>
+            <a:r>
+              <a:rPr lang="en-US" dirty="0"/>
+              <a:t> </a:t>
+            </a:r>
+          </a:p>
+          <a:p>
+            <a:pPr marL="742950" lvl="1" indent="-285750">
+              <a:buFont typeface="Arial" panose="020B0604020202020204" pitchFamily="34" charset="0"/>
+              <a:buChar char="•"/>
+            </a:pPr>
+            <a:r>
+              <a:rPr lang="en-US" dirty="0" err="1"/>
+              <a:t>mnogo</a:t>
+            </a:r>
+            <a:r>
+              <a:rPr lang="en-US" dirty="0"/>
+              <a:t> </a:t>
+            </a:r>
+            <a:r>
+              <a:rPr lang="en-US" dirty="0" err="1"/>
+              <a:t>fleksibilniji</a:t>
+            </a:r>
+            <a:endParaRPr lang="en-US" dirty="0"/>
+          </a:p>
+          <a:p>
+            <a:pPr marL="0" indent="0">
+              <a:buNone/>
+            </a:pPr>
+            <a:endParaRPr lang="en-US" dirty="0"/>
+          </a:p>
+        </p:txBody>
+      </p:sp>
+    </p:spTree>
+    <p:extLst>
+      <p:ext uri="{BB962C8B-B14F-4D97-AF65-F5344CB8AC3E}">
+        <p14:creationId xmlns:p14="http://schemas.microsoft.com/office/powerpoint/2010/main" val="830893101"/>
+      </p:ext>
+    </p:extLst>
+  </p:cSld>
+  <p:clrMapOvr>
+    <a:masterClrMapping/>
+  </p:clrMapOvr>
+</p:sld>
+</file>
+
+<file path=ppt/slides/slide12.xml><?xml version="1.0" encoding="utf-8"?>
+<p:sld xmlns:a="http://schemas.openxmlformats.org/drawingml/2006/main" xmlns:r="http://schemas.openxmlformats.org/officeDocument/2006/relationships" xmlns:p="http://schemas.openxmlformats.org/presentationml/2006/main">
+  <p:cSld>
+    <p:spTree>
+      <p:nvGrpSpPr>
+        <p:cNvPr id="1" name=""/>
+        <p:cNvGrpSpPr/>
+        <p:nvPr/>
+      </p:nvGrpSpPr>
+      <p:grpSpPr>
+        <a:xfrm>
+          <a:off x="0" y="0"/>
+          <a:ext cx="0" cy="0"/>
+          <a:chOff x="0" y="0"/>
+          <a:chExt cx="0" cy="0"/>
+        </a:xfrm>
+      </p:grpSpPr>
+      <p:sp>
+        <p:nvSpPr>
+          <p:cNvPr id="2" name="Title 1">
+            <a:extLst>
+              <a:ext uri="{FF2B5EF4-FFF2-40B4-BE49-F238E27FC236}">
+                <a16:creationId xmlns:a16="http://schemas.microsoft.com/office/drawing/2014/main" id="{00167EAF-250B-4D88-B2F5-347D7691DF79}"/>
+              </a:ext>
+            </a:extLst>
+          </p:cNvPr>
+          <p:cNvSpPr>
+            <a:spLocks noGrp="1"/>
+          </p:cNvSpPr>
+          <p:nvPr>
+            <p:ph type="title"/>
+          </p:nvPr>
+        </p:nvSpPr>
+        <p:spPr/>
+        <p:txBody>
+          <a:bodyPr/>
+          <a:lstStyle/>
+          <a:p>
+            <a:endParaRPr lang="en-US"/>
+          </a:p>
+        </p:txBody>
+      </p:sp>
+      <p:pic>
+        <p:nvPicPr>
+          <p:cNvPr id="4" name="Picture 8">
+            <a:extLst>
+              <a:ext uri="{FF2B5EF4-FFF2-40B4-BE49-F238E27FC236}">
+                <a16:creationId xmlns:a16="http://schemas.microsoft.com/office/drawing/2014/main" id="{5C482CC7-7F39-42D2-9C06-AB2870917679}"/>
+              </a:ext>
+            </a:extLst>
+          </p:cNvPr>
+          <p:cNvPicPr>
+            <a:picLocks noChangeAspect="1" noChangeArrowheads="1"/>
+          </p:cNvPicPr>
+          <p:nvPr/>
+        </p:nvPicPr>
+        <p:blipFill>
+          <a:blip r:embed="rId2">
+            <a:extLst>
+              <a:ext uri="{28A0092B-C50C-407E-A947-70E740481C1C}">
+                <a14:useLocalDpi xmlns:a14="http://schemas.microsoft.com/office/drawing/2010/main" val="0"/>
+              </a:ext>
+            </a:extLst>
+          </a:blip>
+          <a:srcRect/>
+          <a:stretch>
+            <a:fillRect/>
+          </a:stretch>
+        </p:blipFill>
+        <p:spPr bwMode="auto">
+          <a:xfrm>
+            <a:off x="156244" y="61915"/>
+            <a:ext cx="7888797" cy="3527419"/>
+          </a:xfrm>
+          <a:prstGeom prst="rect">
+            <a:avLst/>
+          </a:prstGeom>
+          <a:noFill/>
+          <a:extLst>
+            <a:ext uri="{909E8E84-426E-40DD-AFC4-6F175D3DCCD1}">
+              <a14:hiddenFill xmlns:a14="http://schemas.microsoft.com/office/drawing/2010/main">
+                <a:solidFill>
+                  <a:srgbClr val="FFFFFF"/>
+                </a:solidFill>
+              </a14:hiddenFill>
+            </a:ext>
+          </a:extLst>
+        </p:spPr>
+      </p:pic>
+      <p:sp>
+        <p:nvSpPr>
+          <p:cNvPr id="5" name="TextBox 4">
+            <a:extLst>
+              <a:ext uri="{FF2B5EF4-FFF2-40B4-BE49-F238E27FC236}">
+                <a16:creationId xmlns:a16="http://schemas.microsoft.com/office/drawing/2014/main" id="{8DDD1705-570C-4C4F-B8FB-73856381F3F0}"/>
+              </a:ext>
+            </a:extLst>
+          </p:cNvPr>
+          <p:cNvSpPr txBox="1"/>
+          <p:nvPr/>
+        </p:nvSpPr>
+        <p:spPr>
+          <a:xfrm>
+            <a:off x="8045041" y="1559652"/>
+            <a:ext cx="2304528" cy="830997"/>
+          </a:xfrm>
+          <a:prstGeom prst="rect">
+            <a:avLst/>
+          </a:prstGeom>
+          <a:noFill/>
+        </p:spPr>
+        <p:txBody>
+          <a:bodyPr wrap="square" rtlCol="0">
+            <a:spAutoFit/>
+          </a:bodyPr>
+          <a:lstStyle/>
+          <a:p>
+            <a:r>
+              <a:rPr lang="sr-Latn-RS" sz="1600" dirty="0"/>
+              <a:t>Poređenje operacija nad stringovima  na 1000000 redova</a:t>
+            </a:r>
+            <a:endParaRPr lang="en-US" sz="1600" dirty="0"/>
+          </a:p>
+        </p:txBody>
+      </p:sp>
+      <p:pic>
+        <p:nvPicPr>
+          <p:cNvPr id="6" name="Picture 10">
+            <a:extLst>
+              <a:ext uri="{FF2B5EF4-FFF2-40B4-BE49-F238E27FC236}">
+                <a16:creationId xmlns:a16="http://schemas.microsoft.com/office/drawing/2014/main" id="{1E2DC3C6-5B7E-477C-A25E-4F69774872B8}"/>
+              </a:ext>
+            </a:extLst>
+          </p:cNvPr>
+          <p:cNvPicPr>
+            <a:picLocks noChangeAspect="1" noChangeArrowheads="1"/>
+          </p:cNvPicPr>
+          <p:nvPr/>
+        </p:nvPicPr>
+        <p:blipFill>
+          <a:blip r:embed="rId3">
+            <a:extLst>
+              <a:ext uri="{28A0092B-C50C-407E-A947-70E740481C1C}">
+                <a14:useLocalDpi xmlns:a14="http://schemas.microsoft.com/office/drawing/2010/main" val="0"/>
+              </a:ext>
+            </a:extLst>
+          </a:blip>
+          <a:srcRect/>
+          <a:stretch>
+            <a:fillRect/>
+          </a:stretch>
+        </p:blipFill>
+        <p:spPr bwMode="auto">
+          <a:xfrm>
+            <a:off x="491453" y="3418552"/>
+            <a:ext cx="7553588" cy="3377533"/>
+          </a:xfrm>
+          <a:prstGeom prst="rect">
+            <a:avLst/>
+          </a:prstGeom>
+          <a:noFill/>
+          <a:extLst>
+            <a:ext uri="{909E8E84-426E-40DD-AFC4-6F175D3DCCD1}">
+              <a14:hiddenFill xmlns:a14="http://schemas.microsoft.com/office/drawing/2010/main">
+                <a:solidFill>
+                  <a:srgbClr val="FFFFFF"/>
+                </a:solidFill>
+              </a14:hiddenFill>
+            </a:ext>
+          </a:extLst>
+        </p:spPr>
+      </p:pic>
+      <p:sp>
+        <p:nvSpPr>
+          <p:cNvPr id="7" name="Content Placeholder 6">
+            <a:extLst>
+              <a:ext uri="{FF2B5EF4-FFF2-40B4-BE49-F238E27FC236}">
+                <a16:creationId xmlns:a16="http://schemas.microsoft.com/office/drawing/2014/main" id="{02C8B39D-9A89-40CA-BF1D-F21614B0FC03}"/>
+              </a:ext>
+            </a:extLst>
+          </p:cNvPr>
+          <p:cNvSpPr txBox="1">
+            <a:spLocks noGrp="1"/>
+          </p:cNvSpPr>
+          <p:nvPr>
+            <p:ph idx="1"/>
+          </p:nvPr>
+        </p:nvSpPr>
+        <p:spPr>
+          <a:xfrm>
+            <a:off x="8045041" y="4814144"/>
+            <a:ext cx="2516698" cy="757130"/>
+          </a:xfrm>
+          <a:prstGeom prst="rect">
+            <a:avLst/>
+          </a:prstGeom>
+          <a:noFill/>
+        </p:spPr>
+        <p:txBody>
+          <a:bodyPr wrap="square" rtlCol="0">
+            <a:spAutoFit/>
+          </a:bodyPr>
+          <a:lstStyle/>
+          <a:p>
+            <a:pPr marL="0" indent="0">
+              <a:buNone/>
+            </a:pPr>
+            <a:r>
+              <a:rPr lang="sr-Latn-RS" sz="1600" dirty="0"/>
+              <a:t>Poređenje veličine indeksa nad stringovima  na 1000000 redova</a:t>
+            </a:r>
+            <a:endParaRPr lang="en-US" sz="1600" dirty="0"/>
+          </a:p>
+        </p:txBody>
+      </p:sp>
+    </p:spTree>
+    <p:extLst>
+      <p:ext uri="{BB962C8B-B14F-4D97-AF65-F5344CB8AC3E}">
+        <p14:creationId xmlns:p14="http://schemas.microsoft.com/office/powerpoint/2010/main" val="363235694"/>
+      </p:ext>
+    </p:extLst>
+  </p:cSld>
+  <p:clrMapOvr>
+    <a:masterClrMapping/>
+  </p:clrMapOvr>
+</p:sld>
+</file>
+
+<file path=ppt/slides/slide13.xml><?xml version="1.0" encoding="utf-8"?>
+<p:sld xmlns:a="http://schemas.openxmlformats.org/drawingml/2006/main" xmlns:r="http://schemas.openxmlformats.org/officeDocument/2006/relationships" xmlns:p="http://schemas.openxmlformats.org/presentationml/2006/main">
+  <p:cSld>
+    <p:spTree>
+      <p:nvGrpSpPr>
+        <p:cNvPr id="1" name=""/>
+        <p:cNvGrpSpPr/>
+        <p:nvPr/>
+      </p:nvGrpSpPr>
+      <p:grpSpPr>
+        <a:xfrm>
+          <a:off x="0" y="0"/>
+          <a:ext cx="0" cy="0"/>
+          <a:chOff x="0" y="0"/>
+          <a:chExt cx="0" cy="0"/>
+        </a:xfrm>
+      </p:grpSpPr>
+      <p:sp>
+        <p:nvSpPr>
+          <p:cNvPr id="2" name="Title 1">
+            <a:extLst>
+              <a:ext uri="{FF2B5EF4-FFF2-40B4-BE49-F238E27FC236}">
+                <a16:creationId xmlns:a16="http://schemas.microsoft.com/office/drawing/2014/main" id="{C6F9550E-3C58-456D-809A-E5FCF542DDDE}"/>
+              </a:ext>
+            </a:extLst>
+          </p:cNvPr>
+          <p:cNvSpPr>
+            <a:spLocks noGrp="1"/>
+          </p:cNvSpPr>
+          <p:nvPr>
+            <p:ph type="title"/>
+          </p:nvPr>
+        </p:nvSpPr>
+        <p:spPr/>
+        <p:txBody>
+          <a:bodyPr/>
+          <a:lstStyle/>
+          <a:p>
+            <a:r>
+              <a:rPr lang="sr-Latn-RS" dirty="0"/>
+              <a:t>Zaključak</a:t>
+            </a:r>
+            <a:endParaRPr lang="en-US" dirty="0"/>
+          </a:p>
+        </p:txBody>
+      </p:sp>
+      <p:sp>
+        <p:nvSpPr>
+          <p:cNvPr id="4" name="Rectangle 1">
+            <a:extLst>
+              <a:ext uri="{FF2B5EF4-FFF2-40B4-BE49-F238E27FC236}">
+                <a16:creationId xmlns:a16="http://schemas.microsoft.com/office/drawing/2014/main" id="{26BAD7FA-D80D-40D6-BC0D-3AFEE03F38AD}"/>
+              </a:ext>
+            </a:extLst>
+          </p:cNvPr>
+          <p:cNvSpPr>
+            <a:spLocks noGrp="1" noChangeArrowheads="1"/>
+          </p:cNvSpPr>
+          <p:nvPr>
+            <p:ph idx="1"/>
+          </p:nvPr>
+        </p:nvSpPr>
+        <p:spPr bwMode="auto">
+          <a:xfrm>
+            <a:off x="838200" y="1690688"/>
+            <a:ext cx="10515600" cy="4124206"/>
+          </a:xfrm>
+          <a:prstGeom prst="rect">
+            <a:avLst/>
+          </a:prstGeom>
+          <a:noFill/>
+          <a:ln>
+            <a:noFill/>
+          </a:ln>
+          <a:effectLst/>
+          <a:extLst>
+            <a:ext uri="{909E8E84-426E-40DD-AFC4-6F175D3DCCD1}">
+              <a14:hiddenFill xmlns:a14="http://schemas.microsoft.com/office/drawing/2010/main">
+                <a:solidFill>
+                  <a:schemeClr val="accent1"/>
+                </a:solidFill>
+              </a14:hiddenFill>
+            </a:ext>
+            <a:ext uri="{91240B29-F687-4F45-9708-019B960494DF}">
+              <a14:hiddenLine xmlns:a14="http://schemas.microsoft.com/office/drawing/2010/main" w="9525">
+                <a:solidFill>
+                  <a:schemeClr val="tx1"/>
+                </a:solidFill>
+                <a:miter lim="800000"/>
+                <a:headEnd/>
+                <a:tailEnd/>
+              </a14:hiddenLine>
+            </a:ext>
+            <a:ext uri="{AF507438-7753-43E0-B8FC-AC1667EBCBE1}">
+              <a14:hiddenEffects xmlns:a14="http://schemas.microsoft.com/office/drawing/2010/main">
+                <a:effectLst>
+                  <a:outerShdw dist="35921" dir="2700000" algn="ctr" rotWithShape="0">
+                    <a:schemeClr val="bg2"/>
+                  </a:outerShdw>
+                </a:effectLst>
+              </a14:hiddenEffects>
+            </a:ext>
+          </a:extLst>
+        </p:spPr>
+        <p:txBody>
+          <a:bodyPr vert="horz" wrap="square" lIns="91440" tIns="45720" rIns="91440" bIns="45720" numCol="1" anchor="ctr" anchorCtr="0" compatLnSpc="1">
+            <a:prstTxWarp prst="textNoShape">
+              <a:avLst/>
+            </a:prstTxWarp>
+            <a:spAutoFit/>
+          </a:bodyPr>
+          <a:lstStyle/>
+          <a:p>
+            <a:pPr eaLnBrk="0" fontAlgn="base" hangingPunct="0">
+              <a:lnSpc>
+                <a:spcPct val="100000"/>
+              </a:lnSpc>
+              <a:spcBef>
+                <a:spcPct val="0"/>
+              </a:spcBef>
+              <a:spcAft>
+                <a:spcPct val="0"/>
+              </a:spcAft>
+            </a:pPr>
+            <a:r>
+              <a:rPr kumimoji="0" lang="en-US" altLang="en-US" sz="2600" b="0" i="0" u="none" strike="noStrike" cap="none" normalizeH="0" baseline="0" dirty="0">
+                <a:ln>
+                  <a:noFill/>
+                </a:ln>
+                <a:solidFill>
+                  <a:schemeClr val="tx1"/>
+                </a:solidFill>
+                <a:effectLst/>
+              </a:rPr>
+              <a:t>Hash </a:t>
+            </a:r>
+            <a:r>
+              <a:rPr kumimoji="0" lang="en-US" altLang="en-US" sz="2600" b="0" i="0" u="none" strike="noStrike" cap="none" normalizeH="0" baseline="0" dirty="0" err="1">
+                <a:ln>
+                  <a:noFill/>
+                </a:ln>
+                <a:solidFill>
+                  <a:schemeClr val="tx1"/>
+                </a:solidFill>
+                <a:effectLst/>
+              </a:rPr>
+              <a:t>indeks</a:t>
+            </a:r>
+            <a:r>
+              <a:rPr kumimoji="0" lang="en-US" altLang="en-US" sz="2600" b="0" i="0" u="none" strike="noStrike" cap="none" normalizeH="0" baseline="0" dirty="0">
+                <a:ln>
+                  <a:noFill/>
+                </a:ln>
+                <a:solidFill>
+                  <a:schemeClr val="tx1"/>
+                </a:solidFill>
+                <a:effectLst/>
+              </a:rPr>
+              <a:t> je </a:t>
+            </a:r>
+            <a:r>
+              <a:rPr kumimoji="0" lang="en-US" altLang="en-US" sz="2600" b="0" i="0" u="none" strike="noStrike" cap="none" normalizeH="0" baseline="0" dirty="0" err="1">
+                <a:ln>
+                  <a:noFill/>
+                </a:ln>
+                <a:solidFill>
+                  <a:schemeClr val="tx1"/>
+                </a:solidFill>
+                <a:effectLst/>
+              </a:rPr>
+              <a:t>specijalizovan</a:t>
+            </a:r>
+            <a:r>
+              <a:rPr kumimoji="0" lang="en-US" altLang="en-US" sz="2600" b="0" i="0" u="none" strike="noStrike" cap="none" normalizeH="0" baseline="0" dirty="0">
+                <a:ln>
+                  <a:noFill/>
+                </a:ln>
+                <a:solidFill>
+                  <a:schemeClr val="tx1"/>
+                </a:solidFill>
+                <a:effectLst/>
+              </a:rPr>
+              <a:t> </a:t>
+            </a:r>
+            <a:r>
+              <a:rPr kumimoji="0" lang="en-US" altLang="en-US" sz="2600" b="0" i="0" u="none" strike="noStrike" cap="none" normalizeH="0" baseline="0" dirty="0" err="1">
+                <a:ln>
+                  <a:noFill/>
+                </a:ln>
+                <a:solidFill>
+                  <a:schemeClr val="tx1"/>
+                </a:solidFill>
+                <a:effectLst/>
+              </a:rPr>
+              <a:t>indeks</a:t>
+            </a:r>
+            <a:r>
+              <a:rPr kumimoji="0" lang="en-US" altLang="en-US" sz="2600" b="0" i="0" u="none" strike="noStrike" cap="none" normalizeH="0" baseline="0" dirty="0">
+                <a:ln>
+                  <a:noFill/>
+                </a:ln>
+                <a:solidFill>
+                  <a:schemeClr val="tx1"/>
+                </a:solidFill>
+                <a:effectLst/>
+              </a:rPr>
+              <a:t> </a:t>
+            </a:r>
+          </a:p>
+          <a:p>
+            <a:pPr eaLnBrk="0" fontAlgn="base" hangingPunct="0">
+              <a:lnSpc>
+                <a:spcPct val="100000"/>
+              </a:lnSpc>
+              <a:spcBef>
+                <a:spcPct val="0"/>
+              </a:spcBef>
+              <a:spcAft>
+                <a:spcPct val="0"/>
+              </a:spcAft>
+            </a:pPr>
+            <a:r>
+              <a:rPr kumimoji="0" lang="en-US" altLang="en-US" sz="2600" b="0" i="0" u="none" strike="noStrike" cap="none" normalizeH="0" baseline="0" dirty="0" err="1">
+                <a:ln>
+                  <a:noFill/>
+                </a:ln>
+                <a:solidFill>
+                  <a:schemeClr val="tx1"/>
+                </a:solidFill>
+                <a:effectLst/>
+              </a:rPr>
+              <a:t>Najbolji</a:t>
+            </a:r>
+            <a:r>
+              <a:rPr kumimoji="0" lang="en-US" altLang="en-US" sz="2600" b="0" i="0" u="none" strike="noStrike" cap="none" normalizeH="0" baseline="0" dirty="0">
+                <a:ln>
+                  <a:noFill/>
+                </a:ln>
+                <a:solidFill>
+                  <a:schemeClr val="tx1"/>
+                </a:solidFill>
+                <a:effectLst/>
+              </a:rPr>
+              <a:t> za</a:t>
+            </a:r>
+            <a:r>
+              <a:rPr lang="sr-Latn-RS" altLang="en-US" sz="2600" dirty="0"/>
+              <a:t> </a:t>
+            </a:r>
+            <a:r>
+              <a:rPr kumimoji="0" lang="en-US" altLang="en-US" sz="2600" b="0" i="0" u="none" strike="noStrike" cap="none" normalizeH="0" baseline="0" dirty="0" err="1">
+                <a:ln>
+                  <a:noFill/>
+                </a:ln>
+                <a:solidFill>
+                  <a:schemeClr val="tx1"/>
+                </a:solidFill>
+                <a:effectLst/>
+              </a:rPr>
+              <a:t>direktno</a:t>
+            </a:r>
+            <a:r>
+              <a:rPr kumimoji="0" lang="en-US" altLang="en-US" sz="2600" b="0" i="0" u="none" strike="noStrike" cap="none" normalizeH="0" baseline="0" dirty="0">
+                <a:ln>
+                  <a:noFill/>
+                </a:ln>
+                <a:solidFill>
+                  <a:schemeClr val="tx1"/>
+                </a:solidFill>
+                <a:effectLst/>
+              </a:rPr>
+              <a:t> </a:t>
+            </a:r>
+            <a:r>
+              <a:rPr kumimoji="0" lang="en-US" altLang="en-US" sz="2600" b="0" i="0" u="none" strike="noStrike" cap="none" normalizeH="0" baseline="0" dirty="0" err="1">
+                <a:ln>
+                  <a:noFill/>
+                </a:ln>
+                <a:solidFill>
+                  <a:schemeClr val="tx1"/>
+                </a:solidFill>
+                <a:effectLst/>
+              </a:rPr>
+              <a:t>poređenje</a:t>
+            </a:r>
+            <a:r>
+              <a:rPr kumimoji="0" lang="en-US" altLang="en-US" sz="2600" b="0" i="0" u="none" strike="noStrike" cap="none" normalizeH="0" baseline="0" dirty="0">
+                <a:ln>
+                  <a:noFill/>
+                </a:ln>
+                <a:solidFill>
+                  <a:schemeClr val="tx1"/>
+                </a:solidFill>
+                <a:effectLst/>
+              </a:rPr>
+              <a:t> </a:t>
+            </a:r>
+            <a:r>
+              <a:rPr kumimoji="0" lang="en-US" altLang="en-US" sz="2600" b="0" i="0" u="none" strike="noStrike" cap="none" normalizeH="0" baseline="0" dirty="0" err="1">
+                <a:ln>
+                  <a:noFill/>
+                </a:ln>
+                <a:solidFill>
+                  <a:schemeClr val="tx1"/>
+                </a:solidFill>
+                <a:effectLst/>
+              </a:rPr>
+              <a:t>jednakosti</a:t>
+            </a:r>
+            <a:r>
+              <a:rPr kumimoji="0" lang="en-US" altLang="en-US" sz="2600" b="0" i="0" u="none" strike="noStrike" cap="none" normalizeH="0" baseline="0" dirty="0">
+                <a:ln>
+                  <a:noFill/>
+                </a:ln>
+                <a:solidFill>
+                  <a:schemeClr val="tx1"/>
+                </a:solidFill>
+                <a:effectLst/>
+              </a:rPr>
+              <a:t> </a:t>
+            </a:r>
+            <a:endParaRPr kumimoji="0" lang="en-US" altLang="en-US" sz="2600" b="1" i="0" u="none" strike="noStrike" cap="none" normalizeH="0" baseline="0" dirty="0">
+              <a:ln>
+                <a:noFill/>
+              </a:ln>
+              <a:solidFill>
+                <a:schemeClr val="tx1"/>
+              </a:solidFill>
+              <a:effectLst/>
+            </a:endParaRPr>
+          </a:p>
+          <a:p>
+            <a:pPr eaLnBrk="0" fontAlgn="base" hangingPunct="0">
+              <a:lnSpc>
+                <a:spcPct val="100000"/>
+              </a:lnSpc>
+              <a:spcBef>
+                <a:spcPct val="0"/>
+              </a:spcBef>
+              <a:spcAft>
+                <a:spcPct val="0"/>
+              </a:spcAft>
+            </a:pPr>
+            <a:r>
+              <a:rPr kumimoji="0" lang="en-US" altLang="en-US" sz="2600" i="0" u="none" strike="noStrike" cap="none" normalizeH="0" baseline="0" dirty="0" err="1">
+                <a:ln>
+                  <a:noFill/>
+                </a:ln>
+                <a:solidFill>
+                  <a:schemeClr val="tx1"/>
+                </a:solidFill>
+                <a:effectLst/>
+              </a:rPr>
+              <a:t>Prednosti</a:t>
+            </a:r>
+            <a:r>
+              <a:rPr kumimoji="0" lang="sr-Latn-RS" altLang="en-US" sz="2600" i="0" u="none" strike="noStrike" cap="none" normalizeH="0" baseline="0" dirty="0">
+                <a:ln>
+                  <a:noFill/>
+                </a:ln>
+                <a:solidFill>
+                  <a:schemeClr val="tx1"/>
+                </a:solidFill>
+                <a:effectLst/>
+              </a:rPr>
+              <a:t>:</a:t>
+            </a:r>
+            <a:endParaRPr kumimoji="0" lang="en-US" altLang="en-US" sz="2600" i="0" u="none" strike="noStrike" cap="none" normalizeH="0" baseline="0" dirty="0">
+              <a:ln>
+                <a:noFill/>
+              </a:ln>
+              <a:solidFill>
+                <a:schemeClr val="tx1"/>
+              </a:solidFill>
+              <a:effectLst/>
+            </a:endParaRPr>
+          </a:p>
+          <a:p>
+            <a:pPr lvl="1" eaLnBrk="0" fontAlgn="base" hangingPunct="0">
+              <a:lnSpc>
+                <a:spcPct val="100000"/>
+              </a:lnSpc>
+              <a:spcBef>
+                <a:spcPct val="0"/>
+              </a:spcBef>
+              <a:spcAft>
+                <a:spcPct val="0"/>
+              </a:spcAft>
+            </a:pPr>
+            <a:r>
+              <a:rPr kumimoji="0" lang="en-US" altLang="en-US" sz="2200" b="0" i="0" u="none" strike="noStrike" cap="none" normalizeH="0" baseline="0" dirty="0" err="1">
+                <a:ln>
+                  <a:noFill/>
+                </a:ln>
+                <a:solidFill>
+                  <a:schemeClr val="tx1"/>
+                </a:solidFill>
+                <a:effectLst/>
+              </a:rPr>
+              <a:t>Brzina</a:t>
+            </a:r>
+            <a:r>
+              <a:rPr kumimoji="0" lang="en-US" altLang="en-US" sz="2200" b="0" i="0" u="none" strike="noStrike" cap="none" normalizeH="0" baseline="0" dirty="0">
+                <a:ln>
+                  <a:noFill/>
+                </a:ln>
+                <a:solidFill>
+                  <a:schemeClr val="tx1"/>
+                </a:solidFill>
+                <a:effectLst/>
+              </a:rPr>
+              <a:t> </a:t>
+            </a:r>
+          </a:p>
+          <a:p>
+            <a:pPr lvl="1" eaLnBrk="0" fontAlgn="base" hangingPunct="0">
+              <a:lnSpc>
+                <a:spcPct val="100000"/>
+              </a:lnSpc>
+              <a:spcBef>
+                <a:spcPct val="0"/>
+              </a:spcBef>
+              <a:spcAft>
+                <a:spcPct val="0"/>
+              </a:spcAft>
+            </a:pPr>
+            <a:r>
+              <a:rPr kumimoji="0" lang="en-US" altLang="en-US" sz="2200" b="0" i="0" u="none" strike="noStrike" cap="none" normalizeH="0" baseline="0" dirty="0">
+                <a:ln>
+                  <a:noFill/>
+                </a:ln>
+                <a:solidFill>
+                  <a:schemeClr val="tx1"/>
+                </a:solidFill>
+                <a:effectLst/>
+              </a:rPr>
+              <a:t>Mala </a:t>
+            </a:r>
+            <a:r>
+              <a:rPr kumimoji="0" lang="en-US" altLang="en-US" sz="2200" b="0" i="0" u="none" strike="noStrike" cap="none" normalizeH="0" baseline="0" dirty="0" err="1">
+                <a:ln>
+                  <a:noFill/>
+                </a:ln>
+                <a:solidFill>
+                  <a:schemeClr val="tx1"/>
+                </a:solidFill>
+                <a:effectLst/>
+              </a:rPr>
+              <a:t>veličina</a:t>
+            </a:r>
+            <a:r>
+              <a:rPr kumimoji="0" lang="en-US" altLang="en-US" sz="2200" b="0" i="0" u="none" strike="noStrike" cap="none" normalizeH="0" baseline="0" dirty="0">
+                <a:ln>
+                  <a:noFill/>
+                </a:ln>
+                <a:solidFill>
+                  <a:schemeClr val="tx1"/>
+                </a:solidFill>
+                <a:effectLst/>
+              </a:rPr>
+              <a:t> </a:t>
+            </a:r>
+            <a:endParaRPr kumimoji="0" lang="en-US" altLang="en-US" sz="2200" b="1" i="0" u="none" strike="noStrike" cap="none" normalizeH="0" baseline="0" dirty="0">
+              <a:ln>
+                <a:noFill/>
+              </a:ln>
+              <a:solidFill>
+                <a:schemeClr val="tx1"/>
+              </a:solidFill>
+              <a:effectLst/>
+            </a:endParaRPr>
+          </a:p>
+          <a:p>
+            <a:pPr eaLnBrk="0" fontAlgn="base" hangingPunct="0">
+              <a:lnSpc>
+                <a:spcPct val="100000"/>
+              </a:lnSpc>
+              <a:spcBef>
+                <a:spcPct val="0"/>
+              </a:spcBef>
+              <a:spcAft>
+                <a:spcPct val="0"/>
+              </a:spcAft>
+            </a:pPr>
+            <a:r>
+              <a:rPr kumimoji="0" lang="en-US" altLang="en-US" sz="2600" i="0" u="none" strike="noStrike" cap="none" normalizeH="0" baseline="0" dirty="0" err="1">
+                <a:ln>
+                  <a:noFill/>
+                </a:ln>
+                <a:solidFill>
+                  <a:schemeClr val="tx1"/>
+                </a:solidFill>
+                <a:effectLst/>
+              </a:rPr>
+              <a:t>Nedostaci</a:t>
+            </a:r>
+            <a:r>
+              <a:rPr kumimoji="0" lang="sr-Latn-RS" altLang="en-US" sz="2600" i="0" u="none" strike="noStrike" cap="none" normalizeH="0" baseline="0" dirty="0">
+                <a:ln>
+                  <a:noFill/>
+                </a:ln>
+                <a:solidFill>
+                  <a:schemeClr val="tx1"/>
+                </a:solidFill>
+                <a:effectLst/>
+              </a:rPr>
+              <a:t>:</a:t>
+            </a:r>
+            <a:endParaRPr kumimoji="0" lang="en-US" altLang="en-US" sz="2600" i="0" u="none" strike="noStrike" cap="none" normalizeH="0" baseline="0" dirty="0">
+              <a:ln>
+                <a:noFill/>
+              </a:ln>
+              <a:solidFill>
+                <a:schemeClr val="tx1"/>
+              </a:solidFill>
+              <a:effectLst/>
+            </a:endParaRPr>
+          </a:p>
+          <a:p>
+            <a:pPr lvl="1" eaLnBrk="0" fontAlgn="base" hangingPunct="0">
+              <a:lnSpc>
+                <a:spcPct val="100000"/>
+              </a:lnSpc>
+              <a:spcBef>
+                <a:spcPct val="0"/>
+              </a:spcBef>
+              <a:spcAft>
+                <a:spcPct val="0"/>
+              </a:spcAft>
+            </a:pPr>
+            <a:r>
+              <a:rPr kumimoji="0" lang="en-US" altLang="en-US" sz="2200" b="0" i="0" u="none" strike="noStrike" cap="none" normalizeH="0" baseline="0" dirty="0" err="1">
+                <a:ln>
+                  <a:noFill/>
+                </a:ln>
+                <a:solidFill>
+                  <a:schemeClr val="tx1"/>
+                </a:solidFill>
+                <a:effectLst/>
+              </a:rPr>
+              <a:t>Ograničena</a:t>
+            </a:r>
+            <a:r>
+              <a:rPr kumimoji="0" lang="en-US" altLang="en-US" sz="2200" b="0" i="0" u="none" strike="noStrike" cap="none" normalizeH="0" baseline="0" dirty="0">
+                <a:ln>
+                  <a:noFill/>
+                </a:ln>
+                <a:solidFill>
+                  <a:schemeClr val="tx1"/>
+                </a:solidFill>
+                <a:effectLst/>
+              </a:rPr>
+              <a:t> </a:t>
+            </a:r>
+            <a:r>
+              <a:rPr kumimoji="0" lang="en-US" altLang="en-US" sz="2200" b="0" i="0" u="none" strike="noStrike" cap="none" normalizeH="0" baseline="0" dirty="0" err="1">
+                <a:ln>
+                  <a:noFill/>
+                </a:ln>
+                <a:solidFill>
+                  <a:schemeClr val="tx1"/>
+                </a:solidFill>
+                <a:effectLst/>
+              </a:rPr>
+              <a:t>funkcionalnost</a:t>
+            </a:r>
+            <a:r>
+              <a:rPr kumimoji="0" lang="en-US" altLang="en-US" sz="2200" b="0" i="0" u="none" strike="noStrike" cap="none" normalizeH="0" baseline="0" dirty="0">
+                <a:ln>
+                  <a:noFill/>
+                </a:ln>
+                <a:solidFill>
+                  <a:schemeClr val="tx1"/>
+                </a:solidFill>
+                <a:effectLst/>
+              </a:rPr>
+              <a:t> </a:t>
+            </a:r>
+          </a:p>
+          <a:p>
+            <a:pPr lvl="1" eaLnBrk="0" fontAlgn="base" hangingPunct="0">
+              <a:lnSpc>
+                <a:spcPct val="100000"/>
+              </a:lnSpc>
+              <a:spcBef>
+                <a:spcPct val="0"/>
+              </a:spcBef>
+              <a:spcAft>
+                <a:spcPct val="0"/>
+              </a:spcAft>
+            </a:pPr>
+            <a:r>
+              <a:rPr kumimoji="0" lang="en-US" altLang="en-US" sz="2200" b="0" i="0" u="none" strike="noStrike" cap="none" normalizeH="0" baseline="0" dirty="0" err="1">
+                <a:ln>
+                  <a:noFill/>
+                </a:ln>
+                <a:solidFill>
+                  <a:schemeClr val="tx1"/>
+                </a:solidFill>
+                <a:effectLst/>
+              </a:rPr>
+              <a:t>Samo</a:t>
+            </a:r>
+            <a:r>
+              <a:rPr kumimoji="0" lang="en-US" altLang="en-US" sz="2200" b="0" i="0" u="none" strike="noStrike" cap="none" normalizeH="0" baseline="0" dirty="0">
+                <a:ln>
+                  <a:noFill/>
+                </a:ln>
+                <a:solidFill>
+                  <a:schemeClr val="tx1"/>
+                </a:solidFill>
+                <a:effectLst/>
+              </a:rPr>
+              <a:t> operator = </a:t>
+            </a:r>
+            <a:endParaRPr kumimoji="0" lang="en-US" altLang="en-US" sz="2200" b="1" i="0" u="none" strike="noStrike" cap="none" normalizeH="0" baseline="0" dirty="0">
+              <a:ln>
+                <a:noFill/>
+              </a:ln>
+              <a:solidFill>
+                <a:schemeClr val="tx1"/>
+              </a:solidFill>
+              <a:effectLst/>
+            </a:endParaRPr>
+          </a:p>
+          <a:p>
+            <a:pPr eaLnBrk="0" fontAlgn="base" hangingPunct="0">
+              <a:lnSpc>
+                <a:spcPct val="100000"/>
+              </a:lnSpc>
+              <a:spcBef>
+                <a:spcPct val="0"/>
+              </a:spcBef>
+              <a:spcAft>
+                <a:spcPct val="0"/>
+              </a:spcAft>
+            </a:pPr>
+            <a:r>
+              <a:rPr kumimoji="0" lang="en-US" altLang="en-US" sz="2600" b="1" i="0" u="none" strike="noStrike" cap="none" normalizeH="0" baseline="0" dirty="0" err="1">
+                <a:ln>
+                  <a:noFill/>
+                </a:ln>
+                <a:solidFill>
+                  <a:schemeClr val="tx1"/>
+                </a:solidFill>
+                <a:effectLst/>
+              </a:rPr>
+              <a:t>Zaključak</a:t>
+            </a:r>
+            <a:endParaRPr kumimoji="0" lang="en-US" altLang="en-US" sz="2600" b="1" i="0" u="none" strike="noStrike" cap="none" normalizeH="0" baseline="0" dirty="0">
+              <a:ln>
+                <a:noFill/>
+              </a:ln>
+              <a:solidFill>
+                <a:schemeClr val="tx1"/>
+              </a:solidFill>
+              <a:effectLst/>
+            </a:endParaRPr>
+          </a:p>
+          <a:p>
+            <a:pPr lvl="1" eaLnBrk="0" fontAlgn="base" hangingPunct="0">
+              <a:lnSpc>
+                <a:spcPct val="100000"/>
+              </a:lnSpc>
+              <a:spcBef>
+                <a:spcPct val="0"/>
+              </a:spcBef>
+              <a:spcAft>
+                <a:spcPct val="0"/>
+              </a:spcAft>
+            </a:pPr>
+            <a:r>
+              <a:rPr kumimoji="0" lang="en-US" altLang="en-US" sz="2200" b="0" i="0" u="none" strike="noStrike" cap="none" normalizeH="0" baseline="0" dirty="0">
+                <a:ln>
+                  <a:noFill/>
+                </a:ln>
+                <a:solidFill>
+                  <a:schemeClr val="tx1"/>
+                </a:solidFill>
+                <a:effectLst/>
+              </a:rPr>
+              <a:t>U </a:t>
+            </a:r>
+            <a:r>
+              <a:rPr kumimoji="0" lang="en-US" altLang="en-US" sz="2200" b="0" i="0" u="none" strike="noStrike" cap="none" normalizeH="0" baseline="0" dirty="0" err="1">
+                <a:ln>
+                  <a:noFill/>
+                </a:ln>
+                <a:solidFill>
+                  <a:schemeClr val="tx1"/>
+                </a:solidFill>
+                <a:effectLst/>
+              </a:rPr>
+              <a:t>praksi</a:t>
+            </a:r>
+            <a:r>
+              <a:rPr kumimoji="0" lang="en-US" altLang="en-US" sz="2200" b="0" i="0" u="none" strike="noStrike" cap="none" normalizeH="0" baseline="0" dirty="0">
+                <a:ln>
+                  <a:noFill/>
+                </a:ln>
+                <a:solidFill>
+                  <a:schemeClr val="tx1"/>
+                </a:solidFill>
+                <a:effectLst/>
+              </a:rPr>
+              <a:t> se </a:t>
+            </a:r>
+            <a:r>
+              <a:rPr kumimoji="0" lang="en-US" altLang="en-US" sz="2200" b="0" i="0" u="none" strike="noStrike" cap="none" normalizeH="0" baseline="0" dirty="0" err="1">
+                <a:ln>
+                  <a:noFill/>
+                </a:ln>
+                <a:solidFill>
+                  <a:schemeClr val="tx1"/>
+                </a:solidFill>
+                <a:effectLst/>
+              </a:rPr>
+              <a:t>češće</a:t>
+            </a:r>
+            <a:r>
+              <a:rPr kumimoji="0" lang="en-US" altLang="en-US" sz="2200" b="0" i="0" u="none" strike="noStrike" cap="none" normalizeH="0" baseline="0" dirty="0">
+                <a:ln>
+                  <a:noFill/>
+                </a:ln>
+                <a:solidFill>
+                  <a:schemeClr val="tx1"/>
+                </a:solidFill>
+                <a:effectLst/>
+              </a:rPr>
+              <a:t> </a:t>
+            </a:r>
+            <a:r>
+              <a:rPr kumimoji="0" lang="en-US" altLang="en-US" sz="2200" b="0" i="0" u="none" strike="noStrike" cap="none" normalizeH="0" baseline="0" dirty="0" err="1">
+                <a:ln>
+                  <a:noFill/>
+                </a:ln>
+                <a:solidFill>
+                  <a:schemeClr val="tx1"/>
+                </a:solidFill>
+                <a:effectLst/>
+              </a:rPr>
+              <a:t>koristi</a:t>
+            </a:r>
+            <a:r>
+              <a:rPr kumimoji="0" lang="en-US" altLang="en-US" sz="2200" b="0" i="0" u="none" strike="noStrike" cap="none" normalizeH="0" baseline="0" dirty="0">
+                <a:ln>
+                  <a:noFill/>
+                </a:ln>
+                <a:solidFill>
+                  <a:schemeClr val="tx1"/>
+                </a:solidFill>
+                <a:effectLst/>
+              </a:rPr>
+              <a:t> B-tree </a:t>
+            </a:r>
+            <a:r>
+              <a:rPr kumimoji="0" lang="en-US" altLang="en-US" sz="2200" b="0" i="0" u="none" strike="noStrike" cap="none" normalizeH="0" baseline="0" dirty="0" err="1">
+                <a:ln>
+                  <a:noFill/>
+                </a:ln>
+                <a:solidFill>
+                  <a:schemeClr val="tx1"/>
+                </a:solidFill>
+                <a:effectLst/>
+              </a:rPr>
+              <a:t>zbog</a:t>
+            </a:r>
+            <a:r>
+              <a:rPr kumimoji="0" lang="en-US" altLang="en-US" sz="2200" b="0" i="0" u="none" strike="noStrike" cap="none" normalizeH="0" baseline="0" dirty="0">
+                <a:ln>
+                  <a:noFill/>
+                </a:ln>
+                <a:solidFill>
+                  <a:schemeClr val="tx1"/>
+                </a:solidFill>
+                <a:effectLst/>
+              </a:rPr>
+              <a:t> </a:t>
+            </a:r>
+            <a:r>
+              <a:rPr kumimoji="0" lang="en-US" altLang="en-US" sz="2200" b="0" i="0" u="none" strike="noStrike" cap="none" normalizeH="0" baseline="0" dirty="0" err="1">
+                <a:ln>
+                  <a:noFill/>
+                </a:ln>
+                <a:solidFill>
+                  <a:schemeClr val="tx1"/>
+                </a:solidFill>
+                <a:effectLst/>
+              </a:rPr>
+              <a:t>veće</a:t>
+            </a:r>
+            <a:r>
+              <a:rPr kumimoji="0" lang="en-US" altLang="en-US" sz="2200" b="0" i="0" u="none" strike="noStrike" cap="none" normalizeH="0" baseline="0" dirty="0">
+                <a:ln>
+                  <a:noFill/>
+                </a:ln>
+                <a:solidFill>
+                  <a:schemeClr val="tx1"/>
+                </a:solidFill>
+                <a:effectLst/>
+              </a:rPr>
+              <a:t> </a:t>
+            </a:r>
+            <a:r>
+              <a:rPr kumimoji="0" lang="en-US" altLang="en-US" sz="2200" b="0" i="0" u="none" strike="noStrike" cap="none" normalizeH="0" baseline="0" dirty="0" err="1">
+                <a:ln>
+                  <a:noFill/>
+                </a:ln>
+                <a:solidFill>
+                  <a:schemeClr val="tx1"/>
+                </a:solidFill>
+                <a:effectLst/>
+              </a:rPr>
+              <a:t>univerzalnosti</a:t>
+            </a:r>
+            <a:r>
+              <a:rPr kumimoji="0" lang="en-US" altLang="en-US" sz="2200" b="0" i="0" u="none" strike="noStrike" cap="none" normalizeH="0" baseline="0" dirty="0">
+                <a:ln>
+                  <a:noFill/>
+                </a:ln>
+                <a:solidFill>
+                  <a:schemeClr val="tx1"/>
+                </a:solidFill>
+                <a:effectLst/>
+              </a:rPr>
+              <a:t>, </a:t>
+            </a:r>
+            <a:r>
+              <a:rPr kumimoji="0" lang="en-US" altLang="en-US" sz="2200" b="0" i="0" u="none" strike="noStrike" cap="none" normalizeH="0" baseline="0" dirty="0" err="1">
+                <a:ln>
+                  <a:noFill/>
+                </a:ln>
+                <a:solidFill>
+                  <a:schemeClr val="tx1"/>
+                </a:solidFill>
+                <a:effectLst/>
+              </a:rPr>
+              <a:t>dok</a:t>
+            </a:r>
+            <a:r>
+              <a:rPr kumimoji="0" lang="en-US" altLang="en-US" sz="2200" b="0" i="0" u="none" strike="noStrike" cap="none" normalizeH="0" baseline="0" dirty="0">
+                <a:ln>
+                  <a:noFill/>
+                </a:ln>
+                <a:solidFill>
+                  <a:schemeClr val="tx1"/>
+                </a:solidFill>
+                <a:effectLst/>
+              </a:rPr>
+              <a:t> hash </a:t>
+            </a:r>
+            <a:r>
+              <a:rPr kumimoji="0" lang="en-US" altLang="en-US" sz="2200" b="0" i="0" u="none" strike="noStrike" cap="none" normalizeH="0" baseline="0" dirty="0" err="1">
+                <a:ln>
+                  <a:noFill/>
+                </a:ln>
+                <a:solidFill>
+                  <a:schemeClr val="tx1"/>
+                </a:solidFill>
+                <a:effectLst/>
+              </a:rPr>
+              <a:t>indeks</a:t>
+            </a:r>
+            <a:r>
+              <a:rPr kumimoji="0" lang="en-US" altLang="en-US" sz="2200" b="0" i="0" u="none" strike="noStrike" cap="none" normalizeH="0" baseline="0" dirty="0">
+                <a:ln>
+                  <a:noFill/>
+                </a:ln>
+                <a:solidFill>
+                  <a:schemeClr val="tx1"/>
+                </a:solidFill>
+                <a:effectLst/>
+              </a:rPr>
+              <a:t> </a:t>
+            </a:r>
+            <a:r>
+              <a:rPr kumimoji="0" lang="en-US" altLang="en-US" sz="2200" b="0" i="0" u="none" strike="noStrike" cap="none" normalizeH="0" baseline="0" dirty="0" err="1">
+                <a:ln>
+                  <a:noFill/>
+                </a:ln>
+                <a:solidFill>
+                  <a:schemeClr val="tx1"/>
+                </a:solidFill>
+                <a:effectLst/>
+              </a:rPr>
+              <a:t>ima</a:t>
+            </a:r>
+            <a:r>
+              <a:rPr kumimoji="0" lang="en-US" altLang="en-US" sz="2200" b="0" i="0" u="none" strike="noStrike" cap="none" normalizeH="0" baseline="0" dirty="0">
+                <a:ln>
+                  <a:noFill/>
+                </a:ln>
+                <a:solidFill>
+                  <a:schemeClr val="tx1"/>
+                </a:solidFill>
+                <a:effectLst/>
+              </a:rPr>
+              <a:t> </a:t>
+            </a:r>
+            <a:r>
+              <a:rPr kumimoji="0" lang="en-US" altLang="en-US" sz="2200" b="0" i="0" u="none" strike="noStrike" cap="none" normalizeH="0" baseline="0" dirty="0" err="1">
+                <a:ln>
+                  <a:noFill/>
+                </a:ln>
+                <a:solidFill>
+                  <a:schemeClr val="tx1"/>
+                </a:solidFill>
+                <a:effectLst/>
+              </a:rPr>
+              <a:t>smisla</a:t>
+            </a:r>
+            <a:r>
+              <a:rPr kumimoji="0" lang="en-US" altLang="en-US" sz="2200" b="0" i="0" u="none" strike="noStrike" cap="none" normalizeH="0" baseline="0" dirty="0">
+                <a:ln>
+                  <a:noFill/>
+                </a:ln>
+                <a:solidFill>
+                  <a:schemeClr val="tx1"/>
+                </a:solidFill>
+                <a:effectLst/>
+              </a:rPr>
+              <a:t> u </a:t>
+            </a:r>
+            <a:r>
+              <a:rPr kumimoji="0" lang="en-US" altLang="en-US" sz="2200" b="0" i="0" u="none" strike="noStrike" cap="none" normalizeH="0" baseline="0" dirty="0" err="1">
+                <a:ln>
+                  <a:noFill/>
+                </a:ln>
+                <a:solidFill>
+                  <a:schemeClr val="tx1"/>
+                </a:solidFill>
+                <a:effectLst/>
+              </a:rPr>
+              <a:t>specifičnim</a:t>
+            </a:r>
+            <a:r>
+              <a:rPr kumimoji="0" lang="en-US" altLang="en-US" sz="2200" b="0" i="0" u="none" strike="noStrike" cap="none" normalizeH="0" baseline="0" dirty="0">
+                <a:ln>
+                  <a:noFill/>
+                </a:ln>
+                <a:solidFill>
+                  <a:schemeClr val="tx1"/>
+                </a:solidFill>
+                <a:effectLst/>
+              </a:rPr>
+              <a:t> </a:t>
+            </a:r>
+            <a:r>
+              <a:rPr kumimoji="0" lang="en-US" altLang="en-US" sz="2200" b="0" i="0" u="none" strike="noStrike" cap="none" normalizeH="0" baseline="0" dirty="0" err="1">
+                <a:ln>
+                  <a:noFill/>
+                </a:ln>
+                <a:solidFill>
+                  <a:schemeClr val="tx1"/>
+                </a:solidFill>
+                <a:effectLst/>
+              </a:rPr>
+              <a:t>situacijama</a:t>
+            </a:r>
+            <a:r>
+              <a:rPr kumimoji="0" lang="en-US" altLang="en-US" sz="2200" b="0" i="0" u="none" strike="noStrike" cap="none" normalizeH="0" baseline="0" dirty="0">
+                <a:ln>
+                  <a:noFill/>
+                </a:ln>
+                <a:solidFill>
+                  <a:schemeClr val="tx1"/>
+                </a:solidFill>
+                <a:effectLst/>
+              </a:rPr>
+              <a:t>.</a:t>
+            </a:r>
+          </a:p>
+        </p:txBody>
+      </p:sp>
+    </p:spTree>
+    <p:extLst>
+      <p:ext uri="{BB962C8B-B14F-4D97-AF65-F5344CB8AC3E}">
+        <p14:creationId xmlns:p14="http://schemas.microsoft.com/office/powerpoint/2010/main" val="2929179446"/>
+      </p:ext>
+    </p:extLst>
+  </p:cSld>
+  <p:clrMapOvr>
+    <a:masterClrMapping/>
+  </p:clrMapOvr>
+</p:sld>
+</file>
+
+<file path=ppt/slides/slide2.xml><?xml version="1.0" encoding="utf-8"?>
+<p:sld xmlns:a="http://schemas.openxmlformats.org/drawingml/2006/main" xmlns:r="http://schemas.openxmlformats.org/officeDocument/2006/relationships" xmlns:p="http://schemas.openxmlformats.org/presentationml/2006/main">
+  <p:cSld>
+    <p:spTree>
+      <p:nvGrpSpPr>
+        <p:cNvPr id="1" name=""/>
+        <p:cNvGrpSpPr/>
+        <p:nvPr/>
+      </p:nvGrpSpPr>
+      <p:grpSpPr>
+        <a:xfrm>
+          <a:off x="0" y="0"/>
+          <a:ext cx="0" cy="0"/>
+          <a:chOff x="0" y="0"/>
+          <a:chExt cx="0" cy="0"/>
+        </a:xfrm>
+      </p:grpSpPr>
+      <p:sp>
+        <p:nvSpPr>
+          <p:cNvPr id="2" name="Title 1">
+            <a:extLst>
+              <a:ext uri="{FF2B5EF4-FFF2-40B4-BE49-F238E27FC236}">
+                <a16:creationId xmlns:a16="http://schemas.microsoft.com/office/drawing/2014/main" id="{4C4CFDBB-FD2C-46BD-803A-1793C981AE14}"/>
+              </a:ext>
+            </a:extLst>
+          </p:cNvPr>
+          <p:cNvSpPr>
+            <a:spLocks noGrp="1"/>
+          </p:cNvSpPr>
+          <p:nvPr>
+            <p:ph type="title"/>
+          </p:nvPr>
+        </p:nvSpPr>
+        <p:spPr/>
+        <p:txBody>
+          <a:bodyPr/>
+          <a:lstStyle/>
+          <a:p>
+            <a:r>
+              <a:rPr lang="sr-Latn-RS" dirty="0"/>
+              <a:t>Uvod</a:t>
+            </a:r>
+            <a:endParaRPr lang="en-US" dirty="0"/>
+          </a:p>
+        </p:txBody>
+      </p:sp>
+      <p:sp>
+        <p:nvSpPr>
+          <p:cNvPr id="4" name="Rectangle 1">
+            <a:extLst>
+              <a:ext uri="{FF2B5EF4-FFF2-40B4-BE49-F238E27FC236}">
+                <a16:creationId xmlns:a16="http://schemas.microsoft.com/office/drawing/2014/main" id="{39D8EDEB-7696-46A2-AA1F-C021D306BADC}"/>
+              </a:ext>
+            </a:extLst>
+          </p:cNvPr>
+          <p:cNvSpPr>
+            <a:spLocks noGrp="1" noChangeArrowheads="1"/>
+          </p:cNvSpPr>
+          <p:nvPr>
+            <p:ph idx="1"/>
+          </p:nvPr>
+        </p:nvSpPr>
+        <p:spPr bwMode="auto">
+          <a:xfrm>
+            <a:off x="838200" y="1415971"/>
+            <a:ext cx="9019136" cy="5170646"/>
+          </a:xfrm>
+          <a:prstGeom prst="rect">
+            <a:avLst/>
+          </a:prstGeom>
+          <a:noFill/>
+          <a:ln>
+            <a:noFill/>
+          </a:ln>
+          <a:effectLst/>
+          <a:extLst>
+            <a:ext uri="{909E8E84-426E-40DD-AFC4-6F175D3DCCD1}">
+              <a14:hiddenFill xmlns:a14="http://schemas.microsoft.com/office/drawing/2010/main">
+                <a:solidFill>
+                  <a:schemeClr val="accent1"/>
+                </a:solidFill>
+              </a14:hiddenFill>
+            </a:ext>
+            <a:ext uri="{91240B29-F687-4F45-9708-019B960494DF}">
+              <a14:hiddenLine xmlns:a14="http://schemas.microsoft.com/office/drawing/2010/main" w="9525">
+                <a:solidFill>
+                  <a:schemeClr val="tx1"/>
+                </a:solidFill>
+                <a:miter lim="800000"/>
+                <a:headEnd/>
+                <a:tailEnd/>
+              </a14:hiddenLine>
+            </a:ext>
+            <a:ext uri="{AF507438-7753-43E0-B8FC-AC1667EBCBE1}">
+              <a14:hiddenEffects xmlns:a14="http://schemas.microsoft.com/office/drawing/2010/main">
+                <a:effectLst>
+                  <a:outerShdw dist="35921" dir="2700000" algn="ctr" rotWithShape="0">
+                    <a:schemeClr val="bg2"/>
+                  </a:outerShdw>
+                </a:effectLst>
+              </a14:hiddenEffects>
+            </a:ext>
+          </a:extLst>
+        </p:spPr>
+        <p:txBody>
+          <a:bodyPr vert="horz" wrap="none" lIns="91440" tIns="45720" rIns="91440" bIns="45720" numCol="1" anchor="ctr" anchorCtr="0" compatLnSpc="1">
+            <a:prstTxWarp prst="textNoShape">
+              <a:avLst/>
+            </a:prstTxWarp>
+            <a:spAutoFit/>
+          </a:bodyPr>
+          <a:lstStyle/>
+          <a:p>
+            <a:pPr marL="0" marR="0" lvl="0" indent="0" algn="l" defTabSz="914400" rtl="0" eaLnBrk="0" fontAlgn="base" latinLnBrk="0" hangingPunct="0">
+              <a:lnSpc>
+                <a:spcPct val="100000"/>
+              </a:lnSpc>
+              <a:spcBef>
+                <a:spcPct val="0"/>
+              </a:spcBef>
+              <a:spcAft>
+                <a:spcPct val="0"/>
+              </a:spcAft>
+              <a:buClrTx/>
+              <a:buSzTx/>
+              <a:buFontTx/>
+              <a:buNone/>
+              <a:tabLst/>
+            </a:pPr>
+            <a:endParaRPr kumimoji="0" lang="en-US" altLang="en-US" sz="2600" b="0" i="0" u="none" strike="noStrike" cap="none" normalizeH="0" baseline="0" dirty="0">
+              <a:ln>
+                <a:noFill/>
+              </a:ln>
+              <a:solidFill>
+                <a:schemeClr val="tx1"/>
+              </a:solidFill>
+              <a:effectLst/>
+            </a:endParaRPr>
+          </a:p>
+          <a:p>
+            <a:pPr eaLnBrk="0" fontAlgn="base" hangingPunct="0">
+              <a:lnSpc>
+                <a:spcPct val="100000"/>
+              </a:lnSpc>
+              <a:spcBef>
+                <a:spcPct val="0"/>
+              </a:spcBef>
+              <a:spcAft>
+                <a:spcPct val="0"/>
+              </a:spcAft>
+            </a:pPr>
+            <a:r>
+              <a:rPr kumimoji="0" lang="en-US" altLang="en-US" sz="2600" b="0" i="0" u="none" strike="noStrike" cap="none" normalizeH="0" baseline="0" dirty="0" err="1">
+                <a:ln>
+                  <a:noFill/>
+                </a:ln>
+                <a:solidFill>
+                  <a:schemeClr val="tx1"/>
+                </a:solidFill>
+                <a:effectLst/>
+              </a:rPr>
+              <a:t>Savremene</a:t>
+            </a:r>
+            <a:r>
+              <a:rPr kumimoji="0" lang="en-US" altLang="en-US" sz="2600" b="0" i="0" u="none" strike="noStrike" cap="none" normalizeH="0" baseline="0" dirty="0">
+                <a:ln>
+                  <a:noFill/>
+                </a:ln>
+                <a:solidFill>
+                  <a:schemeClr val="tx1"/>
+                </a:solidFill>
+                <a:effectLst/>
+              </a:rPr>
+              <a:t> </a:t>
+            </a:r>
+            <a:r>
+              <a:rPr kumimoji="0" lang="en-US" altLang="en-US" sz="2600" b="0" i="0" u="none" strike="noStrike" cap="none" normalizeH="0" baseline="0" dirty="0" err="1">
+                <a:ln>
+                  <a:noFill/>
+                </a:ln>
+                <a:solidFill>
+                  <a:schemeClr val="tx1"/>
+                </a:solidFill>
+                <a:effectLst/>
+              </a:rPr>
+              <a:t>baze</a:t>
+            </a:r>
+            <a:r>
+              <a:rPr kumimoji="0" lang="en-US" altLang="en-US" sz="2600" b="0" i="0" u="none" strike="noStrike" cap="none" normalizeH="0" baseline="0" dirty="0">
+                <a:ln>
+                  <a:noFill/>
+                </a:ln>
+                <a:solidFill>
+                  <a:schemeClr val="tx1"/>
+                </a:solidFill>
+                <a:effectLst/>
+              </a:rPr>
+              <a:t> </a:t>
+            </a:r>
+            <a:r>
+              <a:rPr kumimoji="0" lang="en-US" altLang="en-US" sz="2600" b="0" i="0" u="none" strike="noStrike" cap="none" normalizeH="0" baseline="0" dirty="0" err="1">
+                <a:ln>
+                  <a:noFill/>
+                </a:ln>
+                <a:solidFill>
+                  <a:schemeClr val="tx1"/>
+                </a:solidFill>
+                <a:effectLst/>
+              </a:rPr>
+              <a:t>podataka</a:t>
+            </a:r>
+            <a:r>
+              <a:rPr kumimoji="0" lang="en-US" altLang="en-US" sz="2600" b="0" i="0" u="none" strike="noStrike" cap="none" normalizeH="0" baseline="0" dirty="0">
+                <a:ln>
+                  <a:noFill/>
+                </a:ln>
+                <a:solidFill>
+                  <a:schemeClr val="tx1"/>
+                </a:solidFill>
+                <a:effectLst/>
+              </a:rPr>
+              <a:t> </a:t>
+            </a:r>
+            <a:r>
+              <a:rPr kumimoji="0" lang="en-US" altLang="en-US" sz="2600" b="0" i="0" u="none" strike="noStrike" cap="none" normalizeH="0" baseline="0" dirty="0" err="1">
+                <a:ln>
+                  <a:noFill/>
+                </a:ln>
+                <a:solidFill>
+                  <a:schemeClr val="tx1"/>
+                </a:solidFill>
+                <a:effectLst/>
+              </a:rPr>
+              <a:t>skladište</a:t>
+            </a:r>
+            <a:r>
+              <a:rPr kumimoji="0" lang="en-US" altLang="en-US" sz="2600" b="0" i="0" u="none" strike="noStrike" cap="none" normalizeH="0" baseline="0" dirty="0">
+                <a:ln>
+                  <a:noFill/>
+                </a:ln>
+                <a:solidFill>
+                  <a:schemeClr val="tx1"/>
+                </a:solidFill>
+                <a:effectLst/>
+              </a:rPr>
+              <a:t> </a:t>
+            </a:r>
+            <a:r>
+              <a:rPr kumimoji="0" lang="en-US" altLang="en-US" sz="2600" b="0" i="0" u="none" strike="noStrike" cap="none" normalizeH="0" baseline="0" dirty="0" err="1">
+                <a:ln>
+                  <a:noFill/>
+                </a:ln>
+                <a:solidFill>
+                  <a:schemeClr val="tx1"/>
+                </a:solidFill>
+                <a:effectLst/>
+              </a:rPr>
+              <a:t>ogromne</a:t>
+            </a:r>
+            <a:r>
+              <a:rPr kumimoji="0" lang="en-US" altLang="en-US" sz="2600" b="0" i="0" u="none" strike="noStrike" cap="none" normalizeH="0" baseline="0" dirty="0">
+                <a:ln>
+                  <a:noFill/>
+                </a:ln>
+                <a:solidFill>
+                  <a:schemeClr val="tx1"/>
+                </a:solidFill>
+                <a:effectLst/>
+              </a:rPr>
+              <a:t> </a:t>
+            </a:r>
+            <a:r>
+              <a:rPr kumimoji="0" lang="en-US" altLang="en-US" sz="2600" b="0" i="0" u="none" strike="noStrike" cap="none" normalizeH="0" baseline="0" dirty="0" err="1">
+                <a:ln>
+                  <a:noFill/>
+                </a:ln>
+                <a:solidFill>
+                  <a:schemeClr val="tx1"/>
+                </a:solidFill>
+                <a:effectLst/>
+              </a:rPr>
+              <a:t>količine</a:t>
+            </a:r>
+            <a:r>
+              <a:rPr kumimoji="0" lang="en-US" altLang="en-US" sz="2600" b="0" i="0" u="none" strike="noStrike" cap="none" normalizeH="0" baseline="0" dirty="0">
+                <a:ln>
+                  <a:noFill/>
+                </a:ln>
+                <a:solidFill>
+                  <a:schemeClr val="tx1"/>
+                </a:solidFill>
+                <a:effectLst/>
+              </a:rPr>
+              <a:t> </a:t>
+            </a:r>
+            <a:r>
+              <a:rPr kumimoji="0" lang="en-US" altLang="en-US" sz="2600" b="0" i="0" u="none" strike="noStrike" cap="none" normalizeH="0" baseline="0" dirty="0" err="1">
+                <a:ln>
+                  <a:noFill/>
+                </a:ln>
+                <a:solidFill>
+                  <a:schemeClr val="tx1"/>
+                </a:solidFill>
+                <a:effectLst/>
+              </a:rPr>
+              <a:t>podataka</a:t>
+            </a:r>
+            <a:r>
+              <a:rPr kumimoji="0" lang="en-US" altLang="en-US" sz="2600" b="0" i="0" u="none" strike="noStrike" cap="none" normalizeH="0" baseline="0" dirty="0">
+                <a:ln>
+                  <a:noFill/>
+                </a:ln>
+                <a:solidFill>
+                  <a:schemeClr val="tx1"/>
+                </a:solidFill>
+                <a:effectLst/>
+              </a:rPr>
+              <a:t> </a:t>
+            </a:r>
+          </a:p>
+          <a:p>
+            <a:pPr eaLnBrk="0" fontAlgn="base" hangingPunct="0">
+              <a:lnSpc>
+                <a:spcPct val="100000"/>
+              </a:lnSpc>
+              <a:spcBef>
+                <a:spcPct val="0"/>
+              </a:spcBef>
+              <a:spcAft>
+                <a:spcPct val="0"/>
+              </a:spcAft>
+            </a:pPr>
+            <a:r>
+              <a:rPr kumimoji="0" lang="en-US" altLang="en-US" sz="2600" b="0" i="0" u="none" strike="noStrike" cap="none" normalizeH="0" baseline="0" dirty="0" err="1">
+                <a:ln>
+                  <a:noFill/>
+                </a:ln>
+                <a:solidFill>
+                  <a:schemeClr val="tx1"/>
+                </a:solidFill>
+                <a:effectLst/>
+              </a:rPr>
+              <a:t>Potrebna</a:t>
+            </a:r>
+            <a:r>
+              <a:rPr kumimoji="0" lang="en-US" altLang="en-US" sz="2600" b="0" i="0" u="none" strike="noStrike" cap="none" normalizeH="0" baseline="0" dirty="0">
+                <a:ln>
+                  <a:noFill/>
+                </a:ln>
+                <a:solidFill>
+                  <a:schemeClr val="tx1"/>
+                </a:solidFill>
+                <a:effectLst/>
+              </a:rPr>
+              <a:t> je </a:t>
+            </a:r>
+            <a:r>
+              <a:rPr kumimoji="0" lang="en-US" altLang="en-US" sz="2600" b="0" i="0" u="none" strike="noStrike" cap="none" normalizeH="0" baseline="0" dirty="0" err="1">
+                <a:ln>
+                  <a:noFill/>
+                </a:ln>
+                <a:solidFill>
+                  <a:schemeClr val="tx1"/>
+                </a:solidFill>
+                <a:effectLst/>
+              </a:rPr>
+              <a:t>optimizacija</a:t>
+            </a:r>
+            <a:r>
+              <a:rPr kumimoji="0" lang="en-US" altLang="en-US" sz="2600" b="0" i="0" u="none" strike="noStrike" cap="none" normalizeH="0" baseline="0" dirty="0">
+                <a:ln>
+                  <a:noFill/>
+                </a:ln>
+                <a:solidFill>
+                  <a:schemeClr val="tx1"/>
+                </a:solidFill>
+                <a:effectLst/>
+              </a:rPr>
+              <a:t> </a:t>
+            </a:r>
+            <a:r>
+              <a:rPr kumimoji="0" lang="en-US" altLang="en-US" sz="2600" b="0" i="0" u="none" strike="noStrike" cap="none" normalizeH="0" baseline="0" dirty="0" err="1">
+                <a:ln>
+                  <a:noFill/>
+                </a:ln>
+                <a:solidFill>
+                  <a:schemeClr val="tx1"/>
+                </a:solidFill>
+                <a:effectLst/>
+              </a:rPr>
+              <a:t>pristupa</a:t>
+            </a:r>
+            <a:r>
+              <a:rPr kumimoji="0" lang="en-US" altLang="en-US" sz="2600" b="0" i="0" u="none" strike="noStrike" cap="none" normalizeH="0" baseline="0" dirty="0">
+                <a:ln>
+                  <a:noFill/>
+                </a:ln>
+                <a:solidFill>
+                  <a:schemeClr val="tx1"/>
+                </a:solidFill>
+                <a:effectLst/>
+              </a:rPr>
+              <a:t> </a:t>
+            </a:r>
+            <a:r>
+              <a:rPr kumimoji="0" lang="en-US" altLang="en-US" sz="2600" b="0" i="0" u="none" strike="noStrike" cap="none" normalizeH="0" baseline="0" dirty="0" err="1">
+                <a:ln>
+                  <a:noFill/>
+                </a:ln>
+                <a:solidFill>
+                  <a:schemeClr val="tx1"/>
+                </a:solidFill>
+                <a:effectLst/>
+              </a:rPr>
+              <a:t>podacima</a:t>
+            </a:r>
+            <a:r>
+              <a:rPr kumimoji="0" lang="en-US" altLang="en-US" sz="2600" b="0" i="0" u="none" strike="noStrike" cap="none" normalizeH="0" baseline="0" dirty="0">
+                <a:ln>
+                  <a:noFill/>
+                </a:ln>
+                <a:solidFill>
+                  <a:schemeClr val="tx1"/>
+                </a:solidFill>
+                <a:effectLst/>
+              </a:rPr>
+              <a:t> </a:t>
+            </a:r>
+          </a:p>
+          <a:p>
+            <a:pPr eaLnBrk="0" fontAlgn="base" hangingPunct="0">
+              <a:lnSpc>
+                <a:spcPct val="100000"/>
+              </a:lnSpc>
+              <a:spcBef>
+                <a:spcPct val="0"/>
+              </a:spcBef>
+              <a:spcAft>
+                <a:spcPct val="0"/>
+              </a:spcAft>
+            </a:pPr>
+            <a:r>
+              <a:rPr kumimoji="0" lang="en-US" altLang="en-US" sz="2600" b="0" i="0" u="none" strike="noStrike" cap="none" normalizeH="0" baseline="0" dirty="0" err="1">
+                <a:ln>
+                  <a:noFill/>
+                </a:ln>
+                <a:solidFill>
+                  <a:schemeClr val="tx1"/>
+                </a:solidFill>
+                <a:effectLst/>
+              </a:rPr>
+              <a:t>Indeksi</a:t>
+            </a:r>
+            <a:r>
+              <a:rPr kumimoji="0" lang="en-US" altLang="en-US" sz="2600" b="0" i="0" u="none" strike="noStrike" cap="none" normalizeH="0" baseline="0" dirty="0">
+                <a:ln>
+                  <a:noFill/>
+                </a:ln>
+                <a:solidFill>
+                  <a:schemeClr val="tx1"/>
+                </a:solidFill>
+                <a:effectLst/>
+              </a:rPr>
+              <a:t> </a:t>
+            </a:r>
+            <a:r>
+              <a:rPr kumimoji="0" lang="en-US" altLang="en-US" sz="2600" b="0" i="0" u="none" strike="noStrike" cap="none" normalizeH="0" baseline="0" dirty="0" err="1">
+                <a:ln>
+                  <a:noFill/>
+                </a:ln>
+                <a:solidFill>
+                  <a:schemeClr val="tx1"/>
+                </a:solidFill>
+                <a:effectLst/>
+              </a:rPr>
+              <a:t>omogućavaju</a:t>
+            </a:r>
+            <a:r>
+              <a:rPr kumimoji="0" lang="en-US" altLang="en-US" sz="2600" b="0" i="0" u="none" strike="noStrike" cap="none" normalizeH="0" baseline="0" dirty="0">
+                <a:ln>
+                  <a:noFill/>
+                </a:ln>
+                <a:solidFill>
+                  <a:schemeClr val="tx1"/>
+                </a:solidFill>
+                <a:effectLst/>
+              </a:rPr>
+              <a:t> </a:t>
+            </a:r>
+            <a:r>
+              <a:rPr kumimoji="0" lang="en-US" altLang="en-US" sz="2600" b="0" i="0" u="none" strike="noStrike" cap="none" normalizeH="0" baseline="0" dirty="0" err="1">
+                <a:ln>
+                  <a:noFill/>
+                </a:ln>
+                <a:solidFill>
+                  <a:schemeClr val="tx1"/>
+                </a:solidFill>
+                <a:effectLst/>
+              </a:rPr>
+              <a:t>bržu</a:t>
+            </a:r>
+            <a:r>
+              <a:rPr kumimoji="0" lang="en-US" altLang="en-US" sz="2600" b="0" i="0" u="none" strike="noStrike" cap="none" normalizeH="0" baseline="0" dirty="0">
+                <a:ln>
+                  <a:noFill/>
+                </a:ln>
+                <a:solidFill>
+                  <a:schemeClr val="tx1"/>
+                </a:solidFill>
+                <a:effectLst/>
+              </a:rPr>
+              <a:t> </a:t>
+            </a:r>
+            <a:r>
+              <a:rPr kumimoji="0" lang="en-US" altLang="en-US" sz="2600" b="0" i="0" u="none" strike="noStrike" cap="none" normalizeH="0" baseline="0" dirty="0" err="1">
+                <a:ln>
+                  <a:noFill/>
+                </a:ln>
+                <a:solidFill>
+                  <a:schemeClr val="tx1"/>
+                </a:solidFill>
+                <a:effectLst/>
+              </a:rPr>
+              <a:t>pretragu</a:t>
+            </a:r>
+            <a:r>
+              <a:rPr kumimoji="0" lang="en-US" altLang="en-US" sz="2600" b="0" i="0" u="none" strike="noStrike" cap="none" normalizeH="0" baseline="0" dirty="0">
+                <a:ln>
+                  <a:noFill/>
+                </a:ln>
+                <a:solidFill>
+                  <a:schemeClr val="tx1"/>
+                </a:solidFill>
+                <a:effectLst/>
+              </a:rPr>
+              <a:t> </a:t>
+            </a:r>
+            <a:r>
+              <a:rPr kumimoji="0" lang="en-US" altLang="en-US" sz="2600" b="0" i="0" u="none" strike="noStrike" cap="none" normalizeH="0" baseline="0" dirty="0" err="1">
+                <a:ln>
+                  <a:noFill/>
+                </a:ln>
+                <a:solidFill>
+                  <a:schemeClr val="tx1"/>
+                </a:solidFill>
+                <a:effectLst/>
+              </a:rPr>
+              <a:t>podataka</a:t>
+            </a:r>
+            <a:r>
+              <a:rPr kumimoji="0" lang="en-US" altLang="en-US" sz="2600" b="0" i="0" u="none" strike="noStrike" cap="none" normalizeH="0" baseline="0" dirty="0">
+                <a:ln>
+                  <a:noFill/>
+                </a:ln>
+                <a:solidFill>
+                  <a:schemeClr val="tx1"/>
+                </a:solidFill>
+                <a:effectLst/>
+              </a:rPr>
+              <a:t> </a:t>
+            </a:r>
+          </a:p>
+          <a:p>
+            <a:pPr eaLnBrk="0" fontAlgn="base" hangingPunct="0">
+              <a:lnSpc>
+                <a:spcPct val="100000"/>
+              </a:lnSpc>
+              <a:spcBef>
+                <a:spcPct val="0"/>
+              </a:spcBef>
+              <a:spcAft>
+                <a:spcPct val="0"/>
+              </a:spcAft>
+            </a:pPr>
+            <a:r>
+              <a:rPr kumimoji="0" lang="sr-Latn-RS" altLang="en-US" sz="2600" b="0" i="0" u="none" strike="noStrike" cap="none" normalizeH="0" baseline="0" dirty="0">
+                <a:ln>
+                  <a:noFill/>
+                </a:ln>
+                <a:solidFill>
+                  <a:schemeClr val="tx1"/>
+                </a:solidFill>
+                <a:effectLst/>
+              </a:rPr>
+              <a:t>  </a:t>
+            </a:r>
+            <a:r>
+              <a:rPr kumimoji="0" lang="en-US" altLang="en-US" sz="2600" b="0" i="0" u="none" strike="noStrike" cap="none" normalizeH="0" baseline="0" dirty="0" err="1">
+                <a:ln>
+                  <a:noFill/>
+                </a:ln>
+                <a:solidFill>
+                  <a:schemeClr val="tx1"/>
+                </a:solidFill>
+                <a:effectLst/>
+              </a:rPr>
+              <a:t>Postoji</a:t>
+            </a:r>
+            <a:r>
+              <a:rPr kumimoji="0" lang="en-US" altLang="en-US" sz="2600" b="0" i="0" u="none" strike="noStrike" cap="none" normalizeH="0" baseline="0" dirty="0">
+                <a:ln>
+                  <a:noFill/>
+                </a:ln>
+                <a:solidFill>
+                  <a:schemeClr val="tx1"/>
+                </a:solidFill>
+                <a:effectLst/>
+              </a:rPr>
+              <a:t> </a:t>
+            </a:r>
+            <a:r>
+              <a:rPr kumimoji="0" lang="en-US" altLang="en-US" sz="2600" b="0" i="0" u="none" strike="noStrike" cap="none" normalizeH="0" baseline="0" dirty="0" err="1">
+                <a:ln>
+                  <a:noFill/>
+                </a:ln>
+                <a:solidFill>
+                  <a:schemeClr val="tx1"/>
+                </a:solidFill>
+                <a:effectLst/>
+              </a:rPr>
+              <a:t>više</a:t>
+            </a:r>
+            <a:r>
+              <a:rPr kumimoji="0" lang="en-US" altLang="en-US" sz="2600" b="0" i="0" u="none" strike="noStrike" cap="none" normalizeH="0" baseline="0" dirty="0">
+                <a:ln>
+                  <a:noFill/>
+                </a:ln>
+                <a:solidFill>
+                  <a:schemeClr val="tx1"/>
+                </a:solidFill>
+                <a:effectLst/>
+              </a:rPr>
+              <a:t> </a:t>
+            </a:r>
+            <a:r>
+              <a:rPr kumimoji="0" lang="en-US" altLang="en-US" sz="2600" b="0" i="0" u="none" strike="noStrike" cap="none" normalizeH="0" baseline="0" dirty="0" err="1">
+                <a:ln>
+                  <a:noFill/>
+                </a:ln>
+                <a:solidFill>
+                  <a:schemeClr val="tx1"/>
+                </a:solidFill>
+                <a:effectLst/>
+              </a:rPr>
+              <a:t>vrsta</a:t>
+            </a:r>
+            <a:r>
+              <a:rPr kumimoji="0" lang="en-US" altLang="en-US" sz="2600" b="0" i="0" u="none" strike="noStrike" cap="none" normalizeH="0" baseline="0" dirty="0">
+                <a:ln>
+                  <a:noFill/>
+                </a:ln>
+                <a:solidFill>
+                  <a:schemeClr val="tx1"/>
+                </a:solidFill>
+                <a:effectLst/>
+              </a:rPr>
+              <a:t> </a:t>
+            </a:r>
+            <a:r>
+              <a:rPr kumimoji="0" lang="en-US" altLang="en-US" sz="2600" b="0" i="0" u="none" strike="noStrike" cap="none" normalizeH="0" baseline="0" dirty="0" err="1">
+                <a:ln>
+                  <a:noFill/>
+                </a:ln>
+                <a:solidFill>
+                  <a:schemeClr val="tx1"/>
+                </a:solidFill>
+                <a:effectLst/>
+              </a:rPr>
+              <a:t>indeksa</a:t>
+            </a:r>
+            <a:r>
+              <a:rPr kumimoji="0" lang="en-US" altLang="en-US" sz="2600" b="0" i="0" u="none" strike="noStrike" cap="none" normalizeH="0" baseline="0" dirty="0">
+                <a:ln>
+                  <a:noFill/>
+                </a:ln>
+                <a:solidFill>
+                  <a:schemeClr val="tx1"/>
+                </a:solidFill>
+                <a:effectLst/>
+              </a:rPr>
+              <a:t>: </a:t>
+            </a:r>
+          </a:p>
+          <a:p>
+            <a:pPr lvl="1" eaLnBrk="0" fontAlgn="base" hangingPunct="0">
+              <a:lnSpc>
+                <a:spcPct val="100000"/>
+              </a:lnSpc>
+              <a:spcBef>
+                <a:spcPct val="0"/>
+              </a:spcBef>
+              <a:spcAft>
+                <a:spcPct val="0"/>
+              </a:spcAft>
+            </a:pPr>
+            <a:r>
+              <a:rPr kumimoji="0" lang="en-US" altLang="en-US" sz="2600" b="0" i="0" u="none" strike="noStrike" cap="none" normalizeH="0" baseline="0" dirty="0">
+                <a:ln>
+                  <a:noFill/>
+                </a:ln>
+                <a:solidFill>
+                  <a:schemeClr val="tx1"/>
+                </a:solidFill>
+                <a:effectLst/>
+              </a:rPr>
+              <a:t>B-tree </a:t>
+            </a:r>
+          </a:p>
+          <a:p>
+            <a:pPr lvl="1" eaLnBrk="0" fontAlgn="base" hangingPunct="0">
+              <a:lnSpc>
+                <a:spcPct val="100000"/>
+              </a:lnSpc>
+              <a:spcBef>
+                <a:spcPct val="0"/>
+              </a:spcBef>
+              <a:spcAft>
+                <a:spcPct val="0"/>
+              </a:spcAft>
+            </a:pPr>
+            <a:r>
+              <a:rPr kumimoji="0" lang="en-US" altLang="en-US" sz="2600" b="0" i="0" u="none" strike="noStrike" cap="none" normalizeH="0" baseline="0" dirty="0">
+                <a:ln>
+                  <a:noFill/>
+                </a:ln>
+                <a:solidFill>
+                  <a:schemeClr val="tx1"/>
+                </a:solidFill>
+                <a:effectLst/>
+              </a:rPr>
+              <a:t>Hash </a:t>
+            </a:r>
+          </a:p>
+          <a:p>
+            <a:pPr lvl="1" eaLnBrk="0" fontAlgn="base" hangingPunct="0">
+              <a:lnSpc>
+                <a:spcPct val="100000"/>
+              </a:lnSpc>
+              <a:spcBef>
+                <a:spcPct val="0"/>
+              </a:spcBef>
+              <a:spcAft>
+                <a:spcPct val="0"/>
+              </a:spcAft>
+            </a:pPr>
+            <a:r>
+              <a:rPr kumimoji="0" lang="en-US" altLang="en-US" sz="2600" b="0" i="0" u="none" strike="noStrike" cap="none" normalizeH="0" baseline="0" dirty="0">
+                <a:ln>
+                  <a:noFill/>
+                </a:ln>
+                <a:solidFill>
+                  <a:schemeClr val="tx1"/>
+                </a:solidFill>
+                <a:effectLst/>
+              </a:rPr>
+              <a:t>GIN </a:t>
+            </a:r>
+          </a:p>
+          <a:p>
+            <a:pPr lvl="1" eaLnBrk="0" fontAlgn="base" hangingPunct="0">
+              <a:lnSpc>
+                <a:spcPct val="100000"/>
+              </a:lnSpc>
+              <a:spcBef>
+                <a:spcPct val="0"/>
+              </a:spcBef>
+              <a:spcAft>
+                <a:spcPct val="0"/>
+              </a:spcAft>
+            </a:pPr>
+            <a:r>
+              <a:rPr kumimoji="0" lang="en-US" altLang="en-US" sz="2600" b="0" i="0" u="none" strike="noStrike" cap="none" normalizeH="0" baseline="0" dirty="0">
+                <a:ln>
+                  <a:noFill/>
+                </a:ln>
+                <a:solidFill>
+                  <a:schemeClr val="tx1"/>
+                </a:solidFill>
+                <a:effectLst/>
+              </a:rPr>
+              <a:t>BRIN </a:t>
+            </a:r>
+          </a:p>
+          <a:p>
+            <a:pPr lvl="1" eaLnBrk="0" fontAlgn="base" hangingPunct="0">
+              <a:lnSpc>
+                <a:spcPct val="100000"/>
+              </a:lnSpc>
+              <a:spcBef>
+                <a:spcPct val="0"/>
+              </a:spcBef>
+              <a:spcAft>
+                <a:spcPct val="0"/>
+              </a:spcAft>
+            </a:pPr>
+            <a:r>
+              <a:rPr kumimoji="0" lang="en-US" altLang="en-US" sz="2600" b="0" i="0" u="none" strike="noStrike" cap="none" normalizeH="0" baseline="0" dirty="0" err="1">
+                <a:ln>
+                  <a:noFill/>
+                </a:ln>
+                <a:solidFill>
+                  <a:schemeClr val="tx1"/>
+                </a:solidFill>
+                <a:effectLst/>
+              </a:rPr>
+              <a:t>GiST</a:t>
+            </a:r>
+            <a:r>
+              <a:rPr kumimoji="0" lang="en-US" altLang="en-US" sz="2600" b="0" i="0" u="none" strike="noStrike" cap="none" normalizeH="0" baseline="0" dirty="0">
+                <a:ln>
+                  <a:noFill/>
+                </a:ln>
+                <a:solidFill>
+                  <a:schemeClr val="tx1"/>
+                </a:solidFill>
+                <a:effectLst/>
+              </a:rPr>
+              <a:t> </a:t>
+            </a:r>
+            <a:endParaRPr lang="sr-Latn-RS" altLang="en-US" sz="2600" dirty="0"/>
+          </a:p>
+          <a:p>
+            <a:pPr eaLnBrk="0" fontAlgn="base" hangingPunct="0">
+              <a:lnSpc>
+                <a:spcPct val="100000"/>
+              </a:lnSpc>
+              <a:spcBef>
+                <a:spcPct val="0"/>
+              </a:spcBef>
+              <a:spcAft>
+                <a:spcPct val="0"/>
+              </a:spcAft>
+            </a:pPr>
+            <a:r>
+              <a:rPr kumimoji="0" lang="sr-Latn-RS" altLang="en-US" sz="2600" b="0" i="0" u="none" strike="noStrike" cap="none" normalizeH="0" baseline="0" dirty="0">
+                <a:ln>
+                  <a:noFill/>
+                </a:ln>
+                <a:solidFill>
+                  <a:schemeClr val="tx1"/>
+                </a:solidFill>
+                <a:effectLst/>
+              </a:rPr>
+              <a:t>Prednosti i ograničenja </a:t>
+            </a:r>
+            <a:r>
+              <a:rPr kumimoji="0" lang="sr-Latn-RS" altLang="en-US" sz="2600" b="0" i="0" u="none" strike="noStrike" cap="none" normalizeH="0" baseline="0" dirty="0" err="1">
+                <a:ln>
+                  <a:noFill/>
+                </a:ln>
+                <a:solidFill>
+                  <a:schemeClr val="tx1"/>
+                </a:solidFill>
+                <a:effectLst/>
+              </a:rPr>
+              <a:t>hash</a:t>
+            </a:r>
+            <a:r>
+              <a:rPr kumimoji="0" lang="sr-Latn-RS" altLang="en-US" sz="2600" b="0" i="0" u="none" strike="noStrike" cap="none" normalizeH="0" baseline="0" dirty="0">
+                <a:ln>
+                  <a:noFill/>
+                </a:ln>
+                <a:solidFill>
+                  <a:schemeClr val="tx1"/>
+                </a:solidFill>
+                <a:effectLst/>
+              </a:rPr>
+              <a:t> indeksa</a:t>
+            </a:r>
+            <a:endParaRPr kumimoji="0" lang="en-US" altLang="en-US" sz="2600" b="0" i="0" u="none" strike="noStrike" cap="none" normalizeH="0" baseline="0" dirty="0">
+              <a:ln>
+                <a:noFill/>
+              </a:ln>
+              <a:solidFill>
+                <a:schemeClr val="tx1"/>
+              </a:solidFill>
+              <a:effectLst/>
+            </a:endParaRPr>
+          </a:p>
+          <a:p>
+            <a:pPr eaLnBrk="0" fontAlgn="base" hangingPunct="0">
+              <a:lnSpc>
+                <a:spcPct val="100000"/>
+              </a:lnSpc>
+              <a:spcBef>
+                <a:spcPct val="0"/>
+              </a:spcBef>
+              <a:spcAft>
+                <a:spcPct val="0"/>
+              </a:spcAft>
+            </a:pPr>
+            <a:r>
+              <a:rPr kumimoji="0" lang="en-US" altLang="en-US" sz="2600" b="0" i="0" u="none" strike="noStrike" cap="none" normalizeH="0" baseline="0" dirty="0" err="1">
+                <a:ln>
+                  <a:noFill/>
+                </a:ln>
+                <a:solidFill>
+                  <a:schemeClr val="tx1"/>
+                </a:solidFill>
+                <a:effectLst/>
+              </a:rPr>
+              <a:t>Primena</a:t>
+            </a:r>
+            <a:r>
+              <a:rPr kumimoji="0" lang="en-US" altLang="en-US" sz="2600" b="0" i="0" u="none" strike="noStrike" cap="none" normalizeH="0" baseline="0" dirty="0">
+                <a:ln>
+                  <a:noFill/>
+                </a:ln>
+                <a:solidFill>
+                  <a:schemeClr val="tx1"/>
+                </a:solidFill>
+                <a:effectLst/>
+              </a:rPr>
+              <a:t> u PostgreSQL-u</a:t>
+            </a:r>
+          </a:p>
+          <a:p>
+            <a:pPr marL="0" marR="0" lvl="0" indent="0" algn="l" defTabSz="914400" rtl="0" eaLnBrk="0" fontAlgn="base" latinLnBrk="0" hangingPunct="0">
+              <a:lnSpc>
+                <a:spcPct val="100000"/>
+              </a:lnSpc>
+              <a:spcBef>
+                <a:spcPct val="0"/>
+              </a:spcBef>
+              <a:spcAft>
+                <a:spcPct val="0"/>
+              </a:spcAft>
+              <a:buClrTx/>
+              <a:buSzTx/>
+              <a:buFontTx/>
+              <a:buNone/>
+              <a:tabLst/>
+            </a:pPr>
+            <a:endParaRPr kumimoji="0" lang="en-US" altLang="en-US" sz="1800" b="0" i="0" u="none" strike="noStrike" cap="none" normalizeH="0" baseline="0" dirty="0">
+              <a:ln>
+                <a:noFill/>
+              </a:ln>
+              <a:solidFill>
+                <a:schemeClr val="tx1"/>
+              </a:solidFill>
+              <a:effectLst/>
+              <a:latin typeface="Arial" panose="020B0604020202020204" pitchFamily="34" charset="0"/>
+            </a:endParaRPr>
+          </a:p>
+        </p:txBody>
+      </p:sp>
+    </p:spTree>
+    <p:extLst>
+      <p:ext uri="{BB962C8B-B14F-4D97-AF65-F5344CB8AC3E}">
+        <p14:creationId xmlns:p14="http://schemas.microsoft.com/office/powerpoint/2010/main" val="958597703"/>
+      </p:ext>
+    </p:extLst>
+  </p:cSld>
+  <p:clrMapOvr>
+    <a:masterClrMapping/>
+  </p:clrMapOvr>
+</p:sld>
+</file>
+
+<file path=ppt/slides/slide3.xml><?xml version="1.0" encoding="utf-8"?>
+<p:sld xmlns:a="http://schemas.openxmlformats.org/drawingml/2006/main" xmlns:r="http://schemas.openxmlformats.org/officeDocument/2006/relationships" xmlns:p="http://schemas.openxmlformats.org/presentationml/2006/main">
+  <p:cSld>
+    <p:spTree>
+      <p:nvGrpSpPr>
+        <p:cNvPr id="1" name=""/>
+        <p:cNvGrpSpPr/>
+        <p:nvPr/>
+      </p:nvGrpSpPr>
+      <p:grpSpPr>
+        <a:xfrm>
+          <a:off x="0" y="0"/>
+          <a:ext cx="0" cy="0"/>
+          <a:chOff x="0" y="0"/>
+          <a:chExt cx="0" cy="0"/>
+        </a:xfrm>
+      </p:grpSpPr>
+      <p:sp>
+        <p:nvSpPr>
+          <p:cNvPr id="2" name="Title 1">
+            <a:extLst>
+              <a:ext uri="{FF2B5EF4-FFF2-40B4-BE49-F238E27FC236}">
+                <a16:creationId xmlns:a16="http://schemas.microsoft.com/office/drawing/2014/main" id="{C84C4C5C-8107-44A0-8753-E2BF29B7491E}"/>
+              </a:ext>
+            </a:extLst>
+          </p:cNvPr>
+          <p:cNvSpPr>
+            <a:spLocks noGrp="1"/>
+          </p:cNvSpPr>
+          <p:nvPr>
+            <p:ph type="title"/>
+          </p:nvPr>
+        </p:nvSpPr>
+        <p:spPr/>
+        <p:txBody>
+          <a:bodyPr/>
+          <a:lstStyle/>
+          <a:p>
+            <a:r>
+              <a:rPr lang="sr-Latn-RS" dirty="0"/>
+              <a:t>Indeksiranje</a:t>
+            </a:r>
+            <a:endParaRPr lang="en-US" dirty="0"/>
+          </a:p>
+        </p:txBody>
+      </p:sp>
+      <p:sp>
+        <p:nvSpPr>
+          <p:cNvPr id="3" name="Content Placeholder 2">
+            <a:extLst>
+              <a:ext uri="{FF2B5EF4-FFF2-40B4-BE49-F238E27FC236}">
+                <a16:creationId xmlns:a16="http://schemas.microsoft.com/office/drawing/2014/main" id="{DF84B9EB-5009-4314-914E-A154F35B9462}"/>
+              </a:ext>
+            </a:extLst>
+          </p:cNvPr>
+          <p:cNvSpPr>
+            <a:spLocks noGrp="1"/>
+          </p:cNvSpPr>
+          <p:nvPr>
+            <p:ph idx="1"/>
+          </p:nvPr>
+        </p:nvSpPr>
+        <p:spPr/>
+        <p:txBody>
+          <a:bodyPr>
+            <a:normAutofit/>
+          </a:bodyPr>
+          <a:lstStyle/>
+          <a:p>
+            <a:pPr>
+              <a:buFont typeface="Arial" panose="020B0604020202020204" pitchFamily="34" charset="0"/>
+              <a:buChar char="•"/>
+            </a:pPr>
+            <a:r>
+              <a:rPr lang="en-US" sz="2600" dirty="0" err="1"/>
+              <a:t>Indeks</a:t>
+            </a:r>
+            <a:r>
+              <a:rPr lang="en-US" sz="2600" dirty="0"/>
+              <a:t> je </a:t>
+            </a:r>
+            <a:r>
+              <a:rPr lang="en-US" sz="2600" dirty="0" err="1"/>
+              <a:t>posebna</a:t>
+            </a:r>
+            <a:r>
+              <a:rPr lang="en-US" sz="2600" dirty="0"/>
+              <a:t> </a:t>
+            </a:r>
+            <a:r>
+              <a:rPr lang="en-US" sz="2600" dirty="0" err="1"/>
+              <a:t>struktura</a:t>
+            </a:r>
+            <a:r>
+              <a:rPr lang="en-US" sz="2600" dirty="0"/>
+              <a:t> </a:t>
+            </a:r>
+            <a:r>
+              <a:rPr lang="en-US" sz="2600" dirty="0" err="1"/>
+              <a:t>podataka</a:t>
+            </a:r>
+            <a:r>
+              <a:rPr lang="en-US" sz="2600" dirty="0"/>
+              <a:t> u </a:t>
+            </a:r>
+            <a:r>
+              <a:rPr lang="en-US" sz="2600" dirty="0" err="1"/>
+              <a:t>bazi</a:t>
+            </a:r>
+            <a:r>
+              <a:rPr lang="en-US" sz="2600" dirty="0"/>
+              <a:t> </a:t>
+            </a:r>
+          </a:p>
+          <a:p>
+            <a:pPr>
+              <a:buFont typeface="Arial" panose="020B0604020202020204" pitchFamily="34" charset="0"/>
+              <a:buChar char="•"/>
+            </a:pPr>
+            <a:r>
+              <a:rPr lang="en-US" sz="2600" dirty="0" err="1"/>
+              <a:t>Koristi</a:t>
+            </a:r>
+            <a:r>
+              <a:rPr lang="en-US" sz="2600" dirty="0"/>
+              <a:t> se za </a:t>
+            </a:r>
+            <a:r>
+              <a:rPr lang="en-US" sz="2600" dirty="0" err="1"/>
+              <a:t>ubrzavanje</a:t>
+            </a:r>
+            <a:r>
+              <a:rPr lang="en-US" sz="2600" dirty="0"/>
+              <a:t> SELECT </a:t>
+            </a:r>
+            <a:r>
+              <a:rPr lang="en-US" sz="2600" dirty="0" err="1"/>
+              <a:t>upita</a:t>
+            </a:r>
+            <a:r>
+              <a:rPr lang="en-US" sz="2600" dirty="0"/>
+              <a:t> </a:t>
+            </a:r>
+          </a:p>
+          <a:p>
+            <a:pPr>
+              <a:buFont typeface="Arial" panose="020B0604020202020204" pitchFamily="34" charset="0"/>
+              <a:buChar char="•"/>
+            </a:pPr>
+            <a:r>
+              <a:rPr lang="en-US" sz="2600" dirty="0" err="1"/>
+              <a:t>Umesto</a:t>
+            </a:r>
+            <a:r>
+              <a:rPr lang="en-US" sz="2600" dirty="0"/>
+              <a:t> </a:t>
+            </a:r>
+            <a:r>
+              <a:rPr lang="en-US" sz="2600" dirty="0" err="1"/>
+              <a:t>pretrage</a:t>
+            </a:r>
+            <a:r>
+              <a:rPr lang="en-US" sz="2600" dirty="0"/>
+              <a:t> </a:t>
+            </a:r>
+            <a:r>
+              <a:rPr lang="en-US" sz="2600" dirty="0" err="1"/>
+              <a:t>cele</a:t>
+            </a:r>
+            <a:r>
+              <a:rPr lang="en-US" sz="2600" dirty="0"/>
+              <a:t> </a:t>
+            </a:r>
+            <a:r>
+              <a:rPr lang="en-US" sz="2600" dirty="0" err="1"/>
+              <a:t>tabele</a:t>
+            </a:r>
+            <a:r>
+              <a:rPr lang="sr-Latn-RS" sz="2600" dirty="0"/>
+              <a:t> </a:t>
+            </a:r>
+            <a:r>
+              <a:rPr lang="en-US" sz="2600" dirty="0" err="1"/>
+              <a:t>koristi</a:t>
+            </a:r>
+            <a:r>
+              <a:rPr lang="en-US" sz="2600" dirty="0"/>
+              <a:t> se </a:t>
+            </a:r>
+            <a:r>
+              <a:rPr lang="en-US" sz="2600" dirty="0" err="1"/>
+              <a:t>organizovana</a:t>
+            </a:r>
+            <a:r>
+              <a:rPr lang="en-US" sz="2600" dirty="0"/>
+              <a:t> </a:t>
+            </a:r>
+            <a:r>
+              <a:rPr lang="en-US" sz="2600" dirty="0" err="1"/>
+              <a:t>struktura</a:t>
+            </a:r>
+            <a:r>
+              <a:rPr lang="en-US" sz="2600" dirty="0"/>
+              <a:t> za </a:t>
+            </a:r>
+            <a:r>
+              <a:rPr lang="en-US" sz="2600" dirty="0" err="1"/>
+              <a:t>brži</a:t>
+            </a:r>
+            <a:r>
+              <a:rPr lang="en-US" sz="2600" dirty="0"/>
+              <a:t> </a:t>
+            </a:r>
+            <a:r>
+              <a:rPr lang="en-US" sz="2600" dirty="0" err="1"/>
+              <a:t>pristup</a:t>
+            </a:r>
+            <a:r>
+              <a:rPr lang="en-US" sz="2600" dirty="0"/>
+              <a:t> </a:t>
+            </a:r>
+          </a:p>
+          <a:p>
+            <a:r>
+              <a:rPr lang="en-US" sz="2600" b="1" dirty="0" err="1"/>
+              <a:t>Prednosti</a:t>
+            </a:r>
+            <a:endParaRPr lang="en-US" sz="2600" b="1" dirty="0"/>
+          </a:p>
+          <a:p>
+            <a:pPr lvl="1"/>
+            <a:r>
+              <a:rPr lang="en-US" sz="2200" dirty="0" err="1"/>
+              <a:t>Brža</a:t>
+            </a:r>
+            <a:r>
+              <a:rPr lang="en-US" sz="2200" dirty="0"/>
+              <a:t> </a:t>
+            </a:r>
+            <a:r>
+              <a:rPr lang="en-US" sz="2200" dirty="0" err="1"/>
+              <a:t>pretraga</a:t>
+            </a:r>
+            <a:r>
+              <a:rPr lang="en-US" sz="2200" dirty="0"/>
+              <a:t> </a:t>
+            </a:r>
+          </a:p>
+          <a:p>
+            <a:pPr lvl="1"/>
+            <a:r>
+              <a:rPr lang="en-US" sz="2200" dirty="0"/>
+              <a:t>Manje </a:t>
+            </a:r>
+            <a:r>
+              <a:rPr lang="en-US" sz="2200" dirty="0" err="1"/>
+              <a:t>čitanja</a:t>
+            </a:r>
+            <a:r>
+              <a:rPr lang="en-US" sz="2200" dirty="0"/>
+              <a:t> </a:t>
+            </a:r>
+            <a:r>
+              <a:rPr lang="en-US" sz="2200" dirty="0" err="1"/>
+              <a:t>sa</a:t>
+            </a:r>
+            <a:r>
+              <a:rPr lang="en-US" sz="2200" dirty="0"/>
+              <a:t> </a:t>
+            </a:r>
+            <a:r>
+              <a:rPr lang="en-US" sz="2200" dirty="0" err="1"/>
+              <a:t>diska</a:t>
+            </a:r>
+            <a:r>
+              <a:rPr lang="en-US" sz="2200" dirty="0"/>
+              <a:t> </a:t>
+            </a:r>
+          </a:p>
+          <a:p>
+            <a:r>
+              <a:rPr lang="en-US" sz="2600" b="1" dirty="0"/>
+              <a:t>Mane</a:t>
+            </a:r>
+          </a:p>
+          <a:p>
+            <a:pPr lvl="1"/>
+            <a:r>
+              <a:rPr lang="en-US" sz="2200" dirty="0" err="1"/>
+              <a:t>Zauzima</a:t>
+            </a:r>
+            <a:r>
+              <a:rPr lang="en-US" sz="2200" dirty="0"/>
+              <a:t> </a:t>
+            </a:r>
+            <a:r>
+              <a:rPr lang="en-US" sz="2200" dirty="0" err="1"/>
+              <a:t>dodatni</a:t>
+            </a:r>
+            <a:r>
+              <a:rPr lang="en-US" sz="2200" dirty="0"/>
+              <a:t> </a:t>
+            </a:r>
+            <a:r>
+              <a:rPr lang="en-US" sz="2200" dirty="0" err="1"/>
+              <a:t>prostor</a:t>
+            </a:r>
+            <a:r>
+              <a:rPr lang="en-US" sz="2200" dirty="0"/>
+              <a:t> </a:t>
+            </a:r>
+          </a:p>
+          <a:p>
+            <a:pPr lvl="1"/>
+            <a:r>
+              <a:rPr lang="en-US" sz="2200" dirty="0" err="1"/>
+              <a:t>Usporava</a:t>
+            </a:r>
+            <a:r>
+              <a:rPr lang="en-US" sz="2200" dirty="0"/>
+              <a:t> INSERT, UPDATE </a:t>
+            </a:r>
+            <a:r>
+              <a:rPr lang="en-US" sz="2200" dirty="0" err="1"/>
+              <a:t>i</a:t>
+            </a:r>
+            <a:r>
+              <a:rPr lang="en-US" sz="2200" dirty="0"/>
+              <a:t> DELETE </a:t>
+            </a:r>
+            <a:r>
+              <a:rPr lang="en-US" sz="2200" dirty="0" err="1"/>
+              <a:t>operacije</a:t>
+            </a:r>
+            <a:r>
+              <a:rPr lang="en-US" sz="2200" dirty="0"/>
+              <a:t> </a:t>
+            </a:r>
+          </a:p>
+          <a:p>
+            <a:endParaRPr lang="en-US" dirty="0"/>
+          </a:p>
+        </p:txBody>
+      </p:sp>
+    </p:spTree>
+    <p:extLst>
+      <p:ext uri="{BB962C8B-B14F-4D97-AF65-F5344CB8AC3E}">
+        <p14:creationId xmlns:p14="http://schemas.microsoft.com/office/powerpoint/2010/main" val="1066013487"/>
+      </p:ext>
+    </p:extLst>
+  </p:cSld>
+  <p:clrMapOvr>
+    <a:masterClrMapping/>
+  </p:clrMapOvr>
+</p:sld>
+</file>
+
+<file path=ppt/slides/slide4.xml><?xml version="1.0" encoding="utf-8"?>
+<p:sld xmlns:a="http://schemas.openxmlformats.org/drawingml/2006/main" xmlns:r="http://schemas.openxmlformats.org/officeDocument/2006/relationships" xmlns:p="http://schemas.openxmlformats.org/presentationml/2006/main">
+  <p:cSld>
+    <p:spTree>
+      <p:nvGrpSpPr>
+        <p:cNvPr id="1" name=""/>
+        <p:cNvGrpSpPr/>
+        <p:nvPr/>
+      </p:nvGrpSpPr>
+      <p:grpSpPr>
+        <a:xfrm>
+          <a:off x="0" y="0"/>
+          <a:ext cx="0" cy="0"/>
+          <a:chOff x="0" y="0"/>
+          <a:chExt cx="0" cy="0"/>
+        </a:xfrm>
+      </p:grpSpPr>
+      <p:sp>
+        <p:nvSpPr>
+          <p:cNvPr id="2" name="Title 1">
+            <a:extLst>
+              <a:ext uri="{FF2B5EF4-FFF2-40B4-BE49-F238E27FC236}">
+                <a16:creationId xmlns:a16="http://schemas.microsoft.com/office/drawing/2014/main" id="{377C9C05-57C6-4C1F-9C9B-BC7DDF87AF85}"/>
+              </a:ext>
+            </a:extLst>
+          </p:cNvPr>
+          <p:cNvSpPr>
+            <a:spLocks noGrp="1"/>
+          </p:cNvSpPr>
+          <p:nvPr>
+            <p:ph type="title"/>
+          </p:nvPr>
+        </p:nvSpPr>
+        <p:spPr/>
+        <p:txBody>
+          <a:bodyPr/>
+          <a:lstStyle/>
+          <a:p>
+            <a:r>
+              <a:rPr lang="sr-Latn-RS" dirty="0"/>
+              <a:t>Tipovi indeksa u </a:t>
+            </a:r>
+            <a:r>
+              <a:rPr lang="sr-Latn-RS" dirty="0" err="1"/>
+              <a:t>PostgreSQL</a:t>
+            </a:r>
+            <a:endParaRPr lang="en-US" dirty="0"/>
+          </a:p>
+        </p:txBody>
+      </p:sp>
+      <p:sp>
+        <p:nvSpPr>
+          <p:cNvPr id="4" name="Rectangle 1">
+            <a:extLst>
+              <a:ext uri="{FF2B5EF4-FFF2-40B4-BE49-F238E27FC236}">
+                <a16:creationId xmlns:a16="http://schemas.microsoft.com/office/drawing/2014/main" id="{0E656440-B873-44E9-B62C-EB7457B32C56}"/>
+              </a:ext>
+            </a:extLst>
+          </p:cNvPr>
+          <p:cNvSpPr>
+            <a:spLocks noGrp="1" noChangeArrowheads="1"/>
+          </p:cNvSpPr>
+          <p:nvPr>
+            <p:ph idx="1"/>
+          </p:nvPr>
+        </p:nvSpPr>
+        <p:spPr bwMode="auto">
+          <a:xfrm>
+            <a:off x="838200" y="1450133"/>
+            <a:ext cx="9278923" cy="4401205"/>
+          </a:xfrm>
+          <a:prstGeom prst="rect">
+            <a:avLst/>
+          </a:prstGeom>
+          <a:noFill/>
+          <a:ln>
+            <a:noFill/>
+          </a:ln>
+          <a:effectLst/>
+          <a:extLst>
+            <a:ext uri="{909E8E84-426E-40DD-AFC4-6F175D3DCCD1}">
+              <a14:hiddenFill xmlns:a14="http://schemas.microsoft.com/office/drawing/2010/main">
+                <a:solidFill>
+                  <a:schemeClr val="accent1"/>
+                </a:solidFill>
+              </a14:hiddenFill>
+            </a:ext>
+            <a:ext uri="{91240B29-F687-4F45-9708-019B960494DF}">
+              <a14:hiddenLine xmlns:a14="http://schemas.microsoft.com/office/drawing/2010/main" w="9525">
+                <a:solidFill>
+                  <a:schemeClr val="tx1"/>
+                </a:solidFill>
+                <a:miter lim="800000"/>
+                <a:headEnd/>
+                <a:tailEnd/>
+              </a14:hiddenLine>
+            </a:ext>
+            <a:ext uri="{AF507438-7753-43E0-B8FC-AC1667EBCBE1}">
+              <a14:hiddenEffects xmlns:a14="http://schemas.microsoft.com/office/drawing/2010/main">
+                <a:effectLst>
+                  <a:outerShdw dist="35921" dir="2700000" algn="ctr" rotWithShape="0">
+                    <a:schemeClr val="bg2"/>
+                  </a:outerShdw>
+                </a:effectLst>
+              </a14:hiddenEffects>
+            </a:ext>
+          </a:extLst>
+        </p:spPr>
+        <p:txBody>
+          <a:bodyPr vert="horz" wrap="square" lIns="91440" tIns="45720" rIns="91440" bIns="45720" numCol="1" anchor="ctr" anchorCtr="0" compatLnSpc="1">
+            <a:prstTxWarp prst="textNoShape">
+              <a:avLst/>
+            </a:prstTxWarp>
+            <a:spAutoFit/>
+          </a:bodyPr>
+          <a:lstStyle/>
+          <a:p>
+            <a:pPr marL="0" marR="0" lvl="0" indent="0" algn="l" defTabSz="914400" rtl="0" eaLnBrk="0" fontAlgn="base" latinLnBrk="0" hangingPunct="0">
+              <a:lnSpc>
+                <a:spcPct val="100000"/>
+              </a:lnSpc>
+              <a:spcBef>
+                <a:spcPct val="0"/>
+              </a:spcBef>
+              <a:spcAft>
+                <a:spcPct val="0"/>
+              </a:spcAft>
+              <a:buClrTx/>
+              <a:buSzTx/>
+              <a:buFontTx/>
+              <a:buChar char="•"/>
+              <a:tabLst/>
+            </a:pPr>
+            <a:r>
+              <a:rPr kumimoji="0" lang="en-US" altLang="en-US" sz="2600" i="0" u="none" strike="noStrike" cap="none" normalizeH="0" baseline="0" dirty="0">
+                <a:ln>
+                  <a:noFill/>
+                </a:ln>
+                <a:solidFill>
+                  <a:schemeClr val="tx1"/>
+                </a:solidFill>
+                <a:effectLst/>
+              </a:rPr>
+              <a:t>B-tree </a:t>
+            </a:r>
+          </a:p>
+          <a:p>
+            <a:pPr marL="457200" lvl="1" indent="0" eaLnBrk="0" fontAlgn="base" hangingPunct="0">
+              <a:lnSpc>
+                <a:spcPct val="100000"/>
+              </a:lnSpc>
+              <a:spcBef>
+                <a:spcPct val="0"/>
+              </a:spcBef>
+              <a:spcAft>
+                <a:spcPct val="0"/>
+              </a:spcAft>
+              <a:buFontTx/>
+              <a:buChar char="•"/>
+            </a:pPr>
+            <a:r>
+              <a:rPr kumimoji="0" lang="en-US" altLang="en-US" sz="2200" b="0" i="0" u="none" strike="noStrike" cap="none" normalizeH="0" baseline="0" dirty="0" err="1">
+                <a:ln>
+                  <a:noFill/>
+                </a:ln>
+                <a:solidFill>
+                  <a:schemeClr val="tx1"/>
+                </a:solidFill>
+                <a:effectLst/>
+              </a:rPr>
+              <a:t>Podrazumevani</a:t>
+            </a:r>
+            <a:r>
+              <a:rPr kumimoji="0" lang="en-US" altLang="en-US" sz="2200" b="0" i="0" u="none" strike="noStrike" cap="none" normalizeH="0" baseline="0" dirty="0">
+                <a:ln>
+                  <a:noFill/>
+                </a:ln>
+                <a:solidFill>
+                  <a:schemeClr val="tx1"/>
+                </a:solidFill>
+                <a:effectLst/>
+              </a:rPr>
+              <a:t> </a:t>
+            </a:r>
+            <a:r>
+              <a:rPr kumimoji="0" lang="en-US" altLang="en-US" sz="2200" b="0" i="0" u="none" strike="noStrike" cap="none" normalizeH="0" baseline="0" dirty="0" err="1">
+                <a:ln>
+                  <a:noFill/>
+                </a:ln>
+                <a:solidFill>
+                  <a:schemeClr val="tx1"/>
+                </a:solidFill>
+                <a:effectLst/>
+              </a:rPr>
+              <a:t>indeks</a:t>
+            </a:r>
+            <a:r>
+              <a:rPr kumimoji="0" lang="en-US" altLang="en-US" sz="2200" b="0" i="0" u="none" strike="noStrike" cap="none" normalizeH="0" baseline="0" dirty="0">
+                <a:ln>
+                  <a:noFill/>
+                </a:ln>
+                <a:solidFill>
+                  <a:schemeClr val="tx1"/>
+                </a:solidFill>
+                <a:effectLst/>
+              </a:rPr>
+              <a:t> </a:t>
+            </a:r>
+          </a:p>
+          <a:p>
+            <a:pPr marL="457200" lvl="1" indent="0" eaLnBrk="0" fontAlgn="base" hangingPunct="0">
+              <a:lnSpc>
+                <a:spcPct val="100000"/>
+              </a:lnSpc>
+              <a:spcBef>
+                <a:spcPct val="0"/>
+              </a:spcBef>
+              <a:spcAft>
+                <a:spcPct val="0"/>
+              </a:spcAft>
+              <a:buFontTx/>
+              <a:buChar char="•"/>
+            </a:pPr>
+            <a:r>
+              <a:rPr kumimoji="0" lang="en-US" altLang="en-US" sz="2200" b="0" i="0" u="none" strike="noStrike" cap="none" normalizeH="0" baseline="0" dirty="0" err="1">
+                <a:ln>
+                  <a:noFill/>
+                </a:ln>
+                <a:solidFill>
+                  <a:schemeClr val="tx1"/>
+                </a:solidFill>
+                <a:effectLst/>
+              </a:rPr>
+              <a:t>Podržava</a:t>
+            </a:r>
+            <a:r>
+              <a:rPr kumimoji="0" lang="en-US" altLang="en-US" sz="2200" b="0" i="0" u="none" strike="noStrike" cap="none" normalizeH="0" baseline="0" dirty="0">
+                <a:ln>
+                  <a:noFill/>
+                </a:ln>
+                <a:solidFill>
+                  <a:schemeClr val="tx1"/>
+                </a:solidFill>
+                <a:effectLst/>
+              </a:rPr>
+              <a:t> </a:t>
+            </a:r>
+            <a:r>
+              <a:rPr kumimoji="0" lang="en-US" altLang="en-US" sz="2200" b="0" i="0" u="none" strike="noStrike" cap="none" normalizeH="0" baseline="0" dirty="0" err="1">
+                <a:ln>
+                  <a:noFill/>
+                </a:ln>
+                <a:solidFill>
+                  <a:schemeClr val="tx1"/>
+                </a:solidFill>
+                <a:effectLst/>
+              </a:rPr>
+              <a:t>poređenja</a:t>
+            </a:r>
+            <a:r>
+              <a:rPr kumimoji="0" lang="en-US" altLang="en-US" sz="2200" b="0" i="0" u="none" strike="noStrike" cap="none" normalizeH="0" baseline="0" dirty="0">
+                <a:ln>
+                  <a:noFill/>
+                </a:ln>
+                <a:solidFill>
+                  <a:schemeClr val="tx1"/>
+                </a:solidFill>
+                <a:effectLst/>
+              </a:rPr>
+              <a:t> </a:t>
+            </a:r>
+            <a:r>
+              <a:rPr kumimoji="0" lang="en-US" altLang="en-US" sz="2200" b="0" i="0" u="none" strike="noStrike" cap="none" normalizeH="0" baseline="0" dirty="0" err="1">
+                <a:ln>
+                  <a:noFill/>
+                </a:ln>
+                <a:solidFill>
+                  <a:schemeClr val="tx1"/>
+                </a:solidFill>
+                <a:effectLst/>
+              </a:rPr>
+              <a:t>i</a:t>
+            </a:r>
+            <a:r>
+              <a:rPr kumimoji="0" lang="en-US" altLang="en-US" sz="2200" b="0" i="0" u="none" strike="noStrike" cap="none" normalizeH="0" baseline="0" dirty="0">
+                <a:ln>
+                  <a:noFill/>
+                </a:ln>
+                <a:solidFill>
+                  <a:schemeClr val="tx1"/>
+                </a:solidFill>
+                <a:effectLst/>
+              </a:rPr>
+              <a:t> </a:t>
+            </a:r>
+            <a:r>
+              <a:rPr kumimoji="0" lang="en-US" altLang="en-US" sz="2200" b="0" i="0" u="none" strike="noStrike" cap="none" normalizeH="0" baseline="0" dirty="0" err="1">
+                <a:ln>
+                  <a:noFill/>
+                </a:ln>
+                <a:solidFill>
+                  <a:schemeClr val="tx1"/>
+                </a:solidFill>
+                <a:effectLst/>
+              </a:rPr>
+              <a:t>sortiranje</a:t>
+            </a:r>
+            <a:r>
+              <a:rPr kumimoji="0" lang="en-US" altLang="en-US" sz="2200" b="0" i="0" u="none" strike="noStrike" cap="none" normalizeH="0" baseline="0" dirty="0">
+                <a:ln>
+                  <a:noFill/>
+                </a:ln>
+                <a:solidFill>
+                  <a:schemeClr val="tx1"/>
+                </a:solidFill>
+                <a:effectLst/>
+              </a:rPr>
+              <a:t> </a:t>
+            </a:r>
+          </a:p>
+          <a:p>
+            <a:pPr marL="0" marR="0" lvl="0" indent="0" algn="l" defTabSz="914400" rtl="0" eaLnBrk="0" fontAlgn="base" latinLnBrk="0" hangingPunct="0">
+              <a:lnSpc>
+                <a:spcPct val="100000"/>
+              </a:lnSpc>
+              <a:spcBef>
+                <a:spcPct val="0"/>
+              </a:spcBef>
+              <a:spcAft>
+                <a:spcPct val="0"/>
+              </a:spcAft>
+              <a:buClrTx/>
+              <a:buSzTx/>
+              <a:buFontTx/>
+              <a:buChar char="•"/>
+              <a:tabLst/>
+            </a:pPr>
+            <a:r>
+              <a:rPr kumimoji="0" lang="en-US" altLang="en-US" sz="2600" i="0" u="none" strike="noStrike" cap="none" normalizeH="0" baseline="0" dirty="0">
+                <a:ln>
+                  <a:noFill/>
+                </a:ln>
+                <a:solidFill>
+                  <a:schemeClr val="tx1"/>
+                </a:solidFill>
+                <a:effectLst/>
+              </a:rPr>
+              <a:t>GIN </a:t>
+            </a:r>
+          </a:p>
+          <a:p>
+            <a:pPr marL="457200" lvl="1" indent="0" eaLnBrk="0" fontAlgn="base" hangingPunct="0">
+              <a:lnSpc>
+                <a:spcPct val="100000"/>
+              </a:lnSpc>
+              <a:spcBef>
+                <a:spcPct val="0"/>
+              </a:spcBef>
+              <a:spcAft>
+                <a:spcPct val="0"/>
+              </a:spcAft>
+              <a:buFontTx/>
+              <a:buChar char="•"/>
+            </a:pPr>
+            <a:r>
+              <a:rPr kumimoji="0" lang="en-US" altLang="en-US" sz="2200" b="0" i="0" u="none" strike="noStrike" cap="none" normalizeH="0" baseline="0" dirty="0" err="1">
+                <a:ln>
+                  <a:noFill/>
+                </a:ln>
+                <a:solidFill>
+                  <a:schemeClr val="tx1"/>
+                </a:solidFill>
+                <a:effectLst/>
+              </a:rPr>
+              <a:t>Tekst</a:t>
+            </a:r>
+            <a:r>
+              <a:rPr kumimoji="0" lang="en-US" altLang="en-US" sz="2200" b="0" i="0" u="none" strike="noStrike" cap="none" normalizeH="0" baseline="0" dirty="0">
+                <a:ln>
+                  <a:noFill/>
+                </a:ln>
+                <a:solidFill>
+                  <a:schemeClr val="tx1"/>
+                </a:solidFill>
+                <a:effectLst/>
+              </a:rPr>
+              <a:t> </a:t>
+            </a:r>
+            <a:r>
+              <a:rPr kumimoji="0" lang="en-US" altLang="en-US" sz="2200" b="0" i="0" u="none" strike="noStrike" cap="none" normalizeH="0" baseline="0" dirty="0" err="1">
+                <a:ln>
+                  <a:noFill/>
+                </a:ln>
+                <a:solidFill>
+                  <a:schemeClr val="tx1"/>
+                </a:solidFill>
+                <a:effectLst/>
+              </a:rPr>
+              <a:t>i</a:t>
+            </a:r>
+            <a:r>
+              <a:rPr kumimoji="0" lang="en-US" altLang="en-US" sz="2200" b="0" i="0" u="none" strike="noStrike" cap="none" normalizeH="0" baseline="0" dirty="0">
+                <a:ln>
+                  <a:noFill/>
+                </a:ln>
+                <a:solidFill>
+                  <a:schemeClr val="tx1"/>
+                </a:solidFill>
+                <a:effectLst/>
+              </a:rPr>
+              <a:t> JSON </a:t>
+            </a:r>
+            <a:r>
+              <a:rPr kumimoji="0" lang="en-US" altLang="en-US" sz="2200" b="0" i="0" u="none" strike="noStrike" cap="none" normalizeH="0" baseline="0" dirty="0" err="1">
+                <a:ln>
+                  <a:noFill/>
+                </a:ln>
+                <a:solidFill>
+                  <a:schemeClr val="tx1"/>
+                </a:solidFill>
+                <a:effectLst/>
+              </a:rPr>
+              <a:t>podaci</a:t>
+            </a:r>
+            <a:r>
+              <a:rPr kumimoji="0" lang="en-US" altLang="en-US" sz="2200" b="0" i="0" u="none" strike="noStrike" cap="none" normalizeH="0" baseline="0" dirty="0">
+                <a:ln>
+                  <a:noFill/>
+                </a:ln>
+                <a:solidFill>
+                  <a:schemeClr val="tx1"/>
+                </a:solidFill>
+                <a:effectLst/>
+              </a:rPr>
+              <a:t> </a:t>
+            </a:r>
+          </a:p>
+          <a:p>
+            <a:pPr marL="0" marR="0" lvl="0" indent="0" algn="l" defTabSz="914400" rtl="0" eaLnBrk="0" fontAlgn="base" latinLnBrk="0" hangingPunct="0">
+              <a:lnSpc>
+                <a:spcPct val="100000"/>
+              </a:lnSpc>
+              <a:spcBef>
+                <a:spcPct val="0"/>
+              </a:spcBef>
+              <a:spcAft>
+                <a:spcPct val="0"/>
+              </a:spcAft>
+              <a:buClrTx/>
+              <a:buSzTx/>
+              <a:buFontTx/>
+              <a:buChar char="•"/>
+              <a:tabLst/>
+            </a:pPr>
+            <a:r>
+              <a:rPr kumimoji="0" lang="en-US" altLang="en-US" sz="2600" i="0" u="none" strike="noStrike" cap="none" normalizeH="0" baseline="0" dirty="0">
+                <a:ln>
+                  <a:noFill/>
+                </a:ln>
+                <a:solidFill>
+                  <a:schemeClr val="tx1"/>
+                </a:solidFill>
+                <a:effectLst/>
+              </a:rPr>
+              <a:t>BRIN </a:t>
+            </a:r>
+          </a:p>
+          <a:p>
+            <a:pPr marL="457200" lvl="1" indent="0" eaLnBrk="0" fontAlgn="base" hangingPunct="0">
+              <a:lnSpc>
+                <a:spcPct val="100000"/>
+              </a:lnSpc>
+              <a:spcBef>
+                <a:spcPct val="0"/>
+              </a:spcBef>
+              <a:spcAft>
+                <a:spcPct val="0"/>
+              </a:spcAft>
+              <a:buFontTx/>
+              <a:buChar char="•"/>
+            </a:pPr>
+            <a:r>
+              <a:rPr kumimoji="0" lang="en-US" altLang="en-US" sz="2200" b="0" i="0" u="none" strike="noStrike" cap="none" normalizeH="0" baseline="0" dirty="0" err="1">
+                <a:ln>
+                  <a:noFill/>
+                </a:ln>
+                <a:solidFill>
+                  <a:schemeClr val="tx1"/>
+                </a:solidFill>
+                <a:effectLst/>
+              </a:rPr>
+              <a:t>Velike</a:t>
+            </a:r>
+            <a:r>
+              <a:rPr kumimoji="0" lang="en-US" altLang="en-US" sz="2200" b="0" i="0" u="none" strike="noStrike" cap="none" normalizeH="0" baseline="0" dirty="0">
+                <a:ln>
+                  <a:noFill/>
+                </a:ln>
+                <a:solidFill>
+                  <a:schemeClr val="tx1"/>
+                </a:solidFill>
+                <a:effectLst/>
+              </a:rPr>
+              <a:t> </a:t>
+            </a:r>
+            <a:r>
+              <a:rPr kumimoji="0" lang="en-US" altLang="en-US" sz="2200" b="0" i="0" u="none" strike="noStrike" cap="none" normalizeH="0" baseline="0" dirty="0" err="1">
+                <a:ln>
+                  <a:noFill/>
+                </a:ln>
+                <a:solidFill>
+                  <a:schemeClr val="tx1"/>
+                </a:solidFill>
+                <a:effectLst/>
+              </a:rPr>
+              <a:t>tabele</a:t>
+            </a:r>
+            <a:r>
+              <a:rPr kumimoji="0" lang="en-US" altLang="en-US" sz="2200" b="0" i="0" u="none" strike="noStrike" cap="none" normalizeH="0" baseline="0" dirty="0">
+                <a:ln>
+                  <a:noFill/>
+                </a:ln>
+                <a:solidFill>
+                  <a:schemeClr val="tx1"/>
+                </a:solidFill>
+                <a:effectLst/>
+              </a:rPr>
+              <a:t> </a:t>
+            </a:r>
+            <a:r>
+              <a:rPr kumimoji="0" lang="en-US" altLang="en-US" sz="2200" b="0" i="0" u="none" strike="noStrike" cap="none" normalizeH="0" baseline="0" dirty="0" err="1">
+                <a:ln>
+                  <a:noFill/>
+                </a:ln>
+                <a:solidFill>
+                  <a:schemeClr val="tx1"/>
+                </a:solidFill>
+                <a:effectLst/>
+              </a:rPr>
+              <a:t>sa</a:t>
+            </a:r>
+            <a:r>
+              <a:rPr kumimoji="0" lang="en-US" altLang="en-US" sz="2200" b="0" i="0" u="none" strike="noStrike" cap="none" normalizeH="0" baseline="0" dirty="0">
+                <a:ln>
+                  <a:noFill/>
+                </a:ln>
+                <a:solidFill>
+                  <a:schemeClr val="tx1"/>
+                </a:solidFill>
+                <a:effectLst/>
+              </a:rPr>
+              <a:t> </a:t>
+            </a:r>
+            <a:r>
+              <a:rPr kumimoji="0" lang="en-US" altLang="en-US" sz="2200" b="0" i="0" u="none" strike="noStrike" cap="none" normalizeH="0" baseline="0" dirty="0" err="1">
+                <a:ln>
+                  <a:noFill/>
+                </a:ln>
+                <a:solidFill>
+                  <a:schemeClr val="tx1"/>
+                </a:solidFill>
+                <a:effectLst/>
+              </a:rPr>
+              <a:t>grupisanim</a:t>
+            </a:r>
+            <a:r>
+              <a:rPr kumimoji="0" lang="en-US" altLang="en-US" sz="2200" b="0" i="0" u="none" strike="noStrike" cap="none" normalizeH="0" baseline="0" dirty="0">
+                <a:ln>
+                  <a:noFill/>
+                </a:ln>
+                <a:solidFill>
+                  <a:schemeClr val="tx1"/>
+                </a:solidFill>
+                <a:effectLst/>
+              </a:rPr>
+              <a:t> </a:t>
+            </a:r>
+            <a:r>
+              <a:rPr kumimoji="0" lang="en-US" altLang="en-US" sz="2200" b="0" i="0" u="none" strike="noStrike" cap="none" normalizeH="0" baseline="0" dirty="0" err="1">
+                <a:ln>
+                  <a:noFill/>
+                </a:ln>
+                <a:solidFill>
+                  <a:schemeClr val="tx1"/>
+                </a:solidFill>
+                <a:effectLst/>
+              </a:rPr>
+              <a:t>podacima</a:t>
+            </a:r>
+            <a:r>
+              <a:rPr kumimoji="0" lang="en-US" altLang="en-US" sz="2200" b="0" i="0" u="none" strike="noStrike" cap="none" normalizeH="0" baseline="0" dirty="0">
+                <a:ln>
+                  <a:noFill/>
+                </a:ln>
+                <a:solidFill>
+                  <a:schemeClr val="tx1"/>
+                </a:solidFill>
+                <a:effectLst/>
+              </a:rPr>
+              <a:t> </a:t>
+            </a:r>
+          </a:p>
+          <a:p>
+            <a:pPr marL="0" marR="0" lvl="0" indent="0" algn="l" defTabSz="914400" rtl="0" eaLnBrk="0" fontAlgn="base" latinLnBrk="0" hangingPunct="0">
+              <a:lnSpc>
+                <a:spcPct val="100000"/>
+              </a:lnSpc>
+              <a:spcBef>
+                <a:spcPct val="0"/>
+              </a:spcBef>
+              <a:spcAft>
+                <a:spcPct val="0"/>
+              </a:spcAft>
+              <a:buClrTx/>
+              <a:buSzTx/>
+              <a:buFontTx/>
+              <a:buChar char="•"/>
+              <a:tabLst/>
+            </a:pPr>
+            <a:r>
+              <a:rPr kumimoji="0" lang="en-US" altLang="en-US" sz="2600" i="0" u="none" strike="noStrike" cap="none" normalizeH="0" baseline="0" dirty="0" err="1">
+                <a:ln>
+                  <a:noFill/>
+                </a:ln>
+                <a:solidFill>
+                  <a:schemeClr val="tx1"/>
+                </a:solidFill>
+                <a:effectLst/>
+              </a:rPr>
+              <a:t>GiST</a:t>
+            </a:r>
+            <a:r>
+              <a:rPr kumimoji="0" lang="en-US" altLang="en-US" sz="2600" i="0" u="none" strike="noStrike" cap="none" normalizeH="0" baseline="0" dirty="0">
+                <a:ln>
+                  <a:noFill/>
+                </a:ln>
+                <a:solidFill>
+                  <a:schemeClr val="tx1"/>
+                </a:solidFill>
+                <a:effectLst/>
+              </a:rPr>
+              <a:t> / SP-</a:t>
+            </a:r>
+            <a:r>
+              <a:rPr kumimoji="0" lang="en-US" altLang="en-US" sz="2600" i="0" u="none" strike="noStrike" cap="none" normalizeH="0" baseline="0" dirty="0" err="1">
+                <a:ln>
+                  <a:noFill/>
+                </a:ln>
+                <a:solidFill>
+                  <a:schemeClr val="tx1"/>
+                </a:solidFill>
+                <a:effectLst/>
+              </a:rPr>
+              <a:t>GiST</a:t>
+            </a:r>
+            <a:r>
+              <a:rPr kumimoji="0" lang="en-US" altLang="en-US" sz="2600" i="0" u="none" strike="noStrike" cap="none" normalizeH="0" baseline="0" dirty="0">
+                <a:ln>
+                  <a:noFill/>
+                </a:ln>
+                <a:solidFill>
+                  <a:schemeClr val="tx1"/>
+                </a:solidFill>
+                <a:effectLst/>
+              </a:rPr>
+              <a:t> </a:t>
+            </a:r>
+          </a:p>
+          <a:p>
+            <a:pPr marL="457200" lvl="1" indent="0" eaLnBrk="0" fontAlgn="base" hangingPunct="0">
+              <a:lnSpc>
+                <a:spcPct val="100000"/>
+              </a:lnSpc>
+              <a:spcBef>
+                <a:spcPct val="0"/>
+              </a:spcBef>
+              <a:spcAft>
+                <a:spcPct val="0"/>
+              </a:spcAft>
+              <a:buFontTx/>
+              <a:buChar char="•"/>
+            </a:pPr>
+            <a:r>
+              <a:rPr kumimoji="0" lang="en-US" altLang="en-US" sz="2200" b="0" i="0" u="none" strike="noStrike" cap="none" normalizeH="0" baseline="0" dirty="0" err="1">
+                <a:ln>
+                  <a:noFill/>
+                </a:ln>
+                <a:solidFill>
+                  <a:schemeClr val="tx1"/>
+                </a:solidFill>
+                <a:effectLst/>
+              </a:rPr>
+              <a:t>Napredne</a:t>
+            </a:r>
+            <a:r>
+              <a:rPr kumimoji="0" lang="en-US" altLang="en-US" sz="2200" b="0" i="0" u="none" strike="noStrike" cap="none" normalizeH="0" baseline="0" dirty="0">
+                <a:ln>
+                  <a:noFill/>
+                </a:ln>
+                <a:solidFill>
+                  <a:schemeClr val="tx1"/>
+                </a:solidFill>
+                <a:effectLst/>
+              </a:rPr>
+              <a:t> </a:t>
+            </a:r>
+            <a:r>
+              <a:rPr kumimoji="0" lang="en-US" altLang="en-US" sz="2200" b="0" i="0" u="none" strike="noStrike" cap="none" normalizeH="0" baseline="0" dirty="0" err="1">
+                <a:ln>
+                  <a:noFill/>
+                </a:ln>
+                <a:solidFill>
+                  <a:schemeClr val="tx1"/>
+                </a:solidFill>
+                <a:effectLst/>
+              </a:rPr>
+              <a:t>strukture</a:t>
+            </a:r>
+            <a:r>
+              <a:rPr kumimoji="0" lang="en-US" altLang="en-US" sz="2200" b="0" i="0" u="none" strike="noStrike" cap="none" normalizeH="0" baseline="0" dirty="0">
+                <a:ln>
+                  <a:noFill/>
+                </a:ln>
+                <a:solidFill>
+                  <a:schemeClr val="tx1"/>
+                </a:solidFill>
+                <a:effectLst/>
+              </a:rPr>
+              <a:t> </a:t>
+            </a:r>
+            <a:r>
+              <a:rPr kumimoji="0" lang="en-US" altLang="en-US" sz="2200" b="0" i="0" u="none" strike="noStrike" cap="none" normalizeH="0" baseline="0" dirty="0" err="1">
+                <a:ln>
+                  <a:noFill/>
+                </a:ln>
+                <a:solidFill>
+                  <a:schemeClr val="tx1"/>
+                </a:solidFill>
+                <a:effectLst/>
+              </a:rPr>
+              <a:t>pretrage</a:t>
+            </a:r>
+            <a:r>
+              <a:rPr kumimoji="0" lang="en-US" altLang="en-US" sz="2200" b="0" i="0" u="none" strike="noStrike" cap="none" normalizeH="0" baseline="0" dirty="0">
+                <a:ln>
+                  <a:noFill/>
+                </a:ln>
+                <a:solidFill>
+                  <a:schemeClr val="tx1"/>
+                </a:solidFill>
+                <a:effectLst/>
+              </a:rPr>
+              <a:t> </a:t>
+            </a:r>
+          </a:p>
+          <a:p>
+            <a:pPr marL="0" marR="0" lvl="0" indent="0" algn="l" defTabSz="914400" rtl="0" eaLnBrk="0" fontAlgn="base" latinLnBrk="0" hangingPunct="0">
+              <a:lnSpc>
+                <a:spcPct val="100000"/>
+              </a:lnSpc>
+              <a:spcBef>
+                <a:spcPct val="0"/>
+              </a:spcBef>
+              <a:spcAft>
+                <a:spcPct val="0"/>
+              </a:spcAft>
+              <a:buClrTx/>
+              <a:buSzTx/>
+              <a:buFontTx/>
+              <a:buChar char="•"/>
+              <a:tabLst/>
+            </a:pPr>
+            <a:r>
+              <a:rPr kumimoji="0" lang="en-US" altLang="en-US" sz="2600" i="0" u="none" strike="noStrike" cap="none" normalizeH="0" baseline="0" dirty="0">
+                <a:ln>
+                  <a:noFill/>
+                </a:ln>
+                <a:solidFill>
+                  <a:schemeClr val="tx1"/>
+                </a:solidFill>
+                <a:effectLst/>
+              </a:rPr>
+              <a:t>Hash </a:t>
+            </a:r>
+          </a:p>
+          <a:p>
+            <a:pPr marL="457200" lvl="1" indent="0" eaLnBrk="0" fontAlgn="base" hangingPunct="0">
+              <a:lnSpc>
+                <a:spcPct val="100000"/>
+              </a:lnSpc>
+              <a:spcBef>
+                <a:spcPct val="0"/>
+              </a:spcBef>
+              <a:spcAft>
+                <a:spcPct val="0"/>
+              </a:spcAft>
+              <a:buFontTx/>
+              <a:buChar char="•"/>
+            </a:pPr>
+            <a:r>
+              <a:rPr kumimoji="0" lang="en-US" altLang="en-US" sz="2200" b="0" i="0" u="none" strike="noStrike" cap="none" normalizeH="0" baseline="0" dirty="0" err="1">
+                <a:ln>
+                  <a:noFill/>
+                </a:ln>
+                <a:solidFill>
+                  <a:schemeClr val="tx1"/>
+                </a:solidFill>
+                <a:effectLst/>
+              </a:rPr>
+              <a:t>Brzo</a:t>
+            </a:r>
+            <a:r>
+              <a:rPr kumimoji="0" lang="en-US" altLang="en-US" sz="2200" b="0" i="0" u="none" strike="noStrike" cap="none" normalizeH="0" baseline="0" dirty="0">
+                <a:ln>
+                  <a:noFill/>
+                </a:ln>
+                <a:solidFill>
+                  <a:schemeClr val="tx1"/>
+                </a:solidFill>
+                <a:effectLst/>
+              </a:rPr>
+              <a:t> </a:t>
+            </a:r>
+            <a:r>
+              <a:rPr kumimoji="0" lang="en-US" altLang="en-US" sz="2200" b="0" i="0" u="none" strike="noStrike" cap="none" normalizeH="0" baseline="0" dirty="0" err="1">
+                <a:ln>
+                  <a:noFill/>
+                </a:ln>
+                <a:solidFill>
+                  <a:schemeClr val="tx1"/>
+                </a:solidFill>
+                <a:effectLst/>
+              </a:rPr>
+              <a:t>poređenje</a:t>
+            </a:r>
+            <a:r>
+              <a:rPr kumimoji="0" lang="en-US" altLang="en-US" sz="2200" b="0" i="0" u="none" strike="noStrike" cap="none" normalizeH="0" baseline="0" dirty="0">
+                <a:ln>
+                  <a:noFill/>
+                </a:ln>
+                <a:solidFill>
+                  <a:schemeClr val="tx1"/>
+                </a:solidFill>
+                <a:effectLst/>
+              </a:rPr>
+              <a:t> </a:t>
+            </a:r>
+            <a:r>
+              <a:rPr kumimoji="0" lang="en-US" altLang="en-US" sz="2200" b="0" i="0" u="none" strike="noStrike" cap="none" normalizeH="0" baseline="0" dirty="0" err="1">
+                <a:ln>
+                  <a:noFill/>
+                </a:ln>
+                <a:solidFill>
+                  <a:schemeClr val="tx1"/>
+                </a:solidFill>
+                <a:effectLst/>
+              </a:rPr>
+              <a:t>jednakosti</a:t>
+            </a:r>
+            <a:r>
+              <a:rPr kumimoji="0" lang="en-US" altLang="en-US" sz="2200" b="0" i="0" u="none" strike="noStrike" cap="none" normalizeH="0" baseline="0" dirty="0">
+                <a:ln>
+                  <a:noFill/>
+                </a:ln>
+                <a:solidFill>
+                  <a:schemeClr val="tx1"/>
+                </a:solidFill>
+                <a:effectLst/>
+              </a:rPr>
+              <a:t> (=)</a:t>
+            </a:r>
+          </a:p>
+          <a:p>
+            <a:pPr marL="0" marR="0" lvl="0" indent="0" algn="l" defTabSz="914400" rtl="0" eaLnBrk="0" fontAlgn="base" latinLnBrk="0" hangingPunct="0">
+              <a:lnSpc>
+                <a:spcPct val="100000"/>
+              </a:lnSpc>
+              <a:spcBef>
+                <a:spcPct val="0"/>
+              </a:spcBef>
+              <a:spcAft>
+                <a:spcPct val="0"/>
+              </a:spcAft>
+              <a:buClrTx/>
+              <a:buSzTx/>
+              <a:buFontTx/>
+              <a:buNone/>
+              <a:tabLst/>
+            </a:pPr>
+            <a:endParaRPr kumimoji="0" lang="en-US" altLang="en-US" sz="1800" b="0" i="0" u="none" strike="noStrike" cap="none" normalizeH="0" baseline="0" dirty="0">
+              <a:ln>
+                <a:noFill/>
+              </a:ln>
+              <a:solidFill>
+                <a:schemeClr val="tx1"/>
+              </a:solidFill>
+              <a:effectLst/>
+              <a:latin typeface="Arial" panose="020B0604020202020204" pitchFamily="34" charset="0"/>
+            </a:endParaRPr>
+          </a:p>
+        </p:txBody>
+      </p:sp>
+    </p:spTree>
+    <p:extLst>
+      <p:ext uri="{BB962C8B-B14F-4D97-AF65-F5344CB8AC3E}">
+        <p14:creationId xmlns:p14="http://schemas.microsoft.com/office/powerpoint/2010/main" val="45259792"/>
+      </p:ext>
+    </p:extLst>
+  </p:cSld>
+  <p:clrMapOvr>
+    <a:masterClrMapping/>
+  </p:clrMapOvr>
+</p:sld>
+</file>
+
+<file path=ppt/slides/slide5.xml><?xml version="1.0" encoding="utf-8"?>
+<p:sld xmlns:a="http://schemas.openxmlformats.org/drawingml/2006/main" xmlns:r="http://schemas.openxmlformats.org/officeDocument/2006/relationships" xmlns:p="http://schemas.openxmlformats.org/presentationml/2006/main">
+  <p:cSld>
+    <p:spTree>
+      <p:nvGrpSpPr>
+        <p:cNvPr id="1" name=""/>
+        <p:cNvGrpSpPr/>
+        <p:nvPr/>
+      </p:nvGrpSpPr>
+      <p:grpSpPr>
+        <a:xfrm>
+          <a:off x="0" y="0"/>
+          <a:ext cx="0" cy="0"/>
+          <a:chOff x="0" y="0"/>
+          <a:chExt cx="0" cy="0"/>
+        </a:xfrm>
+      </p:grpSpPr>
+      <p:sp>
+        <p:nvSpPr>
+          <p:cNvPr id="2" name="Title 1">
+            <a:extLst>
+              <a:ext uri="{FF2B5EF4-FFF2-40B4-BE49-F238E27FC236}">
+                <a16:creationId xmlns:a16="http://schemas.microsoft.com/office/drawing/2014/main" id="{01A6DD95-7AEF-48C5-9506-F04350734F3A}"/>
+              </a:ext>
+            </a:extLst>
+          </p:cNvPr>
+          <p:cNvSpPr>
+            <a:spLocks noGrp="1"/>
+          </p:cNvSpPr>
+          <p:nvPr>
+            <p:ph type="title"/>
+          </p:nvPr>
+        </p:nvSpPr>
+        <p:spPr/>
+        <p:txBody>
+          <a:bodyPr/>
+          <a:lstStyle/>
+          <a:p>
+            <a:r>
+              <a:rPr lang="sr-Latn-RS" dirty="0" err="1"/>
+              <a:t>Hash</a:t>
+            </a:r>
+            <a:r>
+              <a:rPr lang="sr-Latn-RS" dirty="0"/>
+              <a:t> indeks</a:t>
+            </a:r>
+            <a:endParaRPr lang="en-US" dirty="0"/>
+          </a:p>
+        </p:txBody>
+      </p:sp>
+      <p:sp>
+        <p:nvSpPr>
+          <p:cNvPr id="4" name="Rectangle 1">
+            <a:extLst>
+              <a:ext uri="{FF2B5EF4-FFF2-40B4-BE49-F238E27FC236}">
+                <a16:creationId xmlns:a16="http://schemas.microsoft.com/office/drawing/2014/main" id="{560EDF40-5945-403F-85DC-0C4D2D9EA1C3}"/>
+              </a:ext>
+            </a:extLst>
+          </p:cNvPr>
+          <p:cNvSpPr>
+            <a:spLocks noGrp="1" noChangeArrowheads="1"/>
+          </p:cNvSpPr>
+          <p:nvPr>
+            <p:ph idx="1"/>
+          </p:nvPr>
+        </p:nvSpPr>
+        <p:spPr bwMode="auto">
+          <a:xfrm>
+            <a:off x="838200" y="1939192"/>
+            <a:ext cx="6716198" cy="4124206"/>
+          </a:xfrm>
+          <a:prstGeom prst="rect">
+            <a:avLst/>
+          </a:prstGeom>
+          <a:noFill/>
+          <a:ln>
+            <a:noFill/>
+          </a:ln>
+          <a:effectLst/>
+          <a:extLst>
+            <a:ext uri="{909E8E84-426E-40DD-AFC4-6F175D3DCCD1}">
+              <a14:hiddenFill xmlns:a14="http://schemas.microsoft.com/office/drawing/2010/main">
+                <a:solidFill>
+                  <a:schemeClr val="accent1"/>
+                </a:solidFill>
+              </a14:hiddenFill>
+            </a:ext>
+            <a:ext uri="{91240B29-F687-4F45-9708-019B960494DF}">
+              <a14:hiddenLine xmlns:a14="http://schemas.microsoft.com/office/drawing/2010/main" w="9525">
+                <a:solidFill>
+                  <a:schemeClr val="tx1"/>
+                </a:solidFill>
+                <a:miter lim="800000"/>
+                <a:headEnd/>
+                <a:tailEnd/>
+              </a14:hiddenLine>
+            </a:ext>
+            <a:ext uri="{AF507438-7753-43E0-B8FC-AC1667EBCBE1}">
+              <a14:hiddenEffects xmlns:a14="http://schemas.microsoft.com/office/drawing/2010/main">
+                <a:effectLst>
+                  <a:outerShdw dist="35921" dir="2700000" algn="ctr" rotWithShape="0">
+                    <a:schemeClr val="bg2"/>
+                  </a:outerShdw>
+                </a:effectLst>
+              </a14:hiddenEffects>
+            </a:ext>
+          </a:extLst>
+        </p:spPr>
+        <p:txBody>
+          <a:bodyPr vert="horz" wrap="none" lIns="91440" tIns="45720" rIns="91440" bIns="45720" numCol="1" anchor="ctr" anchorCtr="0" compatLnSpc="1">
+            <a:prstTxWarp prst="textNoShape">
+              <a:avLst/>
+            </a:prstTxWarp>
+            <a:spAutoFit/>
+          </a:bodyPr>
+          <a:lstStyle/>
+          <a:p>
+            <a:pPr marL="0" marR="0" lvl="0" indent="0" algn="l" defTabSz="914400" rtl="0" eaLnBrk="0" fontAlgn="base" latinLnBrk="0" hangingPunct="0">
+              <a:lnSpc>
+                <a:spcPct val="100000"/>
+              </a:lnSpc>
+              <a:spcBef>
+                <a:spcPct val="0"/>
+              </a:spcBef>
+              <a:spcAft>
+                <a:spcPct val="0"/>
+              </a:spcAft>
+              <a:buClrTx/>
+              <a:buSzTx/>
+              <a:buFontTx/>
+              <a:buNone/>
+              <a:tabLst/>
+            </a:pPr>
+            <a:endParaRPr kumimoji="0" lang="en-US" altLang="en-US" sz="1800" b="0" i="0" u="none" strike="noStrike" cap="none" normalizeH="0" baseline="0" dirty="0">
+              <a:ln>
+                <a:noFill/>
+              </a:ln>
+              <a:solidFill>
+                <a:schemeClr val="tx1"/>
+              </a:solidFill>
+              <a:effectLst/>
+            </a:endParaRPr>
+          </a:p>
+          <a:p>
+            <a:pPr eaLnBrk="0" fontAlgn="base" hangingPunct="0">
+              <a:lnSpc>
+                <a:spcPct val="100000"/>
+              </a:lnSpc>
+              <a:spcBef>
+                <a:spcPct val="0"/>
+              </a:spcBef>
+              <a:spcAft>
+                <a:spcPct val="0"/>
+              </a:spcAft>
+            </a:pPr>
+            <a:r>
+              <a:rPr kumimoji="0" lang="en-US" altLang="en-US" sz="2600" b="0" i="0" u="none" strike="noStrike" cap="none" normalizeH="0" baseline="0" dirty="0" err="1">
+                <a:ln>
+                  <a:noFill/>
+                </a:ln>
+                <a:solidFill>
+                  <a:schemeClr val="tx1"/>
+                </a:solidFill>
+                <a:effectLst/>
+              </a:rPr>
+              <a:t>Specijalizovani</a:t>
+            </a:r>
+            <a:r>
+              <a:rPr kumimoji="0" lang="en-US" altLang="en-US" sz="2600" b="0" i="0" u="none" strike="noStrike" cap="none" normalizeH="0" baseline="0" dirty="0">
+                <a:ln>
+                  <a:noFill/>
+                </a:ln>
+                <a:solidFill>
+                  <a:schemeClr val="tx1"/>
+                </a:solidFill>
+                <a:effectLst/>
+              </a:rPr>
+              <a:t> </a:t>
+            </a:r>
+            <a:r>
+              <a:rPr kumimoji="0" lang="en-US" altLang="en-US" sz="2600" b="0" i="0" u="none" strike="noStrike" cap="none" normalizeH="0" baseline="0" dirty="0" err="1">
+                <a:ln>
+                  <a:noFill/>
+                </a:ln>
+                <a:solidFill>
+                  <a:schemeClr val="tx1"/>
+                </a:solidFill>
+                <a:effectLst/>
+              </a:rPr>
+              <a:t>indeks</a:t>
+            </a:r>
+            <a:r>
+              <a:rPr kumimoji="0" lang="en-US" altLang="en-US" sz="2600" b="0" i="0" u="none" strike="noStrike" cap="none" normalizeH="0" baseline="0" dirty="0">
+                <a:ln>
+                  <a:noFill/>
+                </a:ln>
+                <a:solidFill>
+                  <a:schemeClr val="tx1"/>
+                </a:solidFill>
+                <a:effectLst/>
+              </a:rPr>
+              <a:t> za </a:t>
+            </a:r>
+            <a:r>
+              <a:rPr kumimoji="0" lang="en-US" altLang="en-US" sz="2600" b="0" i="0" u="none" strike="noStrike" cap="none" normalizeH="0" baseline="0" dirty="0" err="1">
+                <a:ln>
+                  <a:noFill/>
+                </a:ln>
+                <a:solidFill>
+                  <a:schemeClr val="tx1"/>
+                </a:solidFill>
+                <a:effectLst/>
+              </a:rPr>
+              <a:t>operaciju</a:t>
+            </a:r>
+            <a:r>
+              <a:rPr lang="sr-Latn-RS" altLang="en-US" sz="2600" dirty="0"/>
+              <a:t>  </a:t>
+            </a:r>
+            <a:r>
+              <a:rPr kumimoji="0" lang="en-US" altLang="en-US" sz="2600" b="0" i="0" u="none" strike="noStrike" cap="none" normalizeH="0" baseline="0" dirty="0">
+                <a:ln>
+                  <a:noFill/>
+                </a:ln>
+                <a:solidFill>
+                  <a:schemeClr val="tx1"/>
+                </a:solidFill>
+                <a:effectLst/>
+              </a:rPr>
+              <a:t>= </a:t>
+            </a:r>
+          </a:p>
+          <a:p>
+            <a:pPr eaLnBrk="0" fontAlgn="base" hangingPunct="0">
+              <a:lnSpc>
+                <a:spcPct val="100000"/>
+              </a:lnSpc>
+              <a:spcBef>
+                <a:spcPct val="0"/>
+              </a:spcBef>
+              <a:spcAft>
+                <a:spcPct val="0"/>
+              </a:spcAft>
+            </a:pPr>
+            <a:r>
+              <a:rPr kumimoji="0" lang="en-US" altLang="en-US" sz="2600" b="0" i="0" u="none" strike="noStrike" cap="none" normalizeH="0" baseline="0" dirty="0" err="1">
+                <a:ln>
+                  <a:noFill/>
+                </a:ln>
+                <a:solidFill>
+                  <a:schemeClr val="tx1"/>
+                </a:solidFill>
+                <a:effectLst/>
+              </a:rPr>
+              <a:t>Bazira</a:t>
+            </a:r>
+            <a:r>
+              <a:rPr kumimoji="0" lang="en-US" altLang="en-US" sz="2600" b="0" i="0" u="none" strike="noStrike" cap="none" normalizeH="0" baseline="0" dirty="0">
+                <a:ln>
+                  <a:noFill/>
+                </a:ln>
+                <a:solidFill>
+                  <a:schemeClr val="tx1"/>
+                </a:solidFill>
+                <a:effectLst/>
+              </a:rPr>
+              <a:t> se </a:t>
+            </a:r>
+            <a:r>
+              <a:rPr kumimoji="0" lang="en-US" altLang="en-US" sz="2600" b="0" i="0" u="none" strike="noStrike" cap="none" normalizeH="0" baseline="0" dirty="0" err="1">
+                <a:ln>
+                  <a:noFill/>
+                </a:ln>
+                <a:solidFill>
+                  <a:schemeClr val="tx1"/>
+                </a:solidFill>
+                <a:effectLst/>
+              </a:rPr>
+              <a:t>na</a:t>
+            </a:r>
+            <a:r>
+              <a:rPr kumimoji="0" lang="en-US" altLang="en-US" sz="2600" b="0" i="0" u="none" strike="noStrike" cap="none" normalizeH="0" baseline="0" dirty="0">
+                <a:ln>
+                  <a:noFill/>
+                </a:ln>
+                <a:solidFill>
+                  <a:schemeClr val="tx1"/>
+                </a:solidFill>
+                <a:effectLst/>
+              </a:rPr>
+              <a:t> hash </a:t>
+            </a:r>
+            <a:r>
+              <a:rPr kumimoji="0" lang="en-US" altLang="en-US" sz="2600" b="0" i="0" u="none" strike="noStrike" cap="none" normalizeH="0" baseline="0" dirty="0" err="1">
+                <a:ln>
+                  <a:noFill/>
+                </a:ln>
+                <a:solidFill>
+                  <a:schemeClr val="tx1"/>
+                </a:solidFill>
+                <a:effectLst/>
+              </a:rPr>
+              <a:t>mapi</a:t>
+            </a:r>
+            <a:r>
+              <a:rPr kumimoji="0" lang="en-US" altLang="en-US" sz="2600" b="0" i="0" u="none" strike="noStrike" cap="none" normalizeH="0" baseline="0" dirty="0">
+                <a:ln>
+                  <a:noFill/>
+                </a:ln>
+                <a:solidFill>
+                  <a:schemeClr val="tx1"/>
+                </a:solidFill>
+                <a:effectLst/>
+              </a:rPr>
+              <a:t> </a:t>
+            </a:r>
+          </a:p>
+          <a:p>
+            <a:pPr eaLnBrk="0" fontAlgn="base" hangingPunct="0">
+              <a:lnSpc>
+                <a:spcPct val="100000"/>
+              </a:lnSpc>
+              <a:spcBef>
+                <a:spcPct val="0"/>
+              </a:spcBef>
+              <a:spcAft>
+                <a:spcPct val="0"/>
+              </a:spcAft>
+            </a:pPr>
+            <a:r>
+              <a:rPr kumimoji="0" lang="en-US" altLang="en-US" sz="2600" b="0" i="0" u="none" strike="noStrike" cap="none" normalizeH="0" baseline="0" dirty="0" err="1">
+                <a:ln>
+                  <a:noFill/>
+                </a:ln>
+                <a:solidFill>
+                  <a:schemeClr val="tx1"/>
+                </a:solidFill>
+                <a:effectLst/>
+              </a:rPr>
+              <a:t>Koristi</a:t>
+            </a:r>
+            <a:r>
+              <a:rPr kumimoji="0" lang="en-US" altLang="en-US" sz="2600" b="0" i="0" u="none" strike="noStrike" cap="none" normalizeH="0" baseline="0" dirty="0">
+                <a:ln>
+                  <a:noFill/>
+                </a:ln>
+                <a:solidFill>
+                  <a:schemeClr val="tx1"/>
+                </a:solidFill>
+                <a:effectLst/>
+              </a:rPr>
+              <a:t> hash </a:t>
+            </a:r>
+            <a:r>
+              <a:rPr kumimoji="0" lang="en-US" altLang="en-US" sz="2600" b="0" i="0" u="none" strike="noStrike" cap="none" normalizeH="0" baseline="0" dirty="0" err="1">
+                <a:ln>
+                  <a:noFill/>
+                </a:ln>
+                <a:solidFill>
+                  <a:schemeClr val="tx1"/>
+                </a:solidFill>
+                <a:effectLst/>
+              </a:rPr>
+              <a:t>funkciju</a:t>
+            </a:r>
+            <a:r>
+              <a:rPr kumimoji="0" lang="en-US" altLang="en-US" sz="2600" b="0" i="0" u="none" strike="noStrike" cap="none" normalizeH="0" baseline="0" dirty="0">
+                <a:ln>
+                  <a:noFill/>
+                </a:ln>
+                <a:solidFill>
+                  <a:schemeClr val="tx1"/>
+                </a:solidFill>
+                <a:effectLst/>
+              </a:rPr>
+              <a:t> za </a:t>
+            </a:r>
+            <a:r>
+              <a:rPr kumimoji="0" lang="en-US" altLang="en-US" sz="2600" b="0" i="0" u="none" strike="noStrike" cap="none" normalizeH="0" baseline="0" dirty="0" err="1">
+                <a:ln>
+                  <a:noFill/>
+                </a:ln>
+                <a:solidFill>
+                  <a:schemeClr val="tx1"/>
+                </a:solidFill>
+                <a:effectLst/>
+              </a:rPr>
+              <a:t>pronalaženje</a:t>
+            </a:r>
+            <a:r>
+              <a:rPr kumimoji="0" lang="en-US" altLang="en-US" sz="2600" b="0" i="0" u="none" strike="noStrike" cap="none" normalizeH="0" baseline="0" dirty="0">
+                <a:ln>
+                  <a:noFill/>
+                </a:ln>
+                <a:solidFill>
+                  <a:schemeClr val="tx1"/>
+                </a:solidFill>
+                <a:effectLst/>
+              </a:rPr>
+              <a:t> </a:t>
+            </a:r>
+            <a:r>
+              <a:rPr kumimoji="0" lang="en-US" altLang="en-US" sz="2600" b="0" i="0" u="none" strike="noStrike" cap="none" normalizeH="0" baseline="0" dirty="0" err="1">
+                <a:ln>
+                  <a:noFill/>
+                </a:ln>
+                <a:solidFill>
+                  <a:schemeClr val="tx1"/>
+                </a:solidFill>
+                <a:effectLst/>
+              </a:rPr>
+              <a:t>podataka</a:t>
+            </a:r>
+            <a:r>
+              <a:rPr kumimoji="0" lang="en-US" altLang="en-US" sz="2600" b="0" i="0" u="none" strike="noStrike" cap="none" normalizeH="0" baseline="0" dirty="0">
+                <a:ln>
+                  <a:noFill/>
+                </a:ln>
+                <a:solidFill>
+                  <a:schemeClr val="tx1"/>
+                </a:solidFill>
+                <a:effectLst/>
+              </a:rPr>
+              <a:t> </a:t>
+            </a:r>
+            <a:endParaRPr kumimoji="0" lang="en-US" altLang="en-US" sz="900" b="1" i="0" u="none" strike="noStrike" cap="none" normalizeH="0" baseline="0" dirty="0">
+              <a:ln>
+                <a:noFill/>
+              </a:ln>
+              <a:solidFill>
+                <a:schemeClr val="tx1"/>
+              </a:solidFill>
+              <a:effectLst/>
+            </a:endParaRPr>
+          </a:p>
+          <a:p>
+            <a:pPr eaLnBrk="0" fontAlgn="base" hangingPunct="0">
+              <a:lnSpc>
+                <a:spcPct val="100000"/>
+              </a:lnSpc>
+              <a:spcBef>
+                <a:spcPct val="0"/>
+              </a:spcBef>
+              <a:spcAft>
+                <a:spcPct val="0"/>
+              </a:spcAft>
+            </a:pPr>
+            <a:r>
+              <a:rPr kumimoji="0" lang="en-US" altLang="en-US" sz="2600" i="0" u="none" strike="noStrike" cap="none" normalizeH="0" baseline="0" dirty="0" err="1">
+                <a:ln>
+                  <a:noFill/>
+                </a:ln>
+                <a:solidFill>
+                  <a:schemeClr val="tx1"/>
+                </a:solidFill>
+                <a:effectLst/>
+              </a:rPr>
+              <a:t>Dobar</a:t>
+            </a:r>
+            <a:r>
+              <a:rPr kumimoji="0" lang="en-US" altLang="en-US" sz="2600" i="0" u="none" strike="noStrike" cap="none" normalizeH="0" baseline="0" dirty="0">
+                <a:ln>
+                  <a:noFill/>
+                </a:ln>
+                <a:solidFill>
+                  <a:schemeClr val="tx1"/>
+                </a:solidFill>
+                <a:effectLst/>
+              </a:rPr>
+              <a:t> </a:t>
+            </a:r>
+            <a:r>
+              <a:rPr kumimoji="0" lang="en-US" altLang="en-US" sz="2600" i="0" u="none" strike="noStrike" cap="none" normalizeH="0" baseline="0" dirty="0" err="1">
+                <a:ln>
+                  <a:noFill/>
+                </a:ln>
+                <a:solidFill>
+                  <a:schemeClr val="tx1"/>
+                </a:solidFill>
+                <a:effectLst/>
+              </a:rPr>
+              <a:t>izbor</a:t>
+            </a:r>
+            <a:r>
+              <a:rPr kumimoji="0" lang="en-US" altLang="en-US" sz="2600" i="0" u="none" strike="noStrike" cap="none" normalizeH="0" baseline="0" dirty="0">
+                <a:ln>
+                  <a:noFill/>
+                </a:ln>
+                <a:solidFill>
+                  <a:schemeClr val="tx1"/>
+                </a:solidFill>
+                <a:effectLst/>
+              </a:rPr>
+              <a:t> </a:t>
+            </a:r>
+            <a:r>
+              <a:rPr kumimoji="0" lang="en-US" altLang="en-US" sz="2600" i="0" u="none" strike="noStrike" cap="none" normalizeH="0" baseline="0" dirty="0" err="1">
+                <a:ln>
+                  <a:noFill/>
+                </a:ln>
+                <a:solidFill>
+                  <a:schemeClr val="tx1"/>
+                </a:solidFill>
+                <a:effectLst/>
+              </a:rPr>
+              <a:t>kada</a:t>
+            </a:r>
+            <a:r>
+              <a:rPr kumimoji="0" lang="en-US" altLang="en-US" sz="2600" i="0" u="none" strike="noStrike" cap="none" normalizeH="0" baseline="0" dirty="0">
+                <a:ln>
+                  <a:noFill/>
+                </a:ln>
+                <a:solidFill>
+                  <a:schemeClr val="tx1"/>
+                </a:solidFill>
+                <a:effectLst/>
+              </a:rPr>
+              <a:t>:</a:t>
+            </a:r>
+          </a:p>
+          <a:p>
+            <a:pPr lvl="1" eaLnBrk="0" fontAlgn="base" hangingPunct="0">
+              <a:lnSpc>
+                <a:spcPct val="100000"/>
+              </a:lnSpc>
+              <a:spcBef>
+                <a:spcPct val="0"/>
+              </a:spcBef>
+              <a:spcAft>
+                <a:spcPct val="0"/>
+              </a:spcAft>
+            </a:pPr>
+            <a:r>
+              <a:rPr kumimoji="0" lang="en-US" altLang="en-US" sz="2200" b="0" i="0" u="none" strike="noStrike" cap="none" normalizeH="0" baseline="0" dirty="0">
+                <a:ln>
+                  <a:noFill/>
+                </a:ln>
+                <a:solidFill>
+                  <a:schemeClr val="tx1"/>
+                </a:solidFill>
+                <a:effectLst/>
+              </a:rPr>
+              <a:t>Ima </a:t>
+            </a:r>
+            <a:r>
+              <a:rPr kumimoji="0" lang="en-US" altLang="en-US" sz="2200" b="0" i="0" u="none" strike="noStrike" cap="none" normalizeH="0" baseline="0" dirty="0" err="1">
+                <a:ln>
+                  <a:noFill/>
+                </a:ln>
+                <a:solidFill>
+                  <a:schemeClr val="tx1"/>
+                </a:solidFill>
+                <a:effectLst/>
+              </a:rPr>
+              <a:t>mnogo</a:t>
+            </a:r>
+            <a:r>
+              <a:rPr kumimoji="0" lang="en-US" altLang="en-US" sz="2200" b="0" i="0" u="none" strike="noStrike" cap="none" normalizeH="0" baseline="0" dirty="0">
+                <a:ln>
+                  <a:noFill/>
+                </a:ln>
+                <a:solidFill>
+                  <a:schemeClr val="tx1"/>
+                </a:solidFill>
+                <a:effectLst/>
+              </a:rPr>
+              <a:t> </a:t>
+            </a:r>
+            <a:r>
+              <a:rPr kumimoji="0" lang="en-US" altLang="en-US" sz="2200" b="0" i="0" u="none" strike="noStrike" cap="none" normalizeH="0" baseline="0" dirty="0" err="1">
+                <a:ln>
+                  <a:noFill/>
+                </a:ln>
+                <a:solidFill>
+                  <a:schemeClr val="tx1"/>
+                </a:solidFill>
+                <a:effectLst/>
+              </a:rPr>
+              <a:t>različitih</a:t>
+            </a:r>
+            <a:r>
+              <a:rPr kumimoji="0" lang="en-US" altLang="en-US" sz="2200" b="0" i="0" u="none" strike="noStrike" cap="none" normalizeH="0" baseline="0" dirty="0">
+                <a:ln>
+                  <a:noFill/>
+                </a:ln>
+                <a:solidFill>
+                  <a:schemeClr val="tx1"/>
+                </a:solidFill>
+                <a:effectLst/>
+              </a:rPr>
+              <a:t> </a:t>
+            </a:r>
+            <a:r>
+              <a:rPr kumimoji="0" lang="en-US" altLang="en-US" sz="2200" b="0" i="0" u="none" strike="noStrike" cap="none" normalizeH="0" baseline="0" dirty="0" err="1">
+                <a:ln>
+                  <a:noFill/>
+                </a:ln>
+                <a:solidFill>
+                  <a:schemeClr val="tx1"/>
+                </a:solidFill>
+                <a:effectLst/>
+              </a:rPr>
+              <a:t>vrednosti</a:t>
+            </a:r>
+            <a:r>
+              <a:rPr kumimoji="0" lang="en-US" altLang="en-US" sz="2200" b="0" i="0" u="none" strike="noStrike" cap="none" normalizeH="0" baseline="0" dirty="0">
+                <a:ln>
+                  <a:noFill/>
+                </a:ln>
+                <a:solidFill>
+                  <a:schemeClr val="tx1"/>
+                </a:solidFill>
+                <a:effectLst/>
+              </a:rPr>
+              <a:t> </a:t>
+            </a:r>
+          </a:p>
+          <a:p>
+            <a:pPr lvl="1" eaLnBrk="0" fontAlgn="base" hangingPunct="0">
+              <a:lnSpc>
+                <a:spcPct val="100000"/>
+              </a:lnSpc>
+              <a:spcBef>
+                <a:spcPct val="0"/>
+              </a:spcBef>
+              <a:spcAft>
+                <a:spcPct val="0"/>
+              </a:spcAft>
+            </a:pPr>
+            <a:r>
+              <a:rPr kumimoji="0" lang="en-US" altLang="en-US" sz="2200" b="0" i="0" u="none" strike="noStrike" cap="none" normalizeH="0" baseline="0" dirty="0" err="1">
+                <a:ln>
+                  <a:noFill/>
+                </a:ln>
+                <a:solidFill>
+                  <a:schemeClr val="tx1"/>
+                </a:solidFill>
+                <a:effectLst/>
+              </a:rPr>
+              <a:t>Često</a:t>
+            </a:r>
+            <a:r>
+              <a:rPr kumimoji="0" lang="en-US" altLang="en-US" sz="2200" b="0" i="0" u="none" strike="noStrike" cap="none" normalizeH="0" baseline="0" dirty="0">
+                <a:ln>
+                  <a:noFill/>
+                </a:ln>
+                <a:solidFill>
+                  <a:schemeClr val="tx1"/>
+                </a:solidFill>
+                <a:effectLst/>
+              </a:rPr>
+              <a:t> se </a:t>
+            </a:r>
+            <a:r>
+              <a:rPr kumimoji="0" lang="en-US" altLang="en-US" sz="2200" b="0" i="0" u="none" strike="noStrike" cap="none" normalizeH="0" baseline="0" dirty="0" err="1">
+                <a:ln>
+                  <a:noFill/>
+                </a:ln>
+                <a:solidFill>
+                  <a:schemeClr val="tx1"/>
+                </a:solidFill>
+                <a:effectLst/>
+              </a:rPr>
+              <a:t>koristi</a:t>
+            </a:r>
+            <a:r>
+              <a:rPr kumimoji="0" lang="en-US" altLang="en-US" sz="2200" b="0" i="0" u="none" strike="noStrike" cap="none" normalizeH="0" baseline="0" dirty="0">
+                <a:ln>
+                  <a:noFill/>
+                </a:ln>
+                <a:solidFill>
+                  <a:schemeClr val="tx1"/>
+                </a:solidFill>
+                <a:effectLst/>
+              </a:rPr>
+              <a:t> </a:t>
+            </a:r>
+            <a:r>
+              <a:rPr kumimoji="0" lang="en-US" altLang="en-US" sz="2200" b="0" i="0" u="none" strike="noStrike" cap="none" normalizeH="0" baseline="0" dirty="0" err="1">
+                <a:ln>
+                  <a:noFill/>
+                </a:ln>
+                <a:solidFill>
+                  <a:schemeClr val="tx1"/>
+                </a:solidFill>
+                <a:effectLst/>
+              </a:rPr>
+              <a:t>poređenje</a:t>
+            </a:r>
+            <a:r>
+              <a:rPr kumimoji="0" lang="en-US" altLang="en-US" sz="2200" b="0" i="0" u="none" strike="noStrike" cap="none" normalizeH="0" baseline="0" dirty="0">
+                <a:ln>
+                  <a:noFill/>
+                </a:ln>
+                <a:solidFill>
+                  <a:schemeClr val="tx1"/>
+                </a:solidFill>
+                <a:effectLst/>
+              </a:rPr>
+              <a:t> </a:t>
+            </a:r>
+            <a:r>
+              <a:rPr kumimoji="0" lang="en-US" altLang="en-US" sz="2200" b="0" i="0" u="none" strike="noStrike" cap="none" normalizeH="0" baseline="0" dirty="0" err="1">
+                <a:ln>
+                  <a:noFill/>
+                </a:ln>
+                <a:solidFill>
+                  <a:schemeClr val="tx1"/>
+                </a:solidFill>
+                <a:effectLst/>
+              </a:rPr>
+              <a:t>jednakosti</a:t>
+            </a:r>
+            <a:r>
+              <a:rPr kumimoji="0" lang="en-US" altLang="en-US" sz="2200" b="0" i="0" u="none" strike="noStrike" cap="none" normalizeH="0" baseline="0" dirty="0">
+                <a:ln>
+                  <a:noFill/>
+                </a:ln>
+                <a:solidFill>
+                  <a:schemeClr val="tx1"/>
+                </a:solidFill>
+                <a:effectLst/>
+              </a:rPr>
+              <a:t> </a:t>
+            </a:r>
+            <a:endParaRPr kumimoji="0" lang="en-US" altLang="en-US" sz="2600" b="1" i="0" u="none" strike="noStrike" cap="none" normalizeH="0" baseline="0" dirty="0">
+              <a:ln>
+                <a:noFill/>
+              </a:ln>
+              <a:solidFill>
+                <a:schemeClr val="tx1"/>
+              </a:solidFill>
+              <a:effectLst/>
+            </a:endParaRPr>
+          </a:p>
+          <a:p>
+            <a:pPr eaLnBrk="0" fontAlgn="base" hangingPunct="0">
+              <a:lnSpc>
+                <a:spcPct val="100000"/>
+              </a:lnSpc>
+              <a:spcBef>
+                <a:spcPct val="0"/>
+              </a:spcBef>
+              <a:spcAft>
+                <a:spcPct val="0"/>
+              </a:spcAft>
+            </a:pPr>
+            <a:r>
+              <a:rPr kumimoji="0" lang="en-US" altLang="en-US" sz="2600" i="0" u="none" strike="noStrike" cap="none" normalizeH="0" baseline="0" dirty="0" err="1">
+                <a:ln>
+                  <a:noFill/>
+                </a:ln>
+                <a:solidFill>
+                  <a:schemeClr val="tx1"/>
+                </a:solidFill>
+                <a:effectLst/>
+              </a:rPr>
+              <a:t>Loš</a:t>
+            </a:r>
+            <a:r>
+              <a:rPr kumimoji="0" lang="en-US" altLang="en-US" sz="2600" i="0" u="none" strike="noStrike" cap="none" normalizeH="0" baseline="0" dirty="0">
+                <a:ln>
+                  <a:noFill/>
+                </a:ln>
+                <a:solidFill>
+                  <a:schemeClr val="tx1"/>
+                </a:solidFill>
+                <a:effectLst/>
+              </a:rPr>
+              <a:t> </a:t>
+            </a:r>
+            <a:r>
+              <a:rPr kumimoji="0" lang="en-US" altLang="en-US" sz="2600" i="0" u="none" strike="noStrike" cap="none" normalizeH="0" baseline="0" dirty="0" err="1">
+                <a:ln>
+                  <a:noFill/>
+                </a:ln>
+                <a:solidFill>
+                  <a:schemeClr val="tx1"/>
+                </a:solidFill>
+                <a:effectLst/>
+              </a:rPr>
+              <a:t>izbor</a:t>
+            </a:r>
+            <a:r>
+              <a:rPr kumimoji="0" lang="en-US" altLang="en-US" sz="2600" i="0" u="none" strike="noStrike" cap="none" normalizeH="0" baseline="0" dirty="0">
+                <a:ln>
+                  <a:noFill/>
+                </a:ln>
+                <a:solidFill>
+                  <a:schemeClr val="tx1"/>
+                </a:solidFill>
+                <a:effectLst/>
+              </a:rPr>
+              <a:t> </a:t>
+            </a:r>
+            <a:r>
+              <a:rPr kumimoji="0" lang="en-US" altLang="en-US" sz="2600" i="0" u="none" strike="noStrike" cap="none" normalizeH="0" baseline="0" dirty="0" err="1">
+                <a:ln>
+                  <a:noFill/>
+                </a:ln>
+                <a:solidFill>
+                  <a:schemeClr val="tx1"/>
+                </a:solidFill>
+                <a:effectLst/>
+              </a:rPr>
+              <a:t>kada</a:t>
+            </a:r>
+            <a:r>
+              <a:rPr kumimoji="0" lang="en-US" altLang="en-US" sz="2600" i="0" u="none" strike="noStrike" cap="none" normalizeH="0" baseline="0" dirty="0">
+                <a:ln>
+                  <a:noFill/>
+                </a:ln>
+                <a:solidFill>
+                  <a:schemeClr val="tx1"/>
+                </a:solidFill>
+                <a:effectLst/>
+              </a:rPr>
+              <a:t>:</a:t>
+            </a:r>
+          </a:p>
+          <a:p>
+            <a:pPr lvl="1" eaLnBrk="0" fontAlgn="base" hangingPunct="0">
+              <a:lnSpc>
+                <a:spcPct val="100000"/>
+              </a:lnSpc>
+              <a:spcBef>
+                <a:spcPct val="0"/>
+              </a:spcBef>
+              <a:spcAft>
+                <a:spcPct val="0"/>
+              </a:spcAft>
+            </a:pPr>
+            <a:r>
+              <a:rPr kumimoji="0" lang="en-US" altLang="en-US" sz="2200" b="0" i="0" u="none" strike="noStrike" cap="none" normalizeH="0" baseline="0" dirty="0" err="1">
+                <a:ln>
+                  <a:noFill/>
+                </a:ln>
+                <a:solidFill>
+                  <a:schemeClr val="tx1"/>
+                </a:solidFill>
+                <a:effectLst/>
+              </a:rPr>
+              <a:t>Potrebno</a:t>
+            </a:r>
+            <a:r>
+              <a:rPr kumimoji="0" lang="en-US" altLang="en-US" sz="2200" b="0" i="0" u="none" strike="noStrike" cap="none" normalizeH="0" baseline="0" dirty="0">
+                <a:ln>
+                  <a:noFill/>
+                </a:ln>
+                <a:solidFill>
+                  <a:schemeClr val="tx1"/>
+                </a:solidFill>
+                <a:effectLst/>
+              </a:rPr>
+              <a:t> </a:t>
+            </a:r>
+            <a:r>
+              <a:rPr kumimoji="0" lang="en-US" altLang="en-US" sz="2200" b="0" i="0" u="none" strike="noStrike" cap="none" normalizeH="0" baseline="0" dirty="0" err="1">
+                <a:ln>
+                  <a:noFill/>
+                </a:ln>
+                <a:solidFill>
+                  <a:schemeClr val="tx1"/>
+                </a:solidFill>
+                <a:effectLst/>
+              </a:rPr>
+              <a:t>sortiranje</a:t>
+            </a:r>
+            <a:r>
+              <a:rPr kumimoji="0" lang="en-US" altLang="en-US" sz="2200" b="0" i="0" u="none" strike="noStrike" cap="none" normalizeH="0" baseline="0" dirty="0">
+                <a:ln>
+                  <a:noFill/>
+                </a:ln>
+                <a:solidFill>
+                  <a:schemeClr val="tx1"/>
+                </a:solidFill>
+                <a:effectLst/>
+              </a:rPr>
+              <a:t> </a:t>
+            </a:r>
+            <a:r>
+              <a:rPr kumimoji="0" lang="sr-Latn-RS" altLang="en-US" sz="2200" b="0" i="0" u="none" strike="noStrike" cap="none" normalizeH="0" baseline="0" dirty="0">
+                <a:ln>
+                  <a:noFill/>
+                </a:ln>
+                <a:solidFill>
+                  <a:schemeClr val="tx1"/>
+                </a:solidFill>
+                <a:effectLst/>
+              </a:rPr>
+              <a:t>	</a:t>
+            </a:r>
+            <a:endParaRPr kumimoji="0" lang="en-US" altLang="en-US" sz="2200" b="0" i="0" u="none" strike="noStrike" cap="none" normalizeH="0" baseline="0" dirty="0">
+              <a:ln>
+                <a:noFill/>
+              </a:ln>
+              <a:solidFill>
+                <a:schemeClr val="tx1"/>
+              </a:solidFill>
+              <a:effectLst/>
+            </a:endParaRPr>
+          </a:p>
+          <a:p>
+            <a:pPr lvl="1" eaLnBrk="0" fontAlgn="base" hangingPunct="0">
+              <a:lnSpc>
+                <a:spcPct val="100000"/>
+              </a:lnSpc>
+              <a:spcBef>
+                <a:spcPct val="0"/>
+              </a:spcBef>
+              <a:spcAft>
+                <a:spcPct val="0"/>
+              </a:spcAft>
+            </a:pPr>
+            <a:r>
+              <a:rPr kumimoji="0" lang="en-US" altLang="en-US" sz="2200" b="0" i="0" u="none" strike="noStrike" cap="none" normalizeH="0" baseline="0" dirty="0" err="1">
+                <a:ln>
+                  <a:noFill/>
+                </a:ln>
+                <a:solidFill>
+                  <a:schemeClr val="tx1"/>
+                </a:solidFill>
+                <a:effectLst/>
+              </a:rPr>
+              <a:t>Koriste</a:t>
+            </a:r>
+            <a:r>
+              <a:rPr kumimoji="0" lang="en-US" altLang="en-US" sz="2200" b="0" i="0" u="none" strike="noStrike" cap="none" normalizeH="0" baseline="0" dirty="0">
+                <a:ln>
+                  <a:noFill/>
+                </a:ln>
+                <a:solidFill>
+                  <a:schemeClr val="tx1"/>
+                </a:solidFill>
+                <a:effectLst/>
+              </a:rPr>
+              <a:t> se </a:t>
+            </a:r>
+            <a:r>
+              <a:rPr kumimoji="0" lang="en-US" altLang="en-US" sz="2200" b="0" i="0" u="none" strike="noStrike" cap="none" normalizeH="0" baseline="0" dirty="0" err="1">
+                <a:ln>
+                  <a:noFill/>
+                </a:ln>
+                <a:solidFill>
+                  <a:schemeClr val="tx1"/>
+                </a:solidFill>
+                <a:effectLst/>
+              </a:rPr>
+              <a:t>operatori</a:t>
+            </a:r>
+            <a:r>
+              <a:rPr kumimoji="0" lang="en-US" altLang="en-US" sz="2200" b="0" i="0" u="none" strike="noStrike" cap="none" normalizeH="0" baseline="0" dirty="0">
+                <a:ln>
+                  <a:noFill/>
+                </a:ln>
+                <a:solidFill>
+                  <a:schemeClr val="tx1"/>
+                </a:solidFill>
+                <a:effectLst/>
+              </a:rPr>
+              <a:t> &lt;, &gt;, BETWEEN</a:t>
+            </a:r>
+          </a:p>
+          <a:p>
+            <a:pPr marL="0" marR="0" lvl="0" indent="0" algn="l" defTabSz="914400" rtl="0" eaLnBrk="0" fontAlgn="base" latinLnBrk="0" hangingPunct="0">
+              <a:lnSpc>
+                <a:spcPct val="100000"/>
+              </a:lnSpc>
+              <a:spcBef>
+                <a:spcPct val="0"/>
+              </a:spcBef>
+              <a:spcAft>
+                <a:spcPct val="0"/>
+              </a:spcAft>
+              <a:buClrTx/>
+              <a:buSzTx/>
+              <a:buFontTx/>
+              <a:buNone/>
+              <a:tabLst/>
+            </a:pPr>
+            <a:endParaRPr kumimoji="0" lang="en-US" altLang="en-US" sz="1800" b="0" i="0" u="none" strike="noStrike" cap="none" normalizeH="0" baseline="0" dirty="0">
+              <a:ln>
+                <a:noFill/>
+              </a:ln>
+              <a:solidFill>
+                <a:schemeClr val="tx1"/>
+              </a:solidFill>
+              <a:effectLst/>
+              <a:latin typeface="Arial" panose="020B0604020202020204" pitchFamily="34" charset="0"/>
+            </a:endParaRPr>
+          </a:p>
+        </p:txBody>
+      </p:sp>
+    </p:spTree>
+    <p:extLst>
+      <p:ext uri="{BB962C8B-B14F-4D97-AF65-F5344CB8AC3E}">
+        <p14:creationId xmlns:p14="http://schemas.microsoft.com/office/powerpoint/2010/main" val="2765441827"/>
+      </p:ext>
+    </p:extLst>
+  </p:cSld>
+  <p:clrMapOvr>
+    <a:masterClrMapping/>
+  </p:clrMapOvr>
+</p:sld>
+</file>
+
+<file path=ppt/slides/slide6.xml><?xml version="1.0" encoding="utf-8"?>
+<p:sld xmlns:a="http://schemas.openxmlformats.org/drawingml/2006/main" xmlns:r="http://schemas.openxmlformats.org/officeDocument/2006/relationships" xmlns:p="http://schemas.openxmlformats.org/presentationml/2006/main">
+  <p:cSld>
+    <p:spTree>
+      <p:nvGrpSpPr>
+        <p:cNvPr id="1" name=""/>
+        <p:cNvGrpSpPr/>
+        <p:nvPr/>
+      </p:nvGrpSpPr>
+      <p:grpSpPr>
+        <a:xfrm>
+          <a:off x="0" y="0"/>
+          <a:ext cx="0" cy="0"/>
+          <a:chOff x="0" y="0"/>
+          <a:chExt cx="0" cy="0"/>
+        </a:xfrm>
+      </p:grpSpPr>
+      <p:sp>
+        <p:nvSpPr>
+          <p:cNvPr id="2" name="Title 1">
+            <a:extLst>
+              <a:ext uri="{FF2B5EF4-FFF2-40B4-BE49-F238E27FC236}">
+                <a16:creationId xmlns:a16="http://schemas.microsoft.com/office/drawing/2014/main" id="{4A1A233C-B1FE-4C7D-BC97-49EF055A87CD}"/>
+              </a:ext>
+            </a:extLst>
+          </p:cNvPr>
+          <p:cNvSpPr>
+            <a:spLocks noGrp="1"/>
+          </p:cNvSpPr>
+          <p:nvPr>
+            <p:ph type="title"/>
+          </p:nvPr>
+        </p:nvSpPr>
+        <p:spPr/>
+        <p:txBody>
+          <a:bodyPr/>
+          <a:lstStyle/>
+          <a:p>
+            <a:r>
+              <a:rPr lang="en-US" dirty="0"/>
+              <a:t>Hash </a:t>
+            </a:r>
+            <a:r>
+              <a:rPr lang="en-US" dirty="0" err="1"/>
+              <a:t>funkcija</a:t>
+            </a:r>
+            <a:endParaRPr lang="en-US" dirty="0"/>
+          </a:p>
+        </p:txBody>
+      </p:sp>
+      <p:sp>
+        <p:nvSpPr>
+          <p:cNvPr id="3" name="Content Placeholder 2">
+            <a:extLst>
+              <a:ext uri="{FF2B5EF4-FFF2-40B4-BE49-F238E27FC236}">
+                <a16:creationId xmlns:a16="http://schemas.microsoft.com/office/drawing/2014/main" id="{FD8FE2BE-B737-4406-B575-B096E425527D}"/>
+              </a:ext>
+            </a:extLst>
+          </p:cNvPr>
+          <p:cNvSpPr>
+            <a:spLocks noGrp="1"/>
+          </p:cNvSpPr>
+          <p:nvPr>
+            <p:ph idx="1"/>
+          </p:nvPr>
+        </p:nvSpPr>
+        <p:spPr/>
+        <p:txBody>
+          <a:bodyPr/>
+          <a:lstStyle/>
+          <a:p>
+            <a:r>
+              <a:rPr lang="pl-PL" dirty="0"/>
+              <a:t>Hash funkcija pretvara podatak u hash vrednost</a:t>
+            </a:r>
+            <a:endParaRPr lang="sr-Latn-RS" dirty="0"/>
+          </a:p>
+          <a:p>
+            <a:r>
+              <a:rPr lang="sr-Latn-RS" dirty="0" err="1"/>
+              <a:t>Npr</a:t>
+            </a:r>
+            <a:r>
+              <a:rPr lang="sr-Latn-RS" dirty="0"/>
+              <a:t>: h(„Mihajlo“) </a:t>
+            </a:r>
+            <a:r>
+              <a:rPr lang="en-US" dirty="0"/>
+              <a:t>= </a:t>
+            </a:r>
+            <a:r>
+              <a:rPr lang="sr-Latn-RS" dirty="0"/>
+              <a:t>582913</a:t>
+            </a:r>
+          </a:p>
+          <a:p>
+            <a:r>
+              <a:rPr lang="sr-Latn-RS" dirty="0"/>
+              <a:t>Dobra </a:t>
+            </a:r>
+            <a:r>
+              <a:rPr lang="sr-Latn-RS" dirty="0" err="1"/>
+              <a:t>hash</a:t>
+            </a:r>
+            <a:r>
+              <a:rPr lang="sr-Latn-RS" dirty="0"/>
+              <a:t> funkcija treba da:</a:t>
+            </a:r>
+          </a:p>
+          <a:p>
+            <a:pPr lvl="1"/>
+            <a:r>
+              <a:rPr lang="sr-Latn-RS" dirty="0"/>
+              <a:t>bude brza</a:t>
+            </a:r>
+          </a:p>
+          <a:p>
+            <a:pPr lvl="1"/>
+            <a:r>
+              <a:rPr lang="sr-Latn-RS" dirty="0"/>
+              <a:t>ravnomerno raspoređuje vrednosti</a:t>
+            </a:r>
+          </a:p>
+          <a:p>
+            <a:r>
+              <a:rPr lang="sr-Latn-RS" dirty="0"/>
+              <a:t>Cilj</a:t>
+            </a:r>
+            <a:r>
+              <a:rPr lang="sr-Latn-RS" b="1" dirty="0"/>
+              <a:t>:</a:t>
+            </a:r>
+          </a:p>
+          <a:p>
+            <a:pPr lvl="1"/>
+            <a:r>
+              <a:rPr lang="sr-Latn-RS" dirty="0"/>
+              <a:t>smanjenje kolizija</a:t>
+            </a:r>
+          </a:p>
+          <a:p>
+            <a:endParaRPr lang="en-US" dirty="0"/>
+          </a:p>
+        </p:txBody>
+      </p:sp>
+    </p:spTree>
+    <p:extLst>
+      <p:ext uri="{BB962C8B-B14F-4D97-AF65-F5344CB8AC3E}">
+        <p14:creationId xmlns:p14="http://schemas.microsoft.com/office/powerpoint/2010/main" val="2211597478"/>
+      </p:ext>
+    </p:extLst>
+  </p:cSld>
+  <p:clrMapOvr>
+    <a:masterClrMapping/>
+  </p:clrMapOvr>
+</p:sld>
+</file>
+
+<file path=ppt/slides/slide7.xml><?xml version="1.0" encoding="utf-8"?>
+<p:sld xmlns:a="http://schemas.openxmlformats.org/drawingml/2006/main" xmlns:r="http://schemas.openxmlformats.org/officeDocument/2006/relationships" xmlns:p="http://schemas.openxmlformats.org/presentationml/2006/main">
+  <p:cSld>
+    <p:spTree>
+      <p:nvGrpSpPr>
+        <p:cNvPr id="1" name=""/>
+        <p:cNvGrpSpPr/>
+        <p:nvPr/>
+      </p:nvGrpSpPr>
+      <p:grpSpPr>
+        <a:xfrm>
+          <a:off x="0" y="0"/>
+          <a:ext cx="0" cy="0"/>
+          <a:chOff x="0" y="0"/>
+          <a:chExt cx="0" cy="0"/>
+        </a:xfrm>
+      </p:grpSpPr>
+      <p:sp>
+        <p:nvSpPr>
+          <p:cNvPr id="2" name="Title 1">
+            <a:extLst>
+              <a:ext uri="{FF2B5EF4-FFF2-40B4-BE49-F238E27FC236}">
+                <a16:creationId xmlns:a16="http://schemas.microsoft.com/office/drawing/2014/main" id="{DEEC9B3D-56F9-438C-8A9C-00FFB1FBEC62}"/>
+              </a:ext>
+            </a:extLst>
+          </p:cNvPr>
+          <p:cNvSpPr>
+            <a:spLocks noGrp="1"/>
+          </p:cNvSpPr>
+          <p:nvPr>
+            <p:ph type="title"/>
+          </p:nvPr>
+        </p:nvSpPr>
+        <p:spPr/>
+        <p:txBody>
+          <a:bodyPr/>
+          <a:lstStyle/>
+          <a:p>
+            <a:r>
+              <a:rPr lang="sr-Latn-RS" dirty="0"/>
+              <a:t>Kolizija</a:t>
+            </a:r>
+            <a:endParaRPr lang="en-US" dirty="0"/>
+          </a:p>
+        </p:txBody>
+      </p:sp>
+      <p:sp>
+        <p:nvSpPr>
+          <p:cNvPr id="4" name="Rectangle 1">
+            <a:extLst>
+              <a:ext uri="{FF2B5EF4-FFF2-40B4-BE49-F238E27FC236}">
+                <a16:creationId xmlns:a16="http://schemas.microsoft.com/office/drawing/2014/main" id="{B448AFA8-22EC-4261-8975-3AC49505DCC4}"/>
+              </a:ext>
+            </a:extLst>
+          </p:cNvPr>
+          <p:cNvSpPr>
+            <a:spLocks noGrp="1" noChangeArrowheads="1"/>
+          </p:cNvSpPr>
+          <p:nvPr>
+            <p:ph idx="1"/>
+          </p:nvPr>
+        </p:nvSpPr>
+        <p:spPr bwMode="auto">
+          <a:xfrm>
+            <a:off x="838200" y="1769913"/>
+            <a:ext cx="5865324" cy="4462760"/>
+          </a:xfrm>
+          <a:prstGeom prst="rect">
+            <a:avLst/>
+          </a:prstGeom>
+          <a:noFill/>
+          <a:ln>
+            <a:noFill/>
+          </a:ln>
+          <a:effectLst/>
+          <a:extLst>
+            <a:ext uri="{909E8E84-426E-40DD-AFC4-6F175D3DCCD1}">
+              <a14:hiddenFill xmlns:a14="http://schemas.microsoft.com/office/drawing/2010/main">
+                <a:solidFill>
+                  <a:schemeClr val="accent1"/>
+                </a:solidFill>
+              </a14:hiddenFill>
+            </a:ext>
+            <a:ext uri="{91240B29-F687-4F45-9708-019B960494DF}">
+              <a14:hiddenLine xmlns:a14="http://schemas.microsoft.com/office/drawing/2010/main" w="9525">
+                <a:solidFill>
+                  <a:schemeClr val="tx1"/>
+                </a:solidFill>
+                <a:miter lim="800000"/>
+                <a:headEnd/>
+                <a:tailEnd/>
+              </a14:hiddenLine>
+            </a:ext>
+            <a:ext uri="{AF507438-7753-43E0-B8FC-AC1667EBCBE1}">
+              <a14:hiddenEffects xmlns:a14="http://schemas.microsoft.com/office/drawing/2010/main">
+                <a:effectLst>
+                  <a:outerShdw dist="35921" dir="2700000" algn="ctr" rotWithShape="0">
+                    <a:schemeClr val="bg2"/>
+                  </a:outerShdw>
+                </a:effectLst>
+              </a14:hiddenEffects>
+            </a:ext>
+          </a:extLst>
+        </p:spPr>
+        <p:txBody>
+          <a:bodyPr vert="horz" wrap="none" lIns="91440" tIns="45720" rIns="91440" bIns="45720" numCol="1" anchor="ctr" anchorCtr="0" compatLnSpc="1">
+            <a:prstTxWarp prst="textNoShape">
+              <a:avLst/>
+            </a:prstTxWarp>
+            <a:spAutoFit/>
+          </a:bodyPr>
+          <a:lstStyle/>
+          <a:p>
+            <a:pPr eaLnBrk="0" fontAlgn="base" hangingPunct="0">
+              <a:lnSpc>
+                <a:spcPct val="100000"/>
+              </a:lnSpc>
+              <a:spcBef>
+                <a:spcPct val="0"/>
+              </a:spcBef>
+              <a:spcAft>
+                <a:spcPct val="0"/>
+              </a:spcAft>
+            </a:pPr>
+            <a:r>
+              <a:rPr kumimoji="0" lang="en-US" altLang="en-US" sz="2600" b="0" i="0" u="none" strike="noStrike" cap="none" normalizeH="0" baseline="0" dirty="0" err="1">
+                <a:ln>
+                  <a:noFill/>
+                </a:ln>
+                <a:solidFill>
+                  <a:schemeClr val="tx1"/>
+                </a:solidFill>
+                <a:effectLst/>
+              </a:rPr>
+              <a:t>Kolizija</a:t>
+            </a:r>
+            <a:r>
+              <a:rPr kumimoji="0" lang="en-US" altLang="en-US" sz="2600" b="0" i="0" u="none" strike="noStrike" cap="none" normalizeH="0" baseline="0" dirty="0">
+                <a:ln>
+                  <a:noFill/>
+                </a:ln>
+                <a:solidFill>
+                  <a:schemeClr val="tx1"/>
+                </a:solidFill>
+                <a:effectLst/>
+              </a:rPr>
+              <a:t> </a:t>
+            </a:r>
+            <a:r>
+              <a:rPr kumimoji="0" lang="en-US" altLang="en-US" sz="2600" b="0" i="0" u="none" strike="noStrike" cap="none" normalizeH="0" baseline="0" dirty="0" err="1">
+                <a:ln>
+                  <a:noFill/>
+                </a:ln>
+                <a:solidFill>
+                  <a:schemeClr val="tx1"/>
+                </a:solidFill>
+                <a:effectLst/>
+              </a:rPr>
+              <a:t>nastaje</a:t>
+            </a:r>
+            <a:r>
+              <a:rPr kumimoji="0" lang="en-US" altLang="en-US" sz="2600" b="0" i="0" u="none" strike="noStrike" cap="none" normalizeH="0" baseline="0" dirty="0">
+                <a:ln>
+                  <a:noFill/>
+                </a:ln>
+                <a:solidFill>
+                  <a:schemeClr val="tx1"/>
+                </a:solidFill>
+                <a:effectLst/>
+              </a:rPr>
+              <a:t> </a:t>
+            </a:r>
+            <a:r>
+              <a:rPr kumimoji="0" lang="en-US" altLang="en-US" sz="2600" b="0" i="0" u="none" strike="noStrike" cap="none" normalizeH="0" baseline="0" dirty="0" err="1">
+                <a:ln>
+                  <a:noFill/>
+                </a:ln>
+                <a:solidFill>
+                  <a:schemeClr val="tx1"/>
+                </a:solidFill>
+                <a:effectLst/>
+              </a:rPr>
+              <a:t>kada</a:t>
+            </a:r>
+            <a:r>
+              <a:rPr kumimoji="0" lang="en-US" altLang="en-US" sz="2600" b="0" i="0" u="none" strike="noStrike" cap="none" normalizeH="0" baseline="0" dirty="0">
+                <a:ln>
+                  <a:noFill/>
+                </a:ln>
+                <a:solidFill>
+                  <a:schemeClr val="tx1"/>
+                </a:solidFill>
+                <a:effectLst/>
+              </a:rPr>
+              <a:t>: </a:t>
+            </a:r>
+            <a:endParaRPr kumimoji="0" lang="sr-Latn-RS" altLang="en-US" sz="2600" b="0" i="0" u="none" strike="noStrike" cap="none" normalizeH="0" baseline="0" dirty="0">
+              <a:ln>
+                <a:noFill/>
+              </a:ln>
+              <a:solidFill>
+                <a:schemeClr val="tx1"/>
+              </a:solidFill>
+              <a:effectLst/>
+            </a:endParaRPr>
+          </a:p>
+          <a:p>
+            <a:pPr lvl="1" eaLnBrk="0" fontAlgn="base" hangingPunct="0">
+              <a:lnSpc>
+                <a:spcPct val="100000"/>
+              </a:lnSpc>
+              <a:spcBef>
+                <a:spcPct val="0"/>
+              </a:spcBef>
+              <a:spcAft>
+                <a:spcPct val="0"/>
+              </a:spcAft>
+            </a:pPr>
+            <a:r>
+              <a:rPr kumimoji="0" lang="en-US" altLang="en-US" sz="2200" b="0" i="0" u="none" strike="noStrike" cap="none" normalizeH="0" baseline="0" dirty="0" err="1">
+                <a:ln>
+                  <a:noFill/>
+                </a:ln>
+                <a:solidFill>
+                  <a:schemeClr val="tx1"/>
+                </a:solidFill>
+                <a:effectLst/>
+              </a:rPr>
+              <a:t>dve</a:t>
+            </a:r>
+            <a:r>
+              <a:rPr kumimoji="0" lang="en-US" altLang="en-US" sz="2200" b="0" i="0" u="none" strike="noStrike" cap="none" normalizeH="0" baseline="0" dirty="0">
+                <a:ln>
+                  <a:noFill/>
+                </a:ln>
+                <a:solidFill>
+                  <a:schemeClr val="tx1"/>
+                </a:solidFill>
+                <a:effectLst/>
+              </a:rPr>
+              <a:t> </a:t>
+            </a:r>
+            <a:r>
+              <a:rPr kumimoji="0" lang="en-US" altLang="en-US" sz="2200" b="0" i="0" u="none" strike="noStrike" cap="none" normalizeH="0" baseline="0" dirty="0" err="1">
+                <a:ln>
+                  <a:noFill/>
+                </a:ln>
+                <a:solidFill>
+                  <a:schemeClr val="tx1"/>
+                </a:solidFill>
+                <a:effectLst/>
+              </a:rPr>
+              <a:t>različite</a:t>
+            </a:r>
+            <a:r>
+              <a:rPr kumimoji="0" lang="en-US" altLang="en-US" sz="2200" b="0" i="0" u="none" strike="noStrike" cap="none" normalizeH="0" baseline="0" dirty="0">
+                <a:ln>
+                  <a:noFill/>
+                </a:ln>
+                <a:solidFill>
+                  <a:schemeClr val="tx1"/>
+                </a:solidFill>
+                <a:effectLst/>
+              </a:rPr>
+              <a:t> </a:t>
+            </a:r>
+            <a:r>
+              <a:rPr kumimoji="0" lang="en-US" altLang="en-US" sz="2200" b="0" i="0" u="none" strike="noStrike" cap="none" normalizeH="0" baseline="0" dirty="0" err="1">
+                <a:ln>
+                  <a:noFill/>
+                </a:ln>
+                <a:solidFill>
+                  <a:schemeClr val="tx1"/>
+                </a:solidFill>
+                <a:effectLst/>
+              </a:rPr>
+              <a:t>vrednosti</a:t>
+            </a:r>
+            <a:r>
+              <a:rPr kumimoji="0" lang="en-US" altLang="en-US" sz="2200" b="0" i="0" u="none" strike="noStrike" cap="none" normalizeH="0" baseline="0" dirty="0">
+                <a:ln>
+                  <a:noFill/>
+                </a:ln>
+                <a:solidFill>
+                  <a:schemeClr val="tx1"/>
+                </a:solidFill>
+                <a:effectLst/>
+              </a:rPr>
+              <a:t> </a:t>
+            </a:r>
+            <a:r>
+              <a:rPr kumimoji="0" lang="en-US" altLang="en-US" sz="2200" b="0" i="0" u="none" strike="noStrike" cap="none" normalizeH="0" baseline="0" dirty="0" err="1">
+                <a:ln>
+                  <a:noFill/>
+                </a:ln>
+                <a:solidFill>
+                  <a:schemeClr val="tx1"/>
+                </a:solidFill>
+                <a:effectLst/>
+              </a:rPr>
+              <a:t>daju</a:t>
+            </a:r>
+            <a:r>
+              <a:rPr kumimoji="0" lang="en-US" altLang="en-US" sz="2200" b="0" i="0" u="none" strike="noStrike" cap="none" normalizeH="0" baseline="0" dirty="0">
+                <a:ln>
+                  <a:noFill/>
+                </a:ln>
+                <a:solidFill>
+                  <a:schemeClr val="tx1"/>
+                </a:solidFill>
+                <a:effectLst/>
+              </a:rPr>
+              <a:t> </a:t>
+            </a:r>
+            <a:r>
+              <a:rPr kumimoji="0" lang="en-US" altLang="en-US" sz="2200" b="0" i="0" u="none" strike="noStrike" cap="none" normalizeH="0" baseline="0" dirty="0" err="1">
+                <a:ln>
+                  <a:noFill/>
+                </a:ln>
+                <a:solidFill>
+                  <a:schemeClr val="tx1"/>
+                </a:solidFill>
+                <a:effectLst/>
+              </a:rPr>
+              <a:t>isti</a:t>
+            </a:r>
+            <a:r>
+              <a:rPr kumimoji="0" lang="en-US" altLang="en-US" sz="2200" b="0" i="0" u="none" strike="noStrike" cap="none" normalizeH="0" baseline="0" dirty="0">
+                <a:ln>
+                  <a:noFill/>
+                </a:ln>
+                <a:solidFill>
+                  <a:schemeClr val="tx1"/>
+                </a:solidFill>
+                <a:effectLst/>
+              </a:rPr>
+              <a:t> hash </a:t>
+            </a:r>
+          </a:p>
+          <a:p>
+            <a:pPr eaLnBrk="0" fontAlgn="base" hangingPunct="0">
+              <a:lnSpc>
+                <a:spcPct val="100000"/>
+              </a:lnSpc>
+              <a:spcBef>
+                <a:spcPct val="0"/>
+              </a:spcBef>
+              <a:spcAft>
+                <a:spcPct val="0"/>
+              </a:spcAft>
+            </a:pPr>
+            <a:r>
+              <a:rPr kumimoji="0" lang="en-US" altLang="en-US" sz="2600" b="0" i="0" u="none" strike="noStrike" cap="none" normalizeH="0" baseline="0" dirty="0">
+                <a:ln>
+                  <a:noFill/>
+                </a:ln>
+                <a:solidFill>
+                  <a:schemeClr val="tx1"/>
+                </a:solidFill>
+                <a:effectLst/>
+              </a:rPr>
+              <a:t>Primer:</a:t>
+            </a:r>
+          </a:p>
+          <a:p>
+            <a:pPr lvl="1" eaLnBrk="0" fontAlgn="base" hangingPunct="0">
+              <a:lnSpc>
+                <a:spcPct val="100000"/>
+              </a:lnSpc>
+              <a:spcBef>
+                <a:spcPct val="0"/>
+              </a:spcBef>
+              <a:spcAft>
+                <a:spcPct val="0"/>
+              </a:spcAft>
+            </a:pPr>
+            <a:r>
+              <a:rPr kumimoji="0" lang="en-US" altLang="en-US" sz="2200" b="0" i="0" u="none" strike="noStrike" cap="none" normalizeH="0" baseline="0" dirty="0">
+                <a:ln>
+                  <a:noFill/>
+                </a:ln>
+                <a:solidFill>
+                  <a:schemeClr val="tx1"/>
+                </a:solidFill>
+                <a:effectLst/>
+              </a:rPr>
+              <a:t>A → 1523</a:t>
+            </a:r>
+            <a:br>
+              <a:rPr kumimoji="0" lang="en-US" altLang="en-US" sz="2200" b="0" i="0" u="none" strike="noStrike" cap="none" normalizeH="0" baseline="0" dirty="0">
+                <a:ln>
+                  <a:noFill/>
+                </a:ln>
+                <a:solidFill>
+                  <a:schemeClr val="tx1"/>
+                </a:solidFill>
+                <a:effectLst/>
+              </a:rPr>
+            </a:br>
+            <a:r>
+              <a:rPr kumimoji="0" lang="en-US" altLang="en-US" sz="2200" b="0" i="0" u="none" strike="noStrike" cap="none" normalizeH="0" baseline="0" dirty="0">
+                <a:ln>
+                  <a:noFill/>
+                </a:ln>
+                <a:solidFill>
+                  <a:schemeClr val="tx1"/>
+                </a:solidFill>
+                <a:effectLst/>
+              </a:rPr>
+              <a:t>B → 1523</a:t>
+            </a:r>
+            <a:endParaRPr kumimoji="0" lang="en-US" altLang="en-US" sz="2600" b="1" i="0" u="none" strike="noStrike" cap="none" normalizeH="0" baseline="0" dirty="0">
+              <a:ln>
+                <a:noFill/>
+              </a:ln>
+              <a:solidFill>
+                <a:schemeClr val="tx1"/>
+              </a:solidFill>
+              <a:effectLst/>
+            </a:endParaRPr>
+          </a:p>
+          <a:p>
+            <a:pPr eaLnBrk="0" fontAlgn="base" hangingPunct="0">
+              <a:lnSpc>
+                <a:spcPct val="100000"/>
+              </a:lnSpc>
+              <a:spcBef>
+                <a:spcPct val="0"/>
+              </a:spcBef>
+              <a:spcAft>
+                <a:spcPct val="0"/>
+              </a:spcAft>
+            </a:pPr>
+            <a:r>
+              <a:rPr kumimoji="0" lang="en-US" altLang="en-US" sz="2600" i="0" u="none" strike="noStrike" cap="none" normalizeH="0" baseline="0" dirty="0" err="1">
+                <a:ln>
+                  <a:noFill/>
+                </a:ln>
+                <a:solidFill>
+                  <a:schemeClr val="tx1"/>
+                </a:solidFill>
+                <a:effectLst/>
+              </a:rPr>
+              <a:t>Rešenja</a:t>
+            </a:r>
+            <a:r>
+              <a:rPr kumimoji="0" lang="en-US" altLang="en-US" sz="2600" i="0" u="none" strike="noStrike" cap="none" normalizeH="0" baseline="0" dirty="0">
+                <a:ln>
+                  <a:noFill/>
+                </a:ln>
+                <a:solidFill>
+                  <a:schemeClr val="tx1"/>
+                </a:solidFill>
+                <a:effectLst/>
+              </a:rPr>
+              <a:t>:</a:t>
+            </a:r>
+          </a:p>
+          <a:p>
+            <a:pPr lvl="1" eaLnBrk="0" fontAlgn="base" hangingPunct="0">
+              <a:lnSpc>
+                <a:spcPct val="100000"/>
+              </a:lnSpc>
+              <a:spcBef>
+                <a:spcPct val="0"/>
+              </a:spcBef>
+              <a:spcAft>
+                <a:spcPct val="0"/>
+              </a:spcAft>
+            </a:pPr>
+            <a:r>
+              <a:rPr kumimoji="0" lang="en-US" altLang="en-US" sz="2200" b="0" i="0" u="none" strike="noStrike" cap="none" normalizeH="0" baseline="0" dirty="0" err="1">
+                <a:ln>
+                  <a:noFill/>
+                </a:ln>
+                <a:solidFill>
+                  <a:schemeClr val="tx1"/>
+                </a:solidFill>
+                <a:effectLst/>
+              </a:rPr>
+              <a:t>Otvoreno</a:t>
+            </a:r>
+            <a:r>
+              <a:rPr kumimoji="0" lang="en-US" altLang="en-US" sz="2200" b="0" i="0" u="none" strike="noStrike" cap="none" normalizeH="0" baseline="0" dirty="0">
+                <a:ln>
+                  <a:noFill/>
+                </a:ln>
+                <a:solidFill>
+                  <a:schemeClr val="tx1"/>
+                </a:solidFill>
+                <a:effectLst/>
+              </a:rPr>
+              <a:t> </a:t>
+            </a:r>
+            <a:r>
+              <a:rPr kumimoji="0" lang="en-US" altLang="en-US" sz="2200" b="0" i="0" u="none" strike="noStrike" cap="none" normalizeH="0" baseline="0" dirty="0" err="1">
+                <a:ln>
+                  <a:noFill/>
+                </a:ln>
+                <a:solidFill>
+                  <a:schemeClr val="tx1"/>
+                </a:solidFill>
+                <a:effectLst/>
+              </a:rPr>
+              <a:t>adresiranje</a:t>
+            </a:r>
+            <a:r>
+              <a:rPr kumimoji="0" lang="en-US" altLang="en-US" sz="2200" b="0" i="0" u="none" strike="noStrike" cap="none" normalizeH="0" baseline="0" dirty="0">
+                <a:ln>
+                  <a:noFill/>
+                </a:ln>
+                <a:solidFill>
+                  <a:schemeClr val="tx1"/>
+                </a:solidFill>
+                <a:effectLst/>
+              </a:rPr>
+              <a:t> </a:t>
+            </a:r>
+          </a:p>
+          <a:p>
+            <a:pPr lvl="1" eaLnBrk="0" fontAlgn="base" hangingPunct="0">
+              <a:lnSpc>
+                <a:spcPct val="100000"/>
+              </a:lnSpc>
+              <a:spcBef>
+                <a:spcPct val="0"/>
+              </a:spcBef>
+              <a:spcAft>
+                <a:spcPct val="0"/>
+              </a:spcAft>
+            </a:pPr>
+            <a:r>
+              <a:rPr kumimoji="0" lang="en-US" altLang="en-US" sz="2200" b="0" i="0" u="none" strike="noStrike" cap="none" normalizeH="0" baseline="0" dirty="0" err="1">
+                <a:ln>
+                  <a:noFill/>
+                </a:ln>
+                <a:solidFill>
+                  <a:schemeClr val="tx1"/>
+                </a:solidFill>
+                <a:effectLst/>
+              </a:rPr>
+              <a:t>Spoljašnje</a:t>
+            </a:r>
+            <a:r>
+              <a:rPr kumimoji="0" lang="en-US" altLang="en-US" sz="2200" b="0" i="0" u="none" strike="noStrike" cap="none" normalizeH="0" baseline="0" dirty="0">
+                <a:ln>
+                  <a:noFill/>
+                </a:ln>
+                <a:solidFill>
+                  <a:schemeClr val="tx1"/>
+                </a:solidFill>
+                <a:effectLst/>
+              </a:rPr>
+              <a:t> </a:t>
+            </a:r>
+            <a:r>
+              <a:rPr kumimoji="0" lang="en-US" altLang="en-US" sz="2200" b="0" i="0" u="none" strike="noStrike" cap="none" normalizeH="0" baseline="0" dirty="0" err="1">
+                <a:ln>
+                  <a:noFill/>
+                </a:ln>
+                <a:solidFill>
+                  <a:schemeClr val="tx1"/>
+                </a:solidFill>
+                <a:effectLst/>
+              </a:rPr>
+              <a:t>ulančavanje</a:t>
+            </a:r>
+            <a:r>
+              <a:rPr kumimoji="0" lang="en-US" altLang="en-US" sz="2200" b="0" i="0" u="none" strike="noStrike" cap="none" normalizeH="0" baseline="0" dirty="0">
+                <a:ln>
+                  <a:noFill/>
+                </a:ln>
+                <a:solidFill>
+                  <a:schemeClr val="tx1"/>
+                </a:solidFill>
+                <a:effectLst/>
+              </a:rPr>
+              <a:t> (bucket + linked list) </a:t>
+            </a:r>
+            <a:endParaRPr kumimoji="0" lang="en-US" altLang="en-US" sz="2200" b="1" i="0" u="none" strike="noStrike" cap="none" normalizeH="0" baseline="0" dirty="0">
+              <a:ln>
+                <a:noFill/>
+              </a:ln>
+              <a:solidFill>
+                <a:schemeClr val="tx1"/>
+              </a:solidFill>
+              <a:effectLst/>
+            </a:endParaRPr>
+          </a:p>
+          <a:p>
+            <a:pPr eaLnBrk="0" fontAlgn="base" hangingPunct="0">
+              <a:lnSpc>
+                <a:spcPct val="100000"/>
+              </a:lnSpc>
+              <a:spcBef>
+                <a:spcPct val="0"/>
+              </a:spcBef>
+              <a:spcAft>
+                <a:spcPct val="0"/>
+              </a:spcAft>
+            </a:pPr>
+            <a:r>
+              <a:rPr kumimoji="0" lang="en-US" altLang="en-US" sz="2600" i="0" u="none" strike="noStrike" cap="none" normalizeH="0" baseline="0" dirty="0" err="1">
+                <a:ln>
+                  <a:noFill/>
+                </a:ln>
+                <a:solidFill>
+                  <a:schemeClr val="tx1"/>
+                </a:solidFill>
+                <a:effectLst/>
+              </a:rPr>
+              <a:t>Posledice</a:t>
+            </a:r>
+            <a:r>
+              <a:rPr kumimoji="0" lang="en-US" altLang="en-US" sz="2600" i="0" u="none" strike="noStrike" cap="none" normalizeH="0" baseline="0" dirty="0">
+                <a:ln>
+                  <a:noFill/>
+                </a:ln>
+                <a:solidFill>
+                  <a:schemeClr val="tx1"/>
+                </a:solidFill>
+                <a:effectLst/>
+              </a:rPr>
+              <a:t>:</a:t>
+            </a:r>
+          </a:p>
+          <a:p>
+            <a:pPr lvl="1" eaLnBrk="0" fontAlgn="base" hangingPunct="0">
+              <a:lnSpc>
+                <a:spcPct val="100000"/>
+              </a:lnSpc>
+              <a:spcBef>
+                <a:spcPct val="0"/>
+              </a:spcBef>
+              <a:spcAft>
+                <a:spcPct val="0"/>
+              </a:spcAft>
+            </a:pPr>
+            <a:r>
+              <a:rPr kumimoji="0" lang="en-US" altLang="en-US" sz="2200" b="0" i="0" u="none" strike="noStrike" cap="none" normalizeH="0" baseline="0" dirty="0" err="1">
+                <a:ln>
+                  <a:noFill/>
+                </a:ln>
+                <a:solidFill>
+                  <a:schemeClr val="tx1"/>
+                </a:solidFill>
+                <a:effectLst/>
+              </a:rPr>
+              <a:t>Sporija</a:t>
+            </a:r>
+            <a:r>
+              <a:rPr kumimoji="0" lang="en-US" altLang="en-US" sz="2200" b="0" i="0" u="none" strike="noStrike" cap="none" normalizeH="0" baseline="0" dirty="0">
+                <a:ln>
+                  <a:noFill/>
+                </a:ln>
+                <a:solidFill>
+                  <a:schemeClr val="tx1"/>
+                </a:solidFill>
+                <a:effectLst/>
+              </a:rPr>
+              <a:t> </a:t>
+            </a:r>
+            <a:r>
+              <a:rPr kumimoji="0" lang="en-US" altLang="en-US" sz="2200" b="0" i="0" u="none" strike="noStrike" cap="none" normalizeH="0" baseline="0" dirty="0" err="1">
+                <a:ln>
+                  <a:noFill/>
+                </a:ln>
+                <a:solidFill>
+                  <a:schemeClr val="tx1"/>
+                </a:solidFill>
+                <a:effectLst/>
+              </a:rPr>
+              <a:t>pretraga</a:t>
+            </a:r>
+            <a:r>
+              <a:rPr kumimoji="0" lang="en-US" altLang="en-US" sz="2200" b="0" i="0" u="none" strike="noStrike" cap="none" normalizeH="0" baseline="0" dirty="0">
+                <a:ln>
+                  <a:noFill/>
+                </a:ln>
+                <a:solidFill>
+                  <a:schemeClr val="tx1"/>
+                </a:solidFill>
+                <a:effectLst/>
+              </a:rPr>
+              <a:t> </a:t>
+            </a:r>
+          </a:p>
+          <a:p>
+            <a:pPr lvl="1" eaLnBrk="0" fontAlgn="base" hangingPunct="0">
+              <a:lnSpc>
+                <a:spcPct val="100000"/>
+              </a:lnSpc>
+              <a:spcBef>
+                <a:spcPct val="0"/>
+              </a:spcBef>
+              <a:spcAft>
+                <a:spcPct val="0"/>
+              </a:spcAft>
+            </a:pPr>
+            <a:r>
+              <a:rPr kumimoji="0" lang="en-US" altLang="en-US" sz="2200" b="0" i="0" u="none" strike="noStrike" cap="none" normalizeH="0" baseline="0" dirty="0" err="1">
+                <a:ln>
+                  <a:noFill/>
+                </a:ln>
+                <a:solidFill>
+                  <a:schemeClr val="tx1"/>
+                </a:solidFill>
+                <a:effectLst/>
+              </a:rPr>
+              <a:t>Više</a:t>
+            </a:r>
+            <a:r>
+              <a:rPr kumimoji="0" lang="en-US" altLang="en-US" sz="2200" b="0" i="0" u="none" strike="noStrike" cap="none" normalizeH="0" baseline="0" dirty="0">
+                <a:ln>
+                  <a:noFill/>
+                </a:ln>
+                <a:solidFill>
+                  <a:schemeClr val="tx1"/>
+                </a:solidFill>
+                <a:effectLst/>
+              </a:rPr>
+              <a:t> </a:t>
+            </a:r>
+            <a:r>
+              <a:rPr kumimoji="0" lang="en-US" altLang="en-US" sz="2200" b="0" i="0" u="none" strike="noStrike" cap="none" normalizeH="0" baseline="0" dirty="0" err="1">
+                <a:ln>
+                  <a:noFill/>
+                </a:ln>
+                <a:solidFill>
+                  <a:schemeClr val="tx1"/>
+                </a:solidFill>
+                <a:effectLst/>
+              </a:rPr>
+              <a:t>operacija</a:t>
+            </a:r>
+            <a:r>
+              <a:rPr kumimoji="0" lang="en-US" altLang="en-US" sz="2200" b="0" i="0" u="none" strike="noStrike" cap="none" normalizeH="0" baseline="0" dirty="0">
+                <a:ln>
+                  <a:noFill/>
+                </a:ln>
+                <a:solidFill>
+                  <a:schemeClr val="tx1"/>
+                </a:solidFill>
+                <a:effectLst/>
+              </a:rPr>
+              <a:t> </a:t>
+            </a:r>
+            <a:r>
+              <a:rPr kumimoji="0" lang="en-US" altLang="en-US" sz="2200" b="0" i="0" u="none" strike="noStrike" cap="none" normalizeH="0" baseline="0" dirty="0" err="1">
+                <a:ln>
+                  <a:noFill/>
+                </a:ln>
+                <a:solidFill>
+                  <a:schemeClr val="tx1"/>
+                </a:solidFill>
+                <a:effectLst/>
+              </a:rPr>
+              <a:t>pristupa</a:t>
+            </a:r>
+            <a:r>
+              <a:rPr kumimoji="0" lang="en-US" altLang="en-US" sz="2200" b="0" i="0" u="none" strike="noStrike" cap="none" normalizeH="0" baseline="0" dirty="0">
+                <a:ln>
+                  <a:noFill/>
+                </a:ln>
+                <a:solidFill>
+                  <a:schemeClr val="tx1"/>
+                </a:solidFill>
+                <a:effectLst/>
+              </a:rPr>
+              <a:t> </a:t>
+            </a:r>
+          </a:p>
+          <a:p>
+            <a:pPr marL="0" marR="0" lvl="0" indent="0" algn="l" defTabSz="914400" rtl="0" eaLnBrk="0" fontAlgn="base" latinLnBrk="0" hangingPunct="0">
+              <a:lnSpc>
+                <a:spcPct val="100000"/>
+              </a:lnSpc>
+              <a:spcBef>
+                <a:spcPct val="0"/>
+              </a:spcBef>
+              <a:spcAft>
+                <a:spcPct val="0"/>
+              </a:spcAft>
+              <a:buClrTx/>
+              <a:buSzTx/>
+              <a:buFontTx/>
+              <a:buNone/>
+              <a:tabLst/>
+            </a:pPr>
+            <a:endParaRPr kumimoji="0" lang="en-US" altLang="en-US" sz="1800" b="0" i="0" u="none" strike="noStrike" cap="none" normalizeH="0" baseline="0" dirty="0">
+              <a:ln>
+                <a:noFill/>
+              </a:ln>
+              <a:solidFill>
+                <a:schemeClr val="tx1"/>
+              </a:solidFill>
+              <a:effectLst/>
+              <a:latin typeface="Arial" panose="020B0604020202020204" pitchFamily="34" charset="0"/>
+            </a:endParaRPr>
+          </a:p>
+        </p:txBody>
+      </p:sp>
+    </p:spTree>
+    <p:extLst>
+      <p:ext uri="{BB962C8B-B14F-4D97-AF65-F5344CB8AC3E}">
+        <p14:creationId xmlns:p14="http://schemas.microsoft.com/office/powerpoint/2010/main" val="1878076907"/>
+      </p:ext>
+    </p:extLst>
+  </p:cSld>
+  <p:clrMapOvr>
+    <a:masterClrMapping/>
+  </p:clrMapOvr>
+</p:sld>
+</file>
+
+<file path=ppt/slides/slide8.xml><?xml version="1.0" encoding="utf-8"?>
+<p:sld xmlns:a="http://schemas.openxmlformats.org/drawingml/2006/main" xmlns:r="http://schemas.openxmlformats.org/officeDocument/2006/relationships" xmlns:p="http://schemas.openxmlformats.org/presentationml/2006/main">
+  <p:cSld>
+    <p:spTree>
+      <p:nvGrpSpPr>
+        <p:cNvPr id="1" name=""/>
+        <p:cNvGrpSpPr/>
+        <p:nvPr/>
+      </p:nvGrpSpPr>
+      <p:grpSpPr>
+        <a:xfrm>
+          <a:off x="0" y="0"/>
+          <a:ext cx="0" cy="0"/>
+          <a:chOff x="0" y="0"/>
+          <a:chExt cx="0" cy="0"/>
+        </a:xfrm>
+      </p:grpSpPr>
+      <p:sp>
+        <p:nvSpPr>
+          <p:cNvPr id="2" name="Title 1">
+            <a:extLst>
+              <a:ext uri="{FF2B5EF4-FFF2-40B4-BE49-F238E27FC236}">
+                <a16:creationId xmlns:a16="http://schemas.microsoft.com/office/drawing/2014/main" id="{6B2DB42A-8F44-44CB-9E74-00B7CC81BE6C}"/>
+              </a:ext>
+            </a:extLst>
+          </p:cNvPr>
+          <p:cNvSpPr>
+            <a:spLocks noGrp="1"/>
+          </p:cNvSpPr>
+          <p:nvPr>
+            <p:ph type="title"/>
+          </p:nvPr>
+        </p:nvSpPr>
+        <p:spPr/>
+        <p:txBody>
+          <a:bodyPr/>
+          <a:lstStyle/>
+          <a:p>
+            <a:r>
+              <a:rPr lang="sr-Latn-RS" dirty="0" err="1"/>
+              <a:t>Hash</a:t>
+            </a:r>
+            <a:r>
+              <a:rPr lang="sr-Latn-RS" dirty="0"/>
+              <a:t> indeks</a:t>
+            </a:r>
+            <a:endParaRPr lang="en-US" dirty="0"/>
+          </a:p>
+        </p:txBody>
+      </p:sp>
+      <p:sp>
+        <p:nvSpPr>
+          <p:cNvPr id="4" name="Rectangle 1">
+            <a:extLst>
+              <a:ext uri="{FF2B5EF4-FFF2-40B4-BE49-F238E27FC236}">
+                <a16:creationId xmlns:a16="http://schemas.microsoft.com/office/drawing/2014/main" id="{31B70480-9B07-4780-8098-1A2B2CD88C17}"/>
+              </a:ext>
+            </a:extLst>
+          </p:cNvPr>
+          <p:cNvSpPr>
+            <a:spLocks noGrp="1" noChangeArrowheads="1"/>
+          </p:cNvSpPr>
+          <p:nvPr>
+            <p:ph idx="1"/>
+          </p:nvPr>
+        </p:nvSpPr>
+        <p:spPr bwMode="auto">
+          <a:xfrm>
+            <a:off x="695587" y="1601227"/>
+            <a:ext cx="5702395" cy="3978012"/>
+          </a:xfrm>
+          <a:prstGeom prst="rect">
+            <a:avLst/>
+          </a:prstGeom>
+          <a:noFill/>
+          <a:ln>
+            <a:noFill/>
+          </a:ln>
+          <a:effectLst/>
+          <a:extLst>
+            <a:ext uri="{909E8E84-426E-40DD-AFC4-6F175D3DCCD1}">
+              <a14:hiddenFill xmlns:a14="http://schemas.microsoft.com/office/drawing/2010/main">
+                <a:solidFill>
+                  <a:schemeClr val="accent1"/>
+                </a:solidFill>
+              </a14:hiddenFill>
+            </a:ext>
+            <a:ext uri="{91240B29-F687-4F45-9708-019B960494DF}">
+              <a14:hiddenLine xmlns:a14="http://schemas.microsoft.com/office/drawing/2010/main" w="9525">
+                <a:solidFill>
+                  <a:schemeClr val="tx1"/>
+                </a:solidFill>
+                <a:miter lim="800000"/>
+                <a:headEnd/>
+                <a:tailEnd/>
+              </a14:hiddenLine>
+            </a:ext>
+            <a:ext uri="{AF507438-7753-43E0-B8FC-AC1667EBCBE1}">
+              <a14:hiddenEffects xmlns:a14="http://schemas.microsoft.com/office/drawing/2010/main">
+                <a:effectLst>
+                  <a:outerShdw dist="35921" dir="2700000" algn="ctr" rotWithShape="0">
+                    <a:schemeClr val="bg2"/>
+                  </a:outerShdw>
+                </a:effectLst>
+              </a14:hiddenEffects>
+            </a:ext>
+          </a:extLst>
+        </p:spPr>
+        <p:txBody>
+          <a:bodyPr vert="horz" wrap="none" lIns="91440" tIns="45720" rIns="91440" bIns="45720" numCol="1" anchor="ctr" anchorCtr="0" compatLnSpc="1">
+            <a:prstTxWarp prst="textNoShape">
+              <a:avLst/>
+            </a:prstTxWarp>
+            <a:spAutoFit/>
+          </a:bodyPr>
+          <a:lstStyle/>
+          <a:p>
+            <a:r>
+              <a:rPr lang="en-US" sz="2600" dirty="0"/>
+              <a:t>Hash </a:t>
+            </a:r>
+            <a:r>
+              <a:rPr lang="en-US" sz="2600" dirty="0" err="1"/>
+              <a:t>indeks</a:t>
+            </a:r>
+            <a:r>
+              <a:rPr lang="en-US" sz="2600" dirty="0"/>
+              <a:t> </a:t>
+            </a:r>
+            <a:r>
+              <a:rPr lang="en-US" sz="2600" dirty="0" err="1"/>
+              <a:t>koristi</a:t>
+            </a:r>
+            <a:r>
+              <a:rPr lang="en-US" sz="2600" dirty="0"/>
+              <a:t> </a:t>
+            </a:r>
+            <a:r>
+              <a:rPr lang="en-US" sz="2600" dirty="0" err="1"/>
+              <a:t>više</a:t>
+            </a:r>
+            <a:r>
+              <a:rPr lang="en-US" sz="2600" dirty="0"/>
+              <a:t> </a:t>
+            </a:r>
+            <a:r>
+              <a:rPr lang="en-US" sz="2600" dirty="0" err="1"/>
+              <a:t>tipova</a:t>
+            </a:r>
+            <a:r>
+              <a:rPr lang="en-US" sz="2600" dirty="0"/>
+              <a:t> </a:t>
+            </a:r>
+            <a:r>
+              <a:rPr lang="en-US" sz="2600" dirty="0" err="1"/>
+              <a:t>stranica</a:t>
+            </a:r>
+            <a:r>
+              <a:rPr lang="en-US" sz="2600" dirty="0"/>
+              <a:t>:</a:t>
+            </a:r>
+          </a:p>
+          <a:p>
+            <a:pPr lvl="1"/>
+            <a:r>
+              <a:rPr lang="en-US" sz="2200" dirty="0"/>
+              <a:t>Meta </a:t>
+            </a:r>
+            <a:r>
+              <a:rPr lang="en-US" sz="2200" dirty="0" err="1"/>
+              <a:t>stranice</a:t>
+            </a:r>
+            <a:r>
+              <a:rPr lang="en-US" sz="2200" dirty="0"/>
+              <a:t> </a:t>
+            </a:r>
+          </a:p>
+          <a:p>
+            <a:pPr lvl="1"/>
+            <a:r>
+              <a:rPr lang="en-US" sz="2200" dirty="0"/>
+              <a:t>Bucket </a:t>
+            </a:r>
+            <a:r>
+              <a:rPr lang="en-US" sz="2200" dirty="0" err="1"/>
+              <a:t>stranice</a:t>
+            </a:r>
+            <a:r>
+              <a:rPr lang="en-US" sz="2200" dirty="0"/>
+              <a:t> </a:t>
+            </a:r>
+          </a:p>
+          <a:p>
+            <a:pPr lvl="1"/>
+            <a:r>
+              <a:rPr lang="en-US" sz="2200" dirty="0"/>
+              <a:t>Overflow </a:t>
+            </a:r>
+            <a:r>
+              <a:rPr lang="en-US" sz="2200" dirty="0" err="1"/>
+              <a:t>stranice</a:t>
+            </a:r>
+            <a:r>
+              <a:rPr lang="en-US" sz="2200" dirty="0"/>
+              <a:t> </a:t>
+            </a:r>
+          </a:p>
+          <a:p>
+            <a:pPr lvl="1"/>
+            <a:r>
+              <a:rPr lang="en-US" sz="2200" dirty="0"/>
+              <a:t>Bitmap </a:t>
+            </a:r>
+            <a:r>
+              <a:rPr lang="en-US" sz="2200" dirty="0" err="1"/>
+              <a:t>stranice</a:t>
+            </a:r>
+            <a:r>
+              <a:rPr lang="en-US" sz="2200" dirty="0"/>
+              <a:t> </a:t>
+            </a:r>
+          </a:p>
+          <a:p>
+            <a:r>
+              <a:rPr lang="en-US" sz="2600" b="1" dirty="0" err="1"/>
+              <a:t>Karakteristike</a:t>
+            </a:r>
+            <a:endParaRPr lang="en-US" sz="2600" b="1" dirty="0"/>
+          </a:p>
+          <a:p>
+            <a:pPr lvl="1"/>
+            <a:r>
+              <a:rPr lang="en-US" sz="2200" dirty="0" err="1"/>
+              <a:t>Dinamičko</a:t>
+            </a:r>
+            <a:r>
+              <a:rPr lang="en-US" sz="2200" dirty="0"/>
+              <a:t> </a:t>
+            </a:r>
+            <a:r>
+              <a:rPr lang="en-US" sz="2200" dirty="0" err="1"/>
+              <a:t>proširivanje</a:t>
+            </a:r>
+            <a:r>
+              <a:rPr lang="en-US" sz="2200" dirty="0"/>
+              <a:t> </a:t>
+            </a:r>
+          </a:p>
+          <a:p>
+            <a:pPr lvl="1"/>
+            <a:r>
+              <a:rPr lang="en-US" sz="2200" dirty="0" err="1"/>
+              <a:t>Organizacija</a:t>
+            </a:r>
+            <a:r>
+              <a:rPr lang="en-US" sz="2200" dirty="0"/>
+              <a:t> po bucket-</a:t>
+            </a:r>
+            <a:r>
+              <a:rPr lang="en-US" sz="2200" dirty="0" err="1"/>
+              <a:t>ima</a:t>
+            </a:r>
+            <a:r>
+              <a:rPr lang="en-US" sz="2200" dirty="0"/>
+              <a:t> </a:t>
+            </a:r>
+          </a:p>
+          <a:p>
+            <a:pPr lvl="1"/>
+            <a:r>
+              <a:rPr lang="en-US" sz="2200" dirty="0"/>
+              <a:t>Overflow </a:t>
+            </a:r>
+            <a:r>
+              <a:rPr lang="en-US" sz="2200" dirty="0" err="1"/>
+              <a:t>stranice</a:t>
+            </a:r>
+            <a:r>
+              <a:rPr lang="en-US" sz="2200" dirty="0"/>
+              <a:t> za </a:t>
+            </a:r>
+            <a:r>
+              <a:rPr lang="en-US" sz="2200" dirty="0" err="1"/>
+              <a:t>višak</a:t>
+            </a:r>
+            <a:r>
+              <a:rPr lang="en-US" sz="2200" dirty="0"/>
+              <a:t> </a:t>
+            </a:r>
+            <a:r>
+              <a:rPr lang="en-US" sz="2200" dirty="0" err="1"/>
+              <a:t>podataka</a:t>
+            </a:r>
+            <a:endParaRPr lang="en-US" sz="2200" dirty="0"/>
+          </a:p>
+          <a:p>
+            <a:pPr marL="0" marR="0" lvl="0" indent="0" algn="l" defTabSz="914400" rtl="0" eaLnBrk="0" fontAlgn="base" latinLnBrk="0" hangingPunct="0">
+              <a:lnSpc>
+                <a:spcPct val="100000"/>
+              </a:lnSpc>
+              <a:spcBef>
+                <a:spcPct val="0"/>
+              </a:spcBef>
+              <a:spcAft>
+                <a:spcPct val="0"/>
+              </a:spcAft>
+              <a:buClrTx/>
+              <a:buSzTx/>
+              <a:buNone/>
+              <a:tabLst/>
+            </a:pPr>
+            <a:endParaRPr kumimoji="0" lang="en-US" altLang="en-US" sz="2600" b="0" i="0" u="none" strike="noStrike" cap="none" normalizeH="0" baseline="0" dirty="0">
+              <a:ln>
+                <a:noFill/>
+              </a:ln>
+              <a:solidFill>
+                <a:schemeClr val="tx1"/>
+              </a:solidFill>
+              <a:effectLst/>
+            </a:endParaRPr>
+          </a:p>
+        </p:txBody>
+      </p:sp>
+      <p:pic>
+        <p:nvPicPr>
+          <p:cNvPr id="5" name="Picture 4">
+            <a:extLst>
+              <a:ext uri="{FF2B5EF4-FFF2-40B4-BE49-F238E27FC236}">
+                <a16:creationId xmlns:a16="http://schemas.microsoft.com/office/drawing/2014/main" id="{92E4B4E6-453B-4F37-B208-9B47DE90B731}"/>
+              </a:ext>
+            </a:extLst>
+          </p:cNvPr>
+          <p:cNvPicPr/>
+          <p:nvPr/>
+        </p:nvPicPr>
+        <p:blipFill>
+          <a:blip r:embed="rId2">
+            <a:extLst>
+              <a:ext uri="{28A0092B-C50C-407E-A947-70E740481C1C}">
+                <a14:useLocalDpi xmlns:a14="http://schemas.microsoft.com/office/drawing/2010/main" val="0"/>
+              </a:ext>
+            </a:extLst>
+          </a:blip>
+          <a:srcRect/>
+          <a:stretch>
+            <a:fillRect/>
+          </a:stretch>
+        </p:blipFill>
+        <p:spPr bwMode="auto">
+          <a:xfrm>
+            <a:off x="5419725" y="2350491"/>
+            <a:ext cx="5934075" cy="1485900"/>
+          </a:xfrm>
+          <a:prstGeom prst="rect">
+            <a:avLst/>
+          </a:prstGeom>
+          <a:noFill/>
+          <a:ln>
+            <a:noFill/>
+          </a:ln>
+        </p:spPr>
+      </p:pic>
+    </p:spTree>
+    <p:extLst>
+      <p:ext uri="{BB962C8B-B14F-4D97-AF65-F5344CB8AC3E}">
+        <p14:creationId xmlns:p14="http://schemas.microsoft.com/office/powerpoint/2010/main" val="2923934956"/>
+      </p:ext>
+    </p:extLst>
+  </p:cSld>
+  <p:clrMapOvr>
+    <a:masterClrMapping/>
+  </p:clrMapOvr>
+</p:sld>
+</file>
+
+<file path=ppt/slides/slide9.xml><?xml version="1.0" encoding="utf-8"?>
+<p:sld xmlns:a="http://schemas.openxmlformats.org/drawingml/2006/main" xmlns:r="http://schemas.openxmlformats.org/officeDocument/2006/relationships" xmlns:p="http://schemas.openxmlformats.org/presentationml/2006/main">
+  <p:cSld>
+    <p:spTree>
+      <p:nvGrpSpPr>
+        <p:cNvPr id="1" name=""/>
+        <p:cNvGrpSpPr/>
+        <p:nvPr/>
+      </p:nvGrpSpPr>
+      <p:grpSpPr>
+        <a:xfrm>
+          <a:off x="0" y="0"/>
+          <a:ext cx="0" cy="0"/>
+          <a:chOff x="0" y="0"/>
+          <a:chExt cx="0" cy="0"/>
+        </a:xfrm>
+      </p:grpSpPr>
+      <p:sp>
+        <p:nvSpPr>
+          <p:cNvPr id="2" name="Title 1">
+            <a:extLst>
+              <a:ext uri="{FF2B5EF4-FFF2-40B4-BE49-F238E27FC236}">
+                <a16:creationId xmlns:a16="http://schemas.microsoft.com/office/drawing/2014/main" id="{6D708CC7-AE84-4D80-8EF5-7DCD168C8C39}"/>
+              </a:ext>
+            </a:extLst>
+          </p:cNvPr>
+          <p:cNvSpPr>
+            <a:spLocks noGrp="1"/>
+          </p:cNvSpPr>
+          <p:nvPr>
+            <p:ph type="title"/>
+          </p:nvPr>
+        </p:nvSpPr>
+        <p:spPr/>
+        <p:txBody>
+          <a:bodyPr/>
+          <a:lstStyle/>
+          <a:p>
+            <a:r>
+              <a:rPr lang="sr-Latn-RS" dirty="0"/>
+              <a:t>Prednosti </a:t>
+            </a:r>
+            <a:r>
+              <a:rPr lang="sr-Latn-RS" dirty="0" err="1"/>
+              <a:t>hash</a:t>
+            </a:r>
+            <a:r>
+              <a:rPr lang="sr-Latn-RS" dirty="0"/>
+              <a:t> indeksa</a:t>
+            </a:r>
+            <a:endParaRPr lang="en-US" dirty="0"/>
+          </a:p>
+        </p:txBody>
+      </p:sp>
+      <p:sp>
+        <p:nvSpPr>
+          <p:cNvPr id="3" name="Content Placeholder 2">
+            <a:extLst>
+              <a:ext uri="{FF2B5EF4-FFF2-40B4-BE49-F238E27FC236}">
+                <a16:creationId xmlns:a16="http://schemas.microsoft.com/office/drawing/2014/main" id="{15550B8A-6250-4C4C-90F2-8B6E7511EB4C}"/>
+              </a:ext>
+            </a:extLst>
+          </p:cNvPr>
+          <p:cNvSpPr>
+            <a:spLocks noGrp="1"/>
+          </p:cNvSpPr>
+          <p:nvPr>
+            <p:ph idx="1"/>
+          </p:nvPr>
+        </p:nvSpPr>
+        <p:spPr/>
+        <p:txBody>
+          <a:bodyPr>
+            <a:normAutofit/>
+          </a:bodyPr>
+          <a:lstStyle/>
+          <a:p>
+            <a:r>
+              <a:rPr lang="en-US" dirty="0" err="1"/>
+              <a:t>Veoma</a:t>
+            </a:r>
+            <a:r>
+              <a:rPr lang="en-US" dirty="0"/>
+              <a:t> </a:t>
+            </a:r>
+            <a:r>
+              <a:rPr lang="en-US" dirty="0" err="1"/>
+              <a:t>brza</a:t>
+            </a:r>
+            <a:r>
+              <a:rPr lang="en-US" dirty="0"/>
+              <a:t> </a:t>
+            </a:r>
+            <a:r>
+              <a:rPr lang="en-US" dirty="0" err="1"/>
+              <a:t>pretraga</a:t>
+            </a:r>
+            <a:r>
+              <a:rPr lang="en-US" dirty="0"/>
+              <a:t> po </a:t>
+            </a:r>
+            <a:r>
+              <a:rPr lang="en-US" dirty="0" err="1"/>
+              <a:t>jednakosti</a:t>
+            </a:r>
+            <a:r>
+              <a:rPr lang="en-US" dirty="0"/>
+              <a:t> </a:t>
+            </a:r>
+          </a:p>
+          <a:p>
+            <a:r>
+              <a:rPr lang="en-US" dirty="0" err="1"/>
+              <a:t>Manja</a:t>
+            </a:r>
+            <a:r>
+              <a:rPr lang="en-US" dirty="0"/>
+              <a:t> </a:t>
+            </a:r>
+            <a:r>
+              <a:rPr lang="en-US" dirty="0" err="1"/>
+              <a:t>veličina</a:t>
+            </a:r>
+            <a:r>
+              <a:rPr lang="en-US" dirty="0"/>
+              <a:t> </a:t>
+            </a:r>
+            <a:r>
+              <a:rPr lang="en-US" dirty="0" err="1"/>
+              <a:t>indeksa</a:t>
+            </a:r>
+            <a:r>
+              <a:rPr lang="en-US" dirty="0"/>
+              <a:t> </a:t>
+            </a:r>
+          </a:p>
+          <a:p>
+            <a:r>
+              <a:rPr lang="en-US" dirty="0" err="1"/>
+              <a:t>Jednostavna</a:t>
+            </a:r>
+            <a:r>
+              <a:rPr lang="en-US" dirty="0"/>
+              <a:t> </a:t>
+            </a:r>
+            <a:r>
+              <a:rPr lang="en-US" dirty="0" err="1"/>
+              <a:t>struktura</a:t>
+            </a:r>
+            <a:r>
+              <a:rPr lang="en-US" dirty="0"/>
+              <a:t> </a:t>
+            </a:r>
+          </a:p>
+          <a:p>
+            <a:r>
+              <a:rPr lang="en-US" dirty="0" err="1"/>
+              <a:t>Efikasan</a:t>
+            </a:r>
+            <a:r>
+              <a:rPr lang="en-US" dirty="0"/>
+              <a:t> za </a:t>
+            </a:r>
+            <a:r>
+              <a:rPr lang="en-US" dirty="0" err="1"/>
+              <a:t>veliki</a:t>
+            </a:r>
+            <a:r>
+              <a:rPr lang="en-US" dirty="0"/>
+              <a:t> </a:t>
+            </a:r>
+            <a:r>
+              <a:rPr lang="en-US" dirty="0" err="1"/>
+              <a:t>broj</a:t>
+            </a:r>
+            <a:r>
+              <a:rPr lang="en-US" dirty="0"/>
+              <a:t> </a:t>
+            </a:r>
+            <a:r>
+              <a:rPr lang="en-US" dirty="0" err="1"/>
+              <a:t>jedinstvenih</a:t>
+            </a:r>
+            <a:r>
+              <a:rPr lang="en-US" dirty="0"/>
+              <a:t> </a:t>
+            </a:r>
+            <a:r>
+              <a:rPr lang="en-US" dirty="0" err="1"/>
+              <a:t>vrednosti</a:t>
+            </a:r>
+            <a:r>
+              <a:rPr lang="en-US" dirty="0"/>
+              <a:t> </a:t>
+            </a:r>
+          </a:p>
+          <a:p>
+            <a:r>
+              <a:rPr lang="en-US" dirty="0" err="1"/>
+              <a:t>Idealno</a:t>
+            </a:r>
+            <a:r>
+              <a:rPr lang="en-US" dirty="0"/>
+              <a:t> za:</a:t>
+            </a:r>
+          </a:p>
+          <a:p>
+            <a:pPr lvl="1"/>
+            <a:r>
+              <a:rPr lang="en-US" dirty="0"/>
+              <a:t>ID </a:t>
+            </a:r>
+            <a:r>
+              <a:rPr lang="en-US" dirty="0" err="1"/>
+              <a:t>vrednosti</a:t>
+            </a:r>
+            <a:r>
+              <a:rPr lang="en-US" dirty="0"/>
+              <a:t> </a:t>
+            </a:r>
+          </a:p>
+          <a:p>
+            <a:pPr lvl="1"/>
+            <a:r>
+              <a:rPr lang="en-US" dirty="0"/>
+              <a:t>URL </a:t>
+            </a:r>
+            <a:r>
+              <a:rPr lang="en-US" dirty="0" err="1"/>
+              <a:t>adrese</a:t>
+            </a:r>
+            <a:r>
+              <a:rPr lang="en-US" dirty="0"/>
+              <a:t> </a:t>
+            </a:r>
+          </a:p>
+          <a:p>
+            <a:pPr lvl="1"/>
+            <a:r>
+              <a:rPr lang="en-US" dirty="0"/>
+              <a:t>Token-e </a:t>
+            </a:r>
+          </a:p>
+          <a:p>
+            <a:pPr lvl="1"/>
+            <a:r>
+              <a:rPr lang="en-US" dirty="0" err="1"/>
+              <a:t>Jedinstvene</a:t>
+            </a:r>
+            <a:r>
+              <a:rPr lang="en-US" dirty="0"/>
+              <a:t> </a:t>
+            </a:r>
+            <a:r>
+              <a:rPr lang="en-US" dirty="0" err="1"/>
+              <a:t>stringove</a:t>
+            </a:r>
+            <a:endParaRPr lang="en-US" dirty="0"/>
+          </a:p>
+          <a:p>
+            <a:endParaRPr lang="en-US" dirty="0"/>
+          </a:p>
+        </p:txBody>
+      </p:sp>
+    </p:spTree>
+    <p:extLst>
+      <p:ext uri="{BB962C8B-B14F-4D97-AF65-F5344CB8AC3E}">
+        <p14:creationId xmlns:p14="http://schemas.microsoft.com/office/powerpoint/2010/main" val="3444007921"/>
       </p:ext>
     </p:extLst>
   </p:cSld>
